--- a/Proje_Takvimi.pptx
+++ b/Proje_Takvimi.pptx
@@ -2,14 +2,14 @@
 <file path=ppt/presentation.xml><?xml version="1.0" encoding="utf-8"?>
 <p:presentation xmlns:p="http://schemas.openxmlformats.org/presentationml/2006/main">
   <p:sldMasterIdLst>
-    <p:sldMasterId xmlns:r="http://schemas.openxmlformats.org/officeDocument/2006/relationships" id="2147483648" r:id="R8025a3f7f7bd413b"/>
+    <p:sldMasterId xmlns:r="http://schemas.openxmlformats.org/officeDocument/2006/relationships" id="2147483648" r:id="Rfcb06edbabfc4324"/>
   </p:sldMasterIdLst>
   <p:notesMasterIdLst>
-    <p:notesMasterId xmlns:r="http://schemas.openxmlformats.org/officeDocument/2006/relationships" r:id="R567c4633c788420e"/>
+    <p:notesMasterId xmlns:r="http://schemas.openxmlformats.org/officeDocument/2006/relationships" r:id="Rb6ca07abe75c44bd"/>
   </p:notesMasterIdLst>
   <p:sldIdLst>
-    <p:sldId xmlns:r="http://schemas.openxmlformats.org/officeDocument/2006/relationships" id="256" r:id="R0d5cda412ccf465b"/>
-    <p:sldId xmlns:r="http://schemas.openxmlformats.org/officeDocument/2006/relationships" id="257" r:id="Rfb661ced00f74358"/>
+    <p:sldId xmlns:r="http://schemas.openxmlformats.org/officeDocument/2006/relationships" id="256" r:id="R3e8a0e2c743c42ff"/>
+    <p:sldId xmlns:r="http://schemas.openxmlformats.org/officeDocument/2006/relationships" id="257" r:id="R7839592aa95547fd"/>
   </p:sldIdLst>
   <p:sldSz cx="15240000" cy="8572500"/>
   <p:notesSz cx="6858000" cy="9144000"/>
@@ -443,7 +443,7 @@
           <a:lstStyle xmlns:a="http://schemas.openxmlformats.org/drawingml/2006/main"/>
           <a:p xmlns:a="http://schemas.openxmlformats.org/drawingml/2006/main">
             <a:r>
-              <a:t>Tek proje için doldurulabilir haftalık sunum örneği. Ad, tarihler, maliyetler, departmanlar ve riskler varsayımsal örneklerdir. Üretim tamamlanması önceki kullanıcı örneğindeki yüzde 30 ile başlar. Plan yüzde 40 örnektir. İlerleme farkı gerçek eksi plan = -10 yüzde puanı. Bitiş tahmini 20 Kasım 2026, baz plan 13 Kasım 2026: 7 takvim günü gecikme. Takvim başlıkları pazartesi başlayan haftaları gösterir. Güncel yazan turuncu hücreler revize çalışma haftasıdır, Plan yazan mavi hücreler baz takvimdir. Efor saatleri rapor tarihine kadar birikimlidir; kişi sayıları departman bazında farklı çalışanları temsil eder. 240 saat ve ortalama 1000 TL/saat, 240 bin TL gerçekleşen efor maliyetine karşılık gelir. Proje toplam tamamlanma oranı yönetici tarafından girilir, aşamaların aritmetik ortalaması değildir.</a:t>
+              <a:t>Tek proje yöneticisinin üç projelik haftalık özeti. Üretim Hattı yüzde 30 tamamlanması önceki kullanıcı örneğidir. Diğer oranlar, tüm tarihler, ekipler ve finans tutarları örnek veridir. Takvim sütunları 2026 yılındaki pazartesi hafta başlangıçlarını gösterir. Turuncu hücreler kritik teslimat veya testin bulunduğu haftalardır, gerçekleşmiş gecikme ölçüsü değildir. Üretim 10 yüzde puanı geride ve güncel bitişi 7 gün geçtir. Portal 5 yüzde puanı ileride ve güncel bitişi 3 gün erkendir. Depo planındadır. Her projede departman kişi ve saatleri toplanmıştır; aynı çalışan birden fazla projede çalışabileceği için projelerin kişi sayılarını benzersiz portföy kişi sayısı olarak toplamayın. Sıfır departman katkısı uzun çizgiyle gösterilir. Bilgi tekn. Bilgi Teknolojileri, Proje yön. Proje Yönetimidir. Geliş. geliştirme, Enteg. entegrasyondur. Efor saatleri rapor tarihine kadar birikimlidir.</a:t>
             </a:r>
           </a:p>
         </p:txBody>
@@ -513,7 +513,7 @@
           <a:lstStyle xmlns:a="http://schemas.openxmlformats.org/drawingml/2006/main"/>
           <a:p xmlns:a="http://schemas.openxmlformats.org/drawingml/2006/main">
             <a:r>
-              <a:t>Tüm maliyet ve bütçe tutarları örnektir, bin TL ve KDV hariçtir. Efor: gerçekleşen 240 + kalan 360 = 600. Alınan malzeme: 180. Alınacak malzeme: 320. Gerçekleşen toplam: 240 + 180 + 0 = 420. Kalan toplam: 360 + 0 + 320 = 680. Tahmini proje maliyeti: 420 + 680 = 1100. Bütçe: 1200. Öngörülen bütçe payı: 1200 - 1100 = 100; bu tutar bütçe eksi gerçekleşen harcama değildir. 1200 - 420 = 780 henüz harcanmamış bütçedir. Motor teslimi riski kurulum ve proje bitişini 7 gün öteleyebilir. Saha kapasitesi riski test kaynağını azaltabilir. Risklere ilişkin sorumlular ve aksiyon tarihleri tabloda gösterilir.</a:t>
+              <a:t>Tüm tutarlar örnek veri, bin TL, KDV hariçtir. Tahmini toplam = gerçek efor + alınan malzeme + kalan efor + alınacak malzeme. Üretim 240+180+360+320=1100, bütçesi1200, fark100. Portal220+60+270+300=850,bütçesi800,fark-50. Depo160+220+240+280=900,bütçesi950,fark50. Portföy tahmini toplam2850,bütçe2950,fark100. Pozitif bütçe farkı bütçe payı, negatif fark beklenen aşım anlamına gelir. Risk etkileri olası takvim etkisini belirtir; tüm risk etkilerini mevcut bitiş sapmasına otomatik eklemeyin. BT, Bilgi Teknolojileridir. Her projede bir tamamlanan iş ve bir tarihli/sorumlulu sıradaki iş gösterilir.</a:t>
             </a:r>
           </a:p>
         </p:txBody>
@@ -611,6 +611,7 @@
                 <a:spcPts val="0"/>
               </a:spcAft>
               <a:buNone/>
+              <a:defRPr/>
             </a:lvl1pPr>
             <a:lvl2pPr marL="0" indent="0">
               <a:lnSpc>
@@ -623,6 +624,7 @@
                 <a:spcPts val="0"/>
               </a:spcAft>
               <a:buNone/>
+              <a:defRPr/>
             </a:lvl2pPr>
             <a:lvl3pPr marL="0" indent="0">
               <a:lnSpc>
@@ -635,6 +637,7 @@
                 <a:spcPts val="0"/>
               </a:spcAft>
               <a:buNone/>
+              <a:defRPr/>
             </a:lvl3pPr>
             <a:lvl4pPr marL="0" indent="0">
               <a:lnSpc>
@@ -647,6 +650,7 @@
                 <a:spcPts val="0"/>
               </a:spcAft>
               <a:buNone/>
+              <a:defRPr/>
             </a:lvl4pPr>
             <a:lvl5pPr marL="0" indent="0">
               <a:lnSpc>
@@ -659,6 +663,7 @@
                 <a:spcPts val="0"/>
               </a:spcAft>
               <a:buNone/>
+              <a:defRPr/>
             </a:lvl5pPr>
             <a:lvl6pPr marL="0" indent="0">
               <a:lnSpc>
@@ -671,6 +676,7 @@
                 <a:spcPts val="0"/>
               </a:spcAft>
               <a:buNone/>
+              <a:defRPr/>
             </a:lvl6pPr>
             <a:lvl7pPr marL="0" indent="0">
               <a:lnSpc>
@@ -683,6 +689,7 @@
                 <a:spcPts val="0"/>
               </a:spcAft>
               <a:buNone/>
+              <a:defRPr/>
             </a:lvl7pPr>
             <a:lvl8pPr marL="0" indent="0">
               <a:lnSpc>
@@ -695,6 +702,7 @@
                 <a:spcPts val="0"/>
               </a:spcAft>
               <a:buNone/>
+              <a:defRPr/>
             </a:lvl8pPr>
             <a:lvl9pPr marL="0" indent="0">
               <a:lnSpc>
@@ -707,6 +715,7 @@
                 <a:spcPts val="0"/>
               </a:spcAft>
               <a:buNone/>
+              <a:defRPr/>
             </a:lvl9pPr>
           </a:lstStyle>
           <a:p xmlns:a="http://schemas.openxmlformats.org/drawingml/2006/main"/>
@@ -768,6 +777,7 @@
                 <a:spcPts val="0"/>
               </a:spcAft>
               <a:buNone/>
+              <a:defRPr/>
             </a:lvl1pPr>
             <a:lvl2pPr marL="0" indent="0">
               <a:lnSpc>
@@ -780,6 +790,7 @@
                 <a:spcPts val="0"/>
               </a:spcAft>
               <a:buNone/>
+              <a:defRPr/>
             </a:lvl2pPr>
             <a:lvl3pPr marL="0" indent="0">
               <a:lnSpc>
@@ -792,6 +803,7 @@
                 <a:spcPts val="0"/>
               </a:spcAft>
               <a:buNone/>
+              <a:defRPr/>
             </a:lvl3pPr>
             <a:lvl4pPr marL="0" indent="0">
               <a:lnSpc>
@@ -804,6 +816,7 @@
                 <a:spcPts val="0"/>
               </a:spcAft>
               <a:buNone/>
+              <a:defRPr/>
             </a:lvl4pPr>
             <a:lvl5pPr marL="0" indent="0">
               <a:lnSpc>
@@ -816,6 +829,7 @@
                 <a:spcPts val="0"/>
               </a:spcAft>
               <a:buNone/>
+              <a:defRPr/>
             </a:lvl5pPr>
             <a:lvl6pPr marL="0" indent="0">
               <a:lnSpc>
@@ -828,6 +842,7 @@
                 <a:spcPts val="0"/>
               </a:spcAft>
               <a:buNone/>
+              <a:defRPr/>
             </a:lvl6pPr>
             <a:lvl7pPr marL="0" indent="0">
               <a:lnSpc>
@@ -840,6 +855,7 @@
                 <a:spcPts val="0"/>
               </a:spcAft>
               <a:buNone/>
+              <a:defRPr/>
             </a:lvl7pPr>
             <a:lvl8pPr marL="0" indent="0">
               <a:lnSpc>
@@ -852,6 +868,7 @@
                 <a:spcPts val="0"/>
               </a:spcAft>
               <a:buNone/>
+              <a:defRPr/>
             </a:lvl8pPr>
             <a:lvl9pPr marL="0" indent="0">
               <a:lnSpc>
@@ -864,6 +881,7 @@
                 <a:spcPts val="0"/>
               </a:spcAft>
               <a:buNone/>
+              <a:defRPr/>
             </a:lvl9pPr>
           </a:lstStyle>
           <a:p xmlns:a="http://schemas.openxmlformats.org/drawingml/2006/main"/>
@@ -942,6 +960,7 @@
                 <a:spcPts val="0"/>
               </a:spcAft>
               <a:buNone/>
+              <a:defRPr/>
             </a:lvl1pPr>
             <a:lvl2pPr marL="0" indent="0">
               <a:lnSpc>
@@ -954,6 +973,7 @@
                 <a:spcPts val="0"/>
               </a:spcAft>
               <a:buNone/>
+              <a:defRPr/>
             </a:lvl2pPr>
             <a:lvl3pPr marL="0" indent="0">
               <a:lnSpc>
@@ -966,6 +986,7 @@
                 <a:spcPts val="0"/>
               </a:spcAft>
               <a:buNone/>
+              <a:defRPr/>
             </a:lvl3pPr>
             <a:lvl4pPr marL="0" indent="0">
               <a:lnSpc>
@@ -978,6 +999,7 @@
                 <a:spcPts val="0"/>
               </a:spcAft>
               <a:buNone/>
+              <a:defRPr/>
             </a:lvl4pPr>
             <a:lvl5pPr marL="0" indent="0">
               <a:lnSpc>
@@ -990,6 +1012,7 @@
                 <a:spcPts val="0"/>
               </a:spcAft>
               <a:buNone/>
+              <a:defRPr/>
             </a:lvl5pPr>
             <a:lvl6pPr marL="0" indent="0">
               <a:lnSpc>
@@ -1002,6 +1025,7 @@
                 <a:spcPts val="0"/>
               </a:spcAft>
               <a:buNone/>
+              <a:defRPr/>
             </a:lvl6pPr>
             <a:lvl7pPr marL="0" indent="0">
               <a:lnSpc>
@@ -1014,6 +1038,7 @@
                 <a:spcPts val="0"/>
               </a:spcAft>
               <a:buNone/>
+              <a:defRPr/>
             </a:lvl7pPr>
             <a:lvl8pPr marL="0" indent="0">
               <a:lnSpc>
@@ -1026,6 +1051,7 @@
                 <a:spcPts val="0"/>
               </a:spcAft>
               <a:buNone/>
+              <a:defRPr/>
             </a:lvl8pPr>
             <a:lvl9pPr marL="0" indent="0">
               <a:lnSpc>
@@ -1038,6 +1064,7 @@
                 <a:spcPts val="0"/>
               </a:spcAft>
               <a:buNone/>
+              <a:defRPr/>
             </a:lvl9pPr>
           </a:lstStyle>
           <a:p xmlns:a="http://schemas.openxmlformats.org/drawingml/2006/main"/>
@@ -1116,6 +1143,7 @@
                 <a:spcPts val="0"/>
               </a:spcAft>
               <a:buNone/>
+              <a:defRPr/>
             </a:lvl1pPr>
             <a:lvl2pPr marL="0" indent="0">
               <a:lnSpc>
@@ -1128,6 +1156,7 @@
                 <a:spcPts val="0"/>
               </a:spcAft>
               <a:buNone/>
+              <a:defRPr/>
             </a:lvl2pPr>
             <a:lvl3pPr marL="0" indent="0">
               <a:lnSpc>
@@ -1140,6 +1169,7 @@
                 <a:spcPts val="0"/>
               </a:spcAft>
               <a:buNone/>
+              <a:defRPr/>
             </a:lvl3pPr>
             <a:lvl4pPr marL="0" indent="0">
               <a:lnSpc>
@@ -1152,6 +1182,7 @@
                 <a:spcPts val="0"/>
               </a:spcAft>
               <a:buNone/>
+              <a:defRPr/>
             </a:lvl4pPr>
             <a:lvl5pPr marL="0" indent="0">
               <a:lnSpc>
@@ -1164,6 +1195,7 @@
                 <a:spcPts val="0"/>
               </a:spcAft>
               <a:buNone/>
+              <a:defRPr/>
             </a:lvl5pPr>
             <a:lvl6pPr marL="0" indent="0">
               <a:lnSpc>
@@ -1176,6 +1208,7 @@
                 <a:spcPts val="0"/>
               </a:spcAft>
               <a:buNone/>
+              <a:defRPr/>
             </a:lvl6pPr>
             <a:lvl7pPr marL="0" indent="0">
               <a:lnSpc>
@@ -1188,6 +1221,7 @@
                 <a:spcPts val="0"/>
               </a:spcAft>
               <a:buNone/>
+              <a:defRPr/>
             </a:lvl7pPr>
             <a:lvl8pPr marL="0" indent="0">
               <a:lnSpc>
@@ -1200,6 +1234,7 @@
                 <a:spcPts val="0"/>
               </a:spcAft>
               <a:buNone/>
+              <a:defRPr/>
             </a:lvl8pPr>
             <a:lvl9pPr marL="0" indent="0">
               <a:lnSpc>
@@ -1212,6 +1247,7 @@
                 <a:spcPts val="0"/>
               </a:spcAft>
               <a:buNone/>
+              <a:defRPr/>
             </a:lvl9pPr>
           </a:lstStyle>
           <a:p xmlns:a="http://schemas.openxmlformats.org/drawingml/2006/main"/>
@@ -1273,6 +1309,7 @@
                 <a:spcPts val="1500"/>
               </a:spcAft>
               <a:buChar char="•"/>
+              <a:defRPr/>
             </a:lvl1pPr>
             <a:lvl2pPr marL="666750" indent="-285750">
               <a:lnSpc>
@@ -1285,6 +1322,7 @@
                 <a:spcPts val="1500"/>
               </a:spcAft>
               <a:buChar char="•"/>
+              <a:defRPr/>
             </a:lvl2pPr>
             <a:lvl3pPr marL="1047750" indent="-285750">
               <a:lnSpc>
@@ -1297,6 +1335,7 @@
                 <a:spcPts val="1500"/>
               </a:spcAft>
               <a:buChar char="•"/>
+              <a:defRPr/>
             </a:lvl3pPr>
             <a:lvl4pPr marL="1428750" indent="-285750">
               <a:lnSpc>
@@ -1309,6 +1348,7 @@
                 <a:spcPts val="1500"/>
               </a:spcAft>
               <a:buChar char="•"/>
+              <a:defRPr/>
             </a:lvl4pPr>
             <a:lvl5pPr marL="1809750" indent="-285750">
               <a:lnSpc>
@@ -1321,6 +1361,7 @@
                 <a:spcPts val="1500"/>
               </a:spcAft>
               <a:buChar char="•"/>
+              <a:defRPr/>
             </a:lvl5pPr>
             <a:lvl6pPr marL="2190750" indent="-285750">
               <a:lnSpc>
@@ -1333,6 +1374,7 @@
                 <a:spcPts val="1500"/>
               </a:spcAft>
               <a:buChar char="•"/>
+              <a:defRPr/>
             </a:lvl6pPr>
             <a:lvl7pPr marL="2571750" indent="-285750">
               <a:lnSpc>
@@ -1345,6 +1387,7 @@
                 <a:spcPts val="1500"/>
               </a:spcAft>
               <a:buChar char="•"/>
+              <a:defRPr/>
             </a:lvl7pPr>
             <a:lvl8pPr marL="2952750" indent="-285750">
               <a:lnSpc>
@@ -1357,6 +1400,7 @@
                 <a:spcPts val="1500"/>
               </a:spcAft>
               <a:buChar char="•"/>
+              <a:defRPr/>
             </a:lvl8pPr>
             <a:lvl9pPr marL="3333750" indent="-285750">
               <a:lnSpc>
@@ -1369,6 +1413,7 @@
                 <a:spcPts val="1500"/>
               </a:spcAft>
               <a:buChar char="•"/>
+              <a:defRPr/>
             </a:lvl9pPr>
           </a:lstStyle>
           <a:p xmlns:a="http://schemas.openxmlformats.org/drawingml/2006/main"/>
@@ -1447,6 +1492,7 @@
                 <a:spcPts val="0"/>
               </a:spcAft>
               <a:buNone/>
+              <a:defRPr/>
             </a:lvl1pPr>
             <a:lvl2pPr marL="0" indent="0">
               <a:lnSpc>
@@ -1459,6 +1505,7 @@
                 <a:spcPts val="0"/>
               </a:spcAft>
               <a:buNone/>
+              <a:defRPr/>
             </a:lvl2pPr>
             <a:lvl3pPr marL="0" indent="0">
               <a:lnSpc>
@@ -1471,6 +1518,7 @@
                 <a:spcPts val="0"/>
               </a:spcAft>
               <a:buNone/>
+              <a:defRPr/>
             </a:lvl3pPr>
             <a:lvl4pPr marL="0" indent="0">
               <a:lnSpc>
@@ -1483,6 +1531,7 @@
                 <a:spcPts val="0"/>
               </a:spcAft>
               <a:buNone/>
+              <a:defRPr/>
             </a:lvl4pPr>
             <a:lvl5pPr marL="0" indent="0">
               <a:lnSpc>
@@ -1495,6 +1544,7 @@
                 <a:spcPts val="0"/>
               </a:spcAft>
               <a:buNone/>
+              <a:defRPr/>
             </a:lvl5pPr>
             <a:lvl6pPr marL="0" indent="0">
               <a:lnSpc>
@@ -1507,6 +1557,7 @@
                 <a:spcPts val="0"/>
               </a:spcAft>
               <a:buNone/>
+              <a:defRPr/>
             </a:lvl6pPr>
             <a:lvl7pPr marL="0" indent="0">
               <a:lnSpc>
@@ -1519,6 +1570,7 @@
                 <a:spcPts val="0"/>
               </a:spcAft>
               <a:buNone/>
+              <a:defRPr/>
             </a:lvl7pPr>
             <a:lvl8pPr marL="0" indent="0">
               <a:lnSpc>
@@ -1531,6 +1583,7 @@
                 <a:spcPts val="0"/>
               </a:spcAft>
               <a:buNone/>
+              <a:defRPr/>
             </a:lvl8pPr>
             <a:lvl9pPr marL="0" indent="0">
               <a:lnSpc>
@@ -1543,6 +1596,7 @@
                 <a:spcPts val="0"/>
               </a:spcAft>
               <a:buNone/>
+              <a:defRPr/>
             </a:lvl9pPr>
           </a:lstStyle>
           <a:p xmlns:a="http://schemas.openxmlformats.org/drawingml/2006/main"/>
@@ -1604,6 +1658,7 @@
                 <a:spcPts val="1500"/>
               </a:spcAft>
               <a:buChar char="•"/>
+              <a:defRPr/>
             </a:lvl1pPr>
             <a:lvl2pPr marL="666750" indent="-285750">
               <a:lnSpc>
@@ -1616,6 +1671,7 @@
                 <a:spcPts val="1500"/>
               </a:spcAft>
               <a:buChar char="•"/>
+              <a:defRPr/>
             </a:lvl2pPr>
             <a:lvl3pPr marL="1047750" indent="-285750">
               <a:lnSpc>
@@ -1628,6 +1684,7 @@
                 <a:spcPts val="1500"/>
               </a:spcAft>
               <a:buChar char="•"/>
+              <a:defRPr/>
             </a:lvl3pPr>
             <a:lvl4pPr marL="1428750" indent="-285750">
               <a:lnSpc>
@@ -1640,6 +1697,7 @@
                 <a:spcPts val="1500"/>
               </a:spcAft>
               <a:buChar char="•"/>
+              <a:defRPr/>
             </a:lvl4pPr>
             <a:lvl5pPr marL="1809750" indent="-285750">
               <a:lnSpc>
@@ -1652,6 +1710,7 @@
                 <a:spcPts val="1500"/>
               </a:spcAft>
               <a:buChar char="•"/>
+              <a:defRPr/>
             </a:lvl5pPr>
             <a:lvl6pPr marL="2190750" indent="-285750">
               <a:lnSpc>
@@ -1664,6 +1723,7 @@
                 <a:spcPts val="1500"/>
               </a:spcAft>
               <a:buChar char="•"/>
+              <a:defRPr/>
             </a:lvl6pPr>
             <a:lvl7pPr marL="2571750" indent="-285750">
               <a:lnSpc>
@@ -1676,6 +1736,7 @@
                 <a:spcPts val="1500"/>
               </a:spcAft>
               <a:buChar char="•"/>
+              <a:defRPr/>
             </a:lvl7pPr>
             <a:lvl8pPr marL="2952750" indent="-285750">
               <a:lnSpc>
@@ -1688,6 +1749,7 @@
                 <a:spcPts val="1500"/>
               </a:spcAft>
               <a:buChar char="•"/>
+              <a:defRPr/>
             </a:lvl8pPr>
             <a:lvl9pPr marL="3333750" indent="-285750">
               <a:lnSpc>
@@ -1700,6 +1762,7 @@
                 <a:spcPts val="1500"/>
               </a:spcAft>
               <a:buChar char="•"/>
+              <a:defRPr/>
             </a:lvl9pPr>
           </a:lstStyle>
           <a:p xmlns:a="http://schemas.openxmlformats.org/drawingml/2006/main"/>
@@ -1761,6 +1824,7 @@
                 <a:spcPts val="1500"/>
               </a:spcAft>
               <a:buChar char="•"/>
+              <a:defRPr/>
             </a:lvl1pPr>
             <a:lvl2pPr marL="666750" indent="-285750">
               <a:lnSpc>
@@ -1773,6 +1837,7 @@
                 <a:spcPts val="1500"/>
               </a:spcAft>
               <a:buChar char="•"/>
+              <a:defRPr/>
             </a:lvl2pPr>
             <a:lvl3pPr marL="1047750" indent="-285750">
               <a:lnSpc>
@@ -1785,6 +1850,7 @@
                 <a:spcPts val="1500"/>
               </a:spcAft>
               <a:buChar char="•"/>
+              <a:defRPr/>
             </a:lvl3pPr>
             <a:lvl4pPr marL="1428750" indent="-285750">
               <a:lnSpc>
@@ -1797,6 +1863,7 @@
                 <a:spcPts val="1500"/>
               </a:spcAft>
               <a:buChar char="•"/>
+              <a:defRPr/>
             </a:lvl4pPr>
             <a:lvl5pPr marL="1809750" indent="-285750">
               <a:lnSpc>
@@ -1809,6 +1876,7 @@
                 <a:spcPts val="1500"/>
               </a:spcAft>
               <a:buChar char="•"/>
+              <a:defRPr/>
             </a:lvl5pPr>
             <a:lvl6pPr marL="2190750" indent="-285750">
               <a:lnSpc>
@@ -1821,6 +1889,7 @@
                 <a:spcPts val="1500"/>
               </a:spcAft>
               <a:buChar char="•"/>
+              <a:defRPr/>
             </a:lvl6pPr>
             <a:lvl7pPr marL="2571750" indent="-285750">
               <a:lnSpc>
@@ -1833,6 +1902,7 @@
                 <a:spcPts val="1500"/>
               </a:spcAft>
               <a:buChar char="•"/>
+              <a:defRPr/>
             </a:lvl7pPr>
             <a:lvl8pPr marL="2952750" indent="-285750">
               <a:lnSpc>
@@ -1845,6 +1915,7 @@
                 <a:spcPts val="1500"/>
               </a:spcAft>
               <a:buChar char="•"/>
+              <a:defRPr/>
             </a:lvl8pPr>
             <a:lvl9pPr marL="3333750" indent="-285750">
               <a:lnSpc>
@@ -1857,6 +1928,7 @@
                 <a:spcPts val="1500"/>
               </a:spcAft>
               <a:buChar char="•"/>
+              <a:defRPr/>
             </a:lvl9pPr>
           </a:lstStyle>
           <a:p xmlns:a="http://schemas.openxmlformats.org/drawingml/2006/main"/>
@@ -1935,6 +2007,7 @@
                 <a:spcPts val="0"/>
               </a:spcAft>
               <a:buNone/>
+              <a:defRPr/>
             </a:lvl1pPr>
             <a:lvl2pPr marL="0" indent="0">
               <a:lnSpc>
@@ -1947,6 +2020,7 @@
                 <a:spcPts val="0"/>
               </a:spcAft>
               <a:buNone/>
+              <a:defRPr/>
             </a:lvl2pPr>
             <a:lvl3pPr marL="0" indent="0">
               <a:lnSpc>
@@ -1959,6 +2033,7 @@
                 <a:spcPts val="0"/>
               </a:spcAft>
               <a:buNone/>
+              <a:defRPr/>
             </a:lvl3pPr>
             <a:lvl4pPr marL="0" indent="0">
               <a:lnSpc>
@@ -1971,6 +2046,7 @@
                 <a:spcPts val="0"/>
               </a:spcAft>
               <a:buNone/>
+              <a:defRPr/>
             </a:lvl4pPr>
             <a:lvl5pPr marL="0" indent="0">
               <a:lnSpc>
@@ -1983,6 +2059,7 @@
                 <a:spcPts val="0"/>
               </a:spcAft>
               <a:buNone/>
+              <a:defRPr/>
             </a:lvl5pPr>
             <a:lvl6pPr marL="0" indent="0">
               <a:lnSpc>
@@ -1995,6 +2072,7 @@
                 <a:spcPts val="0"/>
               </a:spcAft>
               <a:buNone/>
+              <a:defRPr/>
             </a:lvl6pPr>
             <a:lvl7pPr marL="0" indent="0">
               <a:lnSpc>
@@ -2007,6 +2085,7 @@
                 <a:spcPts val="0"/>
               </a:spcAft>
               <a:buNone/>
+              <a:defRPr/>
             </a:lvl7pPr>
             <a:lvl8pPr marL="0" indent="0">
               <a:lnSpc>
@@ -2019,6 +2098,7 @@
                 <a:spcPts val="0"/>
               </a:spcAft>
               <a:buNone/>
+              <a:defRPr/>
             </a:lvl8pPr>
             <a:lvl9pPr marL="0" indent="0">
               <a:lnSpc>
@@ -2031,6 +2111,7 @@
                 <a:spcPts val="0"/>
               </a:spcAft>
               <a:buNone/>
+              <a:defRPr/>
             </a:lvl9pPr>
           </a:lstStyle>
           <a:p xmlns:a="http://schemas.openxmlformats.org/drawingml/2006/main"/>
@@ -2092,6 +2173,7 @@
                 <a:spcPts val="1500"/>
               </a:spcAft>
               <a:buChar char="•"/>
+              <a:defRPr/>
             </a:lvl1pPr>
             <a:lvl2pPr marL="666750" indent="-285750">
               <a:lnSpc>
@@ -2104,6 +2186,7 @@
                 <a:spcPts val="1500"/>
               </a:spcAft>
               <a:buChar char="•"/>
+              <a:defRPr/>
             </a:lvl2pPr>
             <a:lvl3pPr marL="1047750" indent="-285750">
               <a:lnSpc>
@@ -2116,6 +2199,7 @@
                 <a:spcPts val="1500"/>
               </a:spcAft>
               <a:buChar char="•"/>
+              <a:defRPr/>
             </a:lvl3pPr>
             <a:lvl4pPr marL="1428750" indent="-285750">
               <a:lnSpc>
@@ -2128,6 +2212,7 @@
                 <a:spcPts val="1500"/>
               </a:spcAft>
               <a:buChar char="•"/>
+              <a:defRPr/>
             </a:lvl4pPr>
             <a:lvl5pPr marL="1809750" indent="-285750">
               <a:lnSpc>
@@ -2140,6 +2225,7 @@
                 <a:spcPts val="1500"/>
               </a:spcAft>
               <a:buChar char="•"/>
+              <a:defRPr/>
             </a:lvl5pPr>
             <a:lvl6pPr marL="2190750" indent="-285750">
               <a:lnSpc>
@@ -2152,6 +2238,7 @@
                 <a:spcPts val="1500"/>
               </a:spcAft>
               <a:buChar char="•"/>
+              <a:defRPr/>
             </a:lvl6pPr>
             <a:lvl7pPr marL="2571750" indent="-285750">
               <a:lnSpc>
@@ -2164,6 +2251,7 @@
                 <a:spcPts val="1500"/>
               </a:spcAft>
               <a:buChar char="•"/>
+              <a:defRPr/>
             </a:lvl7pPr>
             <a:lvl8pPr marL="2952750" indent="-285750">
               <a:lnSpc>
@@ -2176,6 +2264,7 @@
                 <a:spcPts val="1500"/>
               </a:spcAft>
               <a:buChar char="•"/>
+              <a:defRPr/>
             </a:lvl8pPr>
             <a:lvl9pPr marL="3333750" indent="-285750">
               <a:lnSpc>
@@ -2188,6 +2277,7 @@
                 <a:spcPts val="1500"/>
               </a:spcAft>
               <a:buChar char="•"/>
+              <a:defRPr/>
             </a:lvl9pPr>
           </a:lstStyle>
           <a:p xmlns:a="http://schemas.openxmlformats.org/drawingml/2006/main"/>
@@ -2236,12 +2326,12 @@
   </p:cSld>
   <p:clrMap bg1="lt1" tx1="dk1" bg2="lt2" tx2="dk2" accent1="accent1" accent2="accent2" accent3="accent3" accent4="accent4" accent5="accent5" accent6="accent6" hlink="hlink" folHlink="folHlink"/>
   <p:sldLayoutIdLst>
-    <p:sldLayoutId xmlns:r="http://schemas.openxmlformats.org/officeDocument/2006/relationships" id="2147483649" r:id="R7d6d2a02d9cf4b4e"/>
-    <p:sldLayoutId xmlns:r="http://schemas.openxmlformats.org/officeDocument/2006/relationships" id="2147483650" r:id="Rf8ada72261fe46cc"/>
-    <p:sldLayoutId xmlns:r="http://schemas.openxmlformats.org/officeDocument/2006/relationships" id="2147483651" r:id="R36dc7504d7f14f79"/>
-    <p:sldLayoutId xmlns:r="http://schemas.openxmlformats.org/officeDocument/2006/relationships" id="2147483652" r:id="R80436848c8f84d9b"/>
-    <p:sldLayoutId xmlns:r="http://schemas.openxmlformats.org/officeDocument/2006/relationships" id="2147483653" r:id="R6732539328084d9c"/>
-    <p:sldLayoutId xmlns:r="http://schemas.openxmlformats.org/officeDocument/2006/relationships" id="2147483654" r:id="R05742ff555a04ddf"/>
+    <p:sldLayoutId xmlns:r="http://schemas.openxmlformats.org/officeDocument/2006/relationships" id="2147483649" r:id="Rc15a8717f2b54dd4"/>
+    <p:sldLayoutId xmlns:r="http://schemas.openxmlformats.org/officeDocument/2006/relationships" id="2147483650" r:id="Ra285c93d8c5a4ca6"/>
+    <p:sldLayoutId xmlns:r="http://schemas.openxmlformats.org/officeDocument/2006/relationships" id="2147483651" r:id="Rf8b56b74d3a049d7"/>
+    <p:sldLayoutId xmlns:r="http://schemas.openxmlformats.org/officeDocument/2006/relationships" id="2147483652" r:id="Rd996ca57fede4e65"/>
+    <p:sldLayoutId xmlns:r="http://schemas.openxmlformats.org/officeDocument/2006/relationships" id="2147483653" r:id="Rf3cc42f6b9ec4512"/>
+    <p:sldLayoutId xmlns:r="http://schemas.openxmlformats.org/officeDocument/2006/relationships" id="2147483654" r:id="R0773a9f894464415"/>
   </p:sldLayoutIdLst>
   <p:txStyles>
     <p:titleStyle>
@@ -2779,7 +2869,7 @@
           <a:lstStyle xmlns:a="http://schemas.openxmlformats.org/drawingml/2006/main"/>
           <a:p xmlns:a="http://schemas.openxmlformats.org/drawingml/2006/main">
             <a:r>
-              <a:rPr sz="2025" b="1">
+              <a:rPr sz="1875" b="1">
                 <a:solidFill>
                   <a:srgbClr val="14344B"/>
                 </a:solidFill>
@@ -2787,7 +2877,7 @@
                 <a:ea typeface="Liberation Sans"/>
                 <a:cs typeface="Liberation Sans"/>
               </a:rPr>
-              <a:t>Tamamlanma durumu</a:t>
+              <a:t>Tamamlanma: gerçek ve plan</a:t>
             </a:r>
           </a:p>
         </c:rich>
@@ -2798,7 +2888,7 @@
         <a:lstStyle xmlns:a="http://schemas.openxmlformats.org/drawingml/2006/main"/>
         <a:p xmlns:a="http://schemas.openxmlformats.org/drawingml/2006/main">
           <a:pPr>
-            <a:defRPr sz="2025" b="1">
+            <a:defRPr sz="1875" b="1">
               <a:solidFill>
                 <a:srgbClr val="14344B"/>
               </a:solidFill>
@@ -2819,51 +2909,91 @@
           <c:idx val="0"/>
           <c:order val="0"/>
           <c:tx>
-            <c:v>Tamamlanma (%)</c:v>
+            <c:v>Gerçek</c:v>
           </c:tx>
-          <c:dPt>
-            <c:idx val="0"/>
-            <c:invertIfNegative val="0"/>
-            <c:spPr>
-              <a:solidFill xmlns:a="http://schemas.openxmlformats.org/drawingml/2006/main">
-                <a:srgbClr val="B8CEF0"/>
-              </a:solidFill>
-            </c:spPr>
-          </c:dPt>
-          <c:dPt>
-            <c:idx val="1"/>
-            <c:invertIfNegative val="0"/>
-            <c:spPr>
-              <a:solidFill xmlns:a="http://schemas.openxmlformats.org/drawingml/2006/main">
-                <a:srgbClr val="2563EB"/>
-              </a:solidFill>
-            </c:spPr>
-          </c:dPt>
+          <c:spPr>
+            <a:solidFill xmlns:a="http://schemas.openxmlformats.org/drawingml/2006/main">
+              <a:srgbClr val="2563EB"/>
+            </a:solidFill>
+          </c:spPr>
           <c:cat>
             <c:strRef>
-              <c:f>'Chart Data'!$A$2:$A$3</c:f>
+              <c:f>'Chart Data'!$A$2:$A$4</c:f>
               <c:strCache>
-                <c:ptCount val="2"/>
+                <c:ptCount val="3"/>
                 <c:pt idx="0">
-                  <c:v>Plan</c:v>
+                  <c:v>Üretim Hattı</c:v>
                 </c:pt>
                 <c:pt idx="1">
-                  <c:v>Gerçek</c:v>
+                  <c:v>Müşteri Portalı</c:v>
+                </c:pt>
+                <c:pt idx="2">
+                  <c:v>Depo Otomasyonu</c:v>
                 </c:pt>
               </c:strCache>
             </c:strRef>
           </c:cat>
           <c:val>
             <c:numRef>
-              <c:f>'Chart Data'!$B$2:$B$3</c:f>
+              <c:f>'Chart Data'!$B$2:$B$4</c:f>
               <c:numCache>
                 <c:formatCode>0"%"</c:formatCode>
-                <c:ptCount val="2"/>
+                <c:ptCount val="3"/>
+                <c:pt idx="0">
+                  <c:v>30</c:v>
+                </c:pt>
+                <c:pt idx="1">
+                  <c:v>65</c:v>
+                </c:pt>
+                <c:pt idx="2">
+                  <c:v>45</c:v>
+                </c:pt>
+              </c:numCache>
+            </c:numRef>
+          </c:val>
+        </c:ser>
+        <c:ser>
+          <c:idx val="1"/>
+          <c:order val="1"/>
+          <c:tx>
+            <c:v>Plan</c:v>
+          </c:tx>
+          <c:spPr>
+            <a:solidFill xmlns:a="http://schemas.openxmlformats.org/drawingml/2006/main">
+              <a:srgbClr val="B8CEF0"/>
+            </a:solidFill>
+          </c:spPr>
+          <c:cat>
+            <c:strRef>
+              <c:f>'Chart Data'!$C$2:$C$4</c:f>
+              <c:strCache>
+                <c:ptCount val="3"/>
+                <c:pt idx="0">
+                  <c:v>Üretim Hattı</c:v>
+                </c:pt>
+                <c:pt idx="1">
+                  <c:v>Müşteri Portalı</c:v>
+                </c:pt>
+                <c:pt idx="2">
+                  <c:v>Depo Otomasyonu</c:v>
+                </c:pt>
+              </c:strCache>
+            </c:strRef>
+          </c:cat>
+          <c:val>
+            <c:numRef>
+              <c:f>'Chart Data'!$D$2:$D$4</c:f>
+              <c:numCache>
+                <c:formatCode>0"%"</c:formatCode>
+                <c:ptCount val="3"/>
                 <c:pt idx="0">
                   <c:v>40</c:v>
                 </c:pt>
                 <c:pt idx="1">
-                  <c:v>30</c:v>
+                  <c:v>60</c:v>
+                </c:pt>
+                <c:pt idx="2">
+                  <c:v>45</c:v>
                 </c:pt>
               </c:numCache>
             </c:numRef>
@@ -2876,7 +3006,7 @@
             <a:lstStyle xmlns:a="http://schemas.openxmlformats.org/drawingml/2006/main"/>
             <a:p xmlns:a="http://schemas.openxmlformats.org/drawingml/2006/main">
               <a:pPr>
-                <a:defRPr sz="2400" b="1">
+                <a:defRPr sz="1500" b="1">
                   <a:solidFill>
                     <a:srgbClr val="14344B"/>
                   </a:solidFill>
@@ -2896,7 +3026,8 @@
           <c:showBubbleSize val="0"/>
           <c:showLeaderLines val="0"/>
         </c:dLbls>
-        <c:gapWidth val="95"/>
+        <c:gapWidth val="55"/>
+        <c:overlap val="0"/>
         <c:axId val="48650112"/>
         <c:axId val="48672768"/>
       </c:barChart>
@@ -2922,7 +3053,7 @@
           <a:lstStyle xmlns:a="http://schemas.openxmlformats.org/drawingml/2006/main"/>
           <a:p xmlns:a="http://schemas.openxmlformats.org/drawingml/2006/main">
             <a:pPr>
-              <a:defRPr sz="1800">
+              <a:defRPr sz="1575">
                 <a:solidFill>
                   <a:srgbClr val="273F50"/>
                 </a:solidFill>
@@ -2970,7 +3101,7 @@
           <a:lstStyle xmlns:a="http://schemas.openxmlformats.org/drawingml/2006/main"/>
           <a:p xmlns:a="http://schemas.openxmlformats.org/drawingml/2006/main">
             <a:pPr>
-              <a:defRPr sz="1425">
+              <a:defRPr sz="1350">
                 <a:solidFill>
                   <a:srgbClr val="61778A"/>
                 </a:solidFill>
@@ -2991,6 +3122,26 @@
         </a:solidFill>
       </c:spPr>
     </c:plotArea>
+    <c:legend>
+      <c:legendPos val="b"/>
+      <c:overlay val="0"/>
+      <c:txPr>
+        <a:bodyPr xmlns:a="http://schemas.openxmlformats.org/drawingml/2006/main" anchorCtr="1"/>
+        <a:lstStyle xmlns:a="http://schemas.openxmlformats.org/drawingml/2006/main"/>
+        <a:p xmlns:a="http://schemas.openxmlformats.org/drawingml/2006/main">
+          <a:pPr>
+            <a:defRPr sz="1500">
+              <a:solidFill>
+                <a:srgbClr val="61778A"/>
+              </a:solidFill>
+              <a:latin typeface="Liberation Sans"/>
+              <a:ea typeface="Liberation Sans"/>
+              <a:cs typeface="Liberation Sans"/>
+            </a:defRPr>
+          </a:pPr>
+        </a:p>
+      </c:txPr>
+    </c:legend>
     <c:plotVisOnly val="1"/>
   </c:chart>
   <c:spPr>
@@ -3015,7 +3166,7 @@
           <a:lstStyle xmlns:a="http://schemas.openxmlformats.org/drawingml/2006/main"/>
           <a:p xmlns:a="http://schemas.openxmlformats.org/drawingml/2006/main">
             <a:r>
-              <a:rPr sz="1875" b="1">
+              <a:rPr sz="1800" b="1">
                 <a:solidFill>
                   <a:srgbClr val="14344B"/>
                 </a:solidFill>
@@ -3023,7 +3174,7 @@
                 <a:ea typeface="Liberation Sans"/>
                 <a:cs typeface="Liberation Sans"/>
               </a:rPr>
-              <a:t>Bütçe karşılaştırması (bin TL)</a:t>
+              <a:t>Maliyet / bütçe (bin TL)</a:t>
             </a:r>
           </a:p>
         </c:rich>
@@ -3034,7 +3185,7 @@
         <a:lstStyle xmlns:a="http://schemas.openxmlformats.org/drawingml/2006/main"/>
         <a:p xmlns:a="http://schemas.openxmlformats.org/drawingml/2006/main">
           <a:pPr>
-            <a:defRPr sz="1875" b="1">
+            <a:defRPr sz="1800" b="1">
               <a:solidFill>
                 <a:srgbClr val="14344B"/>
               </a:solidFill>
@@ -3055,48 +3206,26 @@
           <c:idx val="0"/>
           <c:order val="0"/>
           <c:tx>
-            <c:v>Bin TL</c:v>
+            <c:v>Tahmin</c:v>
           </c:tx>
-          <c:dPt>
-            <c:idx val="0"/>
-            <c:invertIfNegative val="0"/>
-            <c:spPr>
-              <a:solidFill xmlns:a="http://schemas.openxmlformats.org/drawingml/2006/main">
-                <a:srgbClr val="2563EB"/>
-              </a:solidFill>
-            </c:spPr>
-          </c:dPt>
-          <c:dPt>
-            <c:idx val="1"/>
-            <c:invertIfNegative val="0"/>
-            <c:spPr>
-              <a:solidFill xmlns:a="http://schemas.openxmlformats.org/drawingml/2006/main">
-                <a:srgbClr val="D97B0A"/>
-              </a:solidFill>
-            </c:spPr>
-          </c:dPt>
-          <c:dPt>
-            <c:idx val="2"/>
-            <c:invertIfNegative val="0"/>
-            <c:spPr>
-              <a:solidFill xmlns:a="http://schemas.openxmlformats.org/drawingml/2006/main">
-                <a:srgbClr val="008E86"/>
-              </a:solidFill>
-            </c:spPr>
-          </c:dPt>
+          <c:spPr>
+            <a:solidFill xmlns:a="http://schemas.openxmlformats.org/drawingml/2006/main">
+              <a:srgbClr val="D97B0A"/>
+            </a:solidFill>
+          </c:spPr>
           <c:cat>
             <c:strRef>
               <c:f>'Chart Data'!$A$2:$A$4</c:f>
               <c:strCache>
                 <c:ptCount val="3"/>
                 <c:pt idx="0">
-                  <c:v>Gerçekleşen</c:v>
+                  <c:v>Üretim</c:v>
                 </c:pt>
                 <c:pt idx="1">
-                  <c:v>Tahmini toplam</c:v>
+                  <c:v>Portal</c:v>
                 </c:pt>
                 <c:pt idx="2">
-                  <c:v>Bütçe</c:v>
+                  <c:v>Depo</c:v>
                 </c:pt>
               </c:strCache>
             </c:strRef>
@@ -3108,13 +3237,60 @@
                 <c:formatCode>0</c:formatCode>
                 <c:ptCount val="3"/>
                 <c:pt idx="0">
-                  <c:v>420</c:v>
+                  <c:v>1100</c:v>
                 </c:pt>
                 <c:pt idx="1">
-                  <c:v>1100</c:v>
+                  <c:v>850</c:v>
                 </c:pt>
                 <c:pt idx="2">
+                  <c:v>900</c:v>
+                </c:pt>
+              </c:numCache>
+            </c:numRef>
+          </c:val>
+        </c:ser>
+        <c:ser>
+          <c:idx val="1"/>
+          <c:order val="1"/>
+          <c:tx>
+            <c:v>Bütçe</c:v>
+          </c:tx>
+          <c:spPr>
+            <a:solidFill xmlns:a="http://schemas.openxmlformats.org/drawingml/2006/main">
+              <a:srgbClr val="008E86"/>
+            </a:solidFill>
+          </c:spPr>
+          <c:cat>
+            <c:strRef>
+              <c:f>'Chart Data'!$C$2:$C$4</c:f>
+              <c:strCache>
+                <c:ptCount val="3"/>
+                <c:pt idx="0">
+                  <c:v>Üretim</c:v>
+                </c:pt>
+                <c:pt idx="1">
+                  <c:v>Portal</c:v>
+                </c:pt>
+                <c:pt idx="2">
+                  <c:v>Depo</c:v>
+                </c:pt>
+              </c:strCache>
+            </c:strRef>
+          </c:cat>
+          <c:val>
+            <c:numRef>
+              <c:f>'Chart Data'!$D$2:$D$4</c:f>
+              <c:numCache>
+                <c:formatCode>0</c:formatCode>
+                <c:ptCount val="3"/>
+                <c:pt idx="0">
                   <c:v>1200</c:v>
+                </c:pt>
+                <c:pt idx="1">
+                  <c:v>800</c:v>
+                </c:pt>
+                <c:pt idx="2">
+                  <c:v>950</c:v>
                 </c:pt>
               </c:numCache>
             </c:numRef>
@@ -3127,7 +3303,7 @@
             <a:lstStyle xmlns:a="http://schemas.openxmlformats.org/drawingml/2006/main"/>
             <a:p xmlns:a="http://schemas.openxmlformats.org/drawingml/2006/main">
               <a:pPr>
-                <a:defRPr sz="1875" b="1">
+                <a:defRPr sz="1575" b="1">
                   <a:solidFill>
                     <a:srgbClr val="14344B"/>
                   </a:solidFill>
@@ -3147,7 +3323,8 @@
           <c:showBubbleSize val="0"/>
           <c:showLeaderLines val="0"/>
         </c:dLbls>
-        <c:gapWidth val="85"/>
+        <c:gapWidth val="70"/>
+        <c:overlap val="0"/>
         <c:axId val="48650112"/>
         <c:axId val="48672768"/>
       </c:barChart>
@@ -3221,7 +3398,7 @@
           <a:lstStyle xmlns:a="http://schemas.openxmlformats.org/drawingml/2006/main"/>
           <a:p xmlns:a="http://schemas.openxmlformats.org/drawingml/2006/main">
             <a:pPr>
-              <a:defRPr sz="1425">
+              <a:defRPr sz="1350">
                 <a:solidFill>
                   <a:srgbClr val="61778A"/>
                 </a:solidFill>
@@ -3242,6 +3419,26 @@
         </a:solidFill>
       </c:spPr>
     </c:plotArea>
+    <c:legend>
+      <c:legendPos val="b"/>
+      <c:overlay val="0"/>
+      <c:txPr>
+        <a:bodyPr xmlns:a="http://schemas.openxmlformats.org/drawingml/2006/main" anchorCtr="1"/>
+        <a:lstStyle xmlns:a="http://schemas.openxmlformats.org/drawingml/2006/main"/>
+        <a:p xmlns:a="http://schemas.openxmlformats.org/drawingml/2006/main">
+          <a:pPr>
+            <a:defRPr sz="1500">
+              <a:solidFill>
+                <a:srgbClr val="61778A"/>
+              </a:solidFill>
+              <a:latin typeface="Liberation Sans"/>
+              <a:ea typeface="Liberation Sans"/>
+              <a:cs typeface="Liberation Sans"/>
+            </a:defRPr>
+          </a:pPr>
+        </a:p>
+      </c:txPr>
+    </c:legend>
     <c:plotVisOnly val="1"/>
   </c:chart>
   <c:spPr>
@@ -3320,6 +3517,7 @@
           </a:lstStyle>
           <a:p xmlns:a="http://schemas.openxmlformats.org/drawingml/2006/main">
             <a:pPr algn="l">
+              <a:buNone/>
               <a:defRPr sz="3300" b="1">
                 <a:solidFill>
                   <a:srgbClr val="14344B"/>
@@ -3338,7 +3536,7 @@
                 <a:ea typeface="Liberation Sans"/>
                 <a:cs typeface="Liberation Sans"/>
               </a:rPr>
-              <a:t>Proje takvimi</a:t>
+              <a:t>Projelerimin haftalık takvimi</a:t>
             </a:r>
           </a:p>
         </p:txBody>
@@ -3360,7 +3558,7 @@
         <p:spPr>
           <a:xfrm xmlns:a="http://schemas.openxmlformats.org/drawingml/2006/main">
             <a:off x="457200" y="847725"/>
-            <a:ext cx="14325600" cy="361950"/>
+            <a:ext cx="12763500" cy="361950"/>
           </a:xfrm>
           <a:prstGeom xmlns:a="http://schemas.openxmlformats.org/drawingml/2006/main" prst="rect">
             <a:avLst/>
@@ -3377,76 +3575,7 @@
           </a:bodyPr>
           <a:lstStyle xmlns:a="http://schemas.openxmlformats.org/drawingml/2006/main">
             <a:defPPr algn="l">
-              <a:defRPr sz="2250" b="1">
-                <a:solidFill>
-                  <a:srgbClr val="008E86"/>
-                </a:solidFill>
-                <a:latin typeface="Liberation Sans"/>
-                <a:ea typeface="Liberation Sans"/>
-                <a:cs typeface="Liberation Sans"/>
-              </a:defRPr>
-            </a:defPPr>
-          </a:lstStyle>
-          <a:p xmlns:a="http://schemas.openxmlformats.org/drawingml/2006/main">
-            <a:pPr algn="l">
-              <a:defRPr sz="2250" b="1">
-                <a:solidFill>
-                  <a:srgbClr val="008E86"/>
-                </a:solidFill>
-                <a:latin typeface="Liberation Sans"/>
-                <a:ea typeface="Liberation Sans"/>
-                <a:cs typeface="Liberation Sans"/>
-              </a:defRPr>
-            </a:pPr>
-            <a:r>
-              <a:rPr sz="2250" b="1">
-                <a:solidFill>
-                  <a:srgbClr val="008E86"/>
-                </a:solidFill>
-                <a:latin typeface="Liberation Sans"/>
-                <a:ea typeface="Liberation Sans"/>
-                <a:cs typeface="Liberation Sans"/>
-              </a:rPr>
-              <a:t>Üretim Hattı Modernizasyonu</a:t>
-            </a:r>
-          </a:p>
-        </p:txBody>
-      </p:sp>
-      <p:sp>
-        <p:nvSpPr>
-          <p:cNvPr id="3" name="report">
-            <a:extLst xmlns:a="http://schemas.openxmlformats.org/drawingml/2006/main">
-              <a:ext uri="{FF2B5EF4-FFF2-40B4-BE49-F238E27FC236}">
-                <a16:creationId xmlns:a16="http://schemas.microsoft.com/office/drawing/2014/main" id="{1AF54724-D850-409B-A169-CD499718802F}"/>
-              </a:ext>
-            </a:extLst>
-          </p:cNvPr>
-          <p:cNvSpPr>
-            <a:spLocks xmlns:a="http://schemas.openxmlformats.org/drawingml/2006/main" noGrp="1"/>
-          </p:cNvSpPr>
-          <p:nvPr/>
-        </p:nvSpPr>
-        <p:spPr>
-          <a:xfrm xmlns:a="http://schemas.openxmlformats.org/drawingml/2006/main">
-            <a:off x="457200" y="1257300"/>
-            <a:ext cx="12763500" cy="304800"/>
-          </a:xfrm>
-          <a:prstGeom xmlns:a="http://schemas.openxmlformats.org/drawingml/2006/main" prst="rect">
-            <a:avLst/>
-          </a:prstGeom>
-          <a:noFill xmlns:a="http://schemas.openxmlformats.org/drawingml/2006/main"/>
-          <a:ln xmlns:a="http://schemas.openxmlformats.org/drawingml/2006/main" w="0">
-            <a:noFill/>
-            <a:prstDash val="solid"/>
-          </a:ln>
-        </p:spPr>
-        <p:txBody>
-          <a:bodyPr xmlns:a="http://schemas.openxmlformats.org/drawingml/2006/main" wrap="square" lIns="0" tIns="0" rIns="0" bIns="0" anchor="ctr">
-            <a:noAutofit/>
-          </a:bodyPr>
-          <a:lstStyle xmlns:a="http://schemas.openxmlformats.org/drawingml/2006/main">
-            <a:defPPr algn="l">
-              <a:defRPr sz="1650" b="0">
+              <a:defRPr sz="1725" b="0">
                 <a:solidFill>
                   <a:srgbClr val="61778A"/>
                 </a:solidFill>
@@ -3458,7 +3587,8 @@
           </a:lstStyle>
           <a:p xmlns:a="http://schemas.openxmlformats.org/drawingml/2006/main">
             <a:pPr algn="l">
-              <a:defRPr sz="1650" b="0">
+              <a:buNone/>
+              <a:defRPr sz="1725" b="0">
                 <a:solidFill>
                   <a:srgbClr val="61778A"/>
                 </a:solidFill>
@@ -3468,7 +3598,7 @@
               </a:defRPr>
             </a:pPr>
             <a:r>
-              <a:rPr sz="1650" b="0">
+              <a:rPr sz="1725" b="0">
                 <a:solidFill>
                   <a:srgbClr val="61778A"/>
                 </a:solidFill>
@@ -3476,7 +3606,7 @@
                 <a:ea typeface="Liberation Sans"/>
                 <a:cs typeface="Liberation Sans"/>
               </a:rPr>
-              <a:t>Proje yöneticisi: [Ad Soyad]     Rapor: 15 Ekim 2026     Örnek veriler</a:t>
+              <a:t>Proje yöneticisi: [Ad Soyad]     Rapor: 15 Ekim 2026     3 örnek proje</a:t>
             </a:r>
           </a:p>
         </p:txBody>
@@ -3497,8 +3627,8 @@
         </p:nvSpPr>
         <p:spPr>
           <a:xfrm xmlns:a="http://schemas.openxmlformats.org/drawingml/2006/main">
-            <a:off x="13811250" y="1257300"/>
-            <a:ext cx="971550" cy="304800"/>
+            <a:off x="13811250" y="847725"/>
+            <a:ext cx="971550" cy="361950"/>
           </a:xfrm>
           <a:prstGeom xmlns:a="http://schemas.openxmlformats.org/drawingml/2006/main" prst="rect">
             <a:avLst/>
@@ -3527,6 +3657,7 @@
           </a:lstStyle>
           <a:p xmlns:a="http://schemas.openxmlformats.org/drawingml/2006/main">
             <a:pPr algn="r">
+              <a:buNone/>
               <a:defRPr sz="1650" b="0">
                 <a:solidFill>
                   <a:srgbClr val="61778A"/>
@@ -3550,12 +3681,34 @@
           </a:p>
         </p:txBody>
       </p:sp>
+      <p:graphicFrame>
+        <p:nvGraphicFramePr>
+          <p:cNvPr id="15" name="Chart">
+            <a:extLst xmlns:a="http://schemas.openxmlformats.org/drawingml/2006/main">
+              <a:ext uri="{FF2B5EF4-FFF2-40B4-BE49-F238E27FC236}">
+                <a16:creationId xmlns:a16="http://schemas.microsoft.com/office/drawing/2014/main" id="{250B37D8-7671-4FD2-A6F3-4DD281CB34F1}"/>
+              </a:ext>
+            </a:extLst>
+          </p:cNvPr>
+          <p:cNvGraphicFramePr/>
+          <p:nvPr/>
+        </p:nvGraphicFramePr>
+        <p:xfrm>
+          <a:off xmlns:a="http://schemas.openxmlformats.org/drawingml/2006/main" x="457200" y="1371600"/>
+          <a:ext xmlns:a="http://schemas.openxmlformats.org/drawingml/2006/main" cx="6019800" cy="2095500"/>
+        </p:xfrm>
+        <a:graphic xmlns:a="http://schemas.openxmlformats.org/drawingml/2006/main">
+          <a:graphicData uri="http://schemas.openxmlformats.org/drawingml/2006/chart">
+            <c:chart xmlns:r="http://schemas.openxmlformats.org/officeDocument/2006/relationships" xmlns:c="http://schemas.openxmlformats.org/drawingml/2006/chart" r:id="R8d45016084b0491f"/>
+          </a:graphicData>
+        </a:graphic>
+      </p:graphicFrame>
       <p:sp>
         <p:nvSpPr>
-          <p:cNvPr id="5" name="calendar-title">
+          <p:cNvPr id="16" name="calendar-heading">
             <a:extLst xmlns:a="http://schemas.openxmlformats.org/drawingml/2006/main">
               <a:ext uri="{FF2B5EF4-FFF2-40B4-BE49-F238E27FC236}">
-                <a16:creationId xmlns:a16="http://schemas.microsoft.com/office/drawing/2014/main" id="{4D2B8491-05C3-423C-A56F-648295527656}"/>
+                <a16:creationId xmlns:a16="http://schemas.microsoft.com/office/drawing/2014/main" id="{A2A92A14-F162-4258-84B2-F99B7ADB5E9B}"/>
               </a:ext>
             </a:extLst>
           </p:cNvPr>
@@ -3566,8 +3719,8 @@
         </p:nvSpPr>
         <p:spPr>
           <a:xfrm xmlns:a="http://schemas.openxmlformats.org/drawingml/2006/main">
-            <a:off x="457200" y="1695450"/>
-            <a:ext cx="9525000" cy="323850"/>
+            <a:off x="6858000" y="1371600"/>
+            <a:ext cx="7924800" cy="285750"/>
           </a:xfrm>
           <a:prstGeom xmlns:a="http://schemas.openxmlformats.org/drawingml/2006/main" prst="rect">
             <a:avLst/>
@@ -3584,7 +3737,7 @@
           </a:bodyPr>
           <a:lstStyle xmlns:a="http://schemas.openxmlformats.org/drawingml/2006/main">
             <a:defPPr algn="l">
-              <a:defRPr sz="2025" b="1">
+              <a:defRPr sz="1875" b="1">
                 <a:solidFill>
                   <a:srgbClr val="14344B"/>
                 </a:solidFill>
@@ -3596,7 +3749,7 @@
           </a:lstStyle>
           <a:p xmlns:a="http://schemas.openxmlformats.org/drawingml/2006/main">
             <a:pPr algn="l">
-              <a:defRPr sz="2025" b="1">
+              <a:defRPr sz="1875" b="1">
                 <a:solidFill>
                   <a:srgbClr val="14344B"/>
                 </a:solidFill>
@@ -3606,7 +3759,7 @@
               </a:defRPr>
             </a:pPr>
             <a:r>
-              <a:rPr sz="2025" b="1">
+              <a:rPr sz="1875" b="1">
                 <a:solidFill>
                   <a:srgbClr val="14344B"/>
                 </a:solidFill>
@@ -3614,17 +3767,17 @@
                 <a:ea typeface="Liberation Sans"/>
                 <a:cs typeface="Liberation Sans"/>
               </a:rPr>
-              <a:t>Aşamalar ve kritik tarihler</a:t>
+              <a:t>Güncel haftalık takvim (turuncu: kritik)</a:t>
             </a:r>
           </a:p>
         </p:txBody>
       </p:sp>
       <p:graphicFrame>
         <p:nvGraphicFramePr>
-          <p:cNvPr id="6" name="">
+          <p:cNvPr id="17" name="">
             <a:extLst xmlns:a="http://schemas.openxmlformats.org/drawingml/2006/main">
               <a:ext uri="{FF2B5EF4-FFF2-40B4-BE49-F238E27FC236}">
-                <a16:creationId xmlns:a16="http://schemas.microsoft.com/office/drawing/2014/main" id="{DB4DE956-3AEE-4DD2-A54D-35DE3A275454}"/>
+                <a16:creationId xmlns:a16="http://schemas.microsoft.com/office/drawing/2014/main" id="{4D09BA0E-0EA0-487A-896C-230424FAEB6F}"/>
               </a:ext>
             </a:extLst>
           </p:cNvPr>
@@ -3632,25 +3785,942 @@
           <p:nvPr/>
         </p:nvGraphicFramePr>
         <p:xfrm>
-          <a:off xmlns:a="http://schemas.openxmlformats.org/drawingml/2006/main" x="457200" y="2095500"/>
-          <a:ext xmlns:a="http://schemas.openxmlformats.org/drawingml/2006/main" cx="9525000" cy="2838450"/>
+          <a:off xmlns:a="http://schemas.openxmlformats.org/drawingml/2006/main" x="6858000" y="1752600"/>
+          <a:ext xmlns:a="http://schemas.openxmlformats.org/drawingml/2006/main" cx="7924800" cy="1695450"/>
         </p:xfrm>
         <a:graphic xmlns:a="http://schemas.openxmlformats.org/drawingml/2006/main">
           <a:graphicData uri="http://schemas.openxmlformats.org/drawingml/2006/table">
             <a:tbl>
               <a:tblPr firstRow="0" bandRow="0"/>
               <a:tblGrid>
-                <a:gridCol w="1905000"/>
+                <a:gridCol w="1257300"/>
+                <a:gridCol w="952500"/>
+                <a:gridCol w="952500"/>
+                <a:gridCol w="952500"/>
+                <a:gridCol w="952500"/>
+                <a:gridCol w="952500"/>
+                <a:gridCol w="952500"/>
+                <a:gridCol w="952500"/>
+              </a:tblGrid>
+              <a:tr h="495300">
+                <a:tc>
+                  <a:txBody>
+                    <a:bodyPr wrap="square" anchor="ctr">
+                      <a:noAutofit/>
+                    </a:bodyPr>
+                    <a:lstStyle/>
+                    <a:p>
+                      <a:pPr algn="l"/>
+                      <a:r>
+                        <a:rPr sz="1500" b="1">
+                          <a:solidFill>
+                            <a:srgbClr val="FFFFFF"/>
+                          </a:solidFill>
+                          <a:latin typeface="Liberation Sans"/>
+                          <a:ea typeface="Liberation Sans"/>
+                          <a:cs typeface="Liberation Sans"/>
+                        </a:rPr>
+                        <a:t>Proje</a:t>
+                      </a:r>
+                    </a:p>
+                  </a:txBody>
+                  <a:tcPr marL="19050" marR="19050" marT="19050" marB="19050">
+                    <a:solidFill>
+                      <a:srgbClr val="14344B"/>
+                    </a:solidFill>
+                  </a:tcPr>
+                </a:tc>
+                <a:tc>
+                  <a:txBody>
+                    <a:bodyPr wrap="square" anchor="ctr">
+                      <a:noAutofit/>
+                    </a:bodyPr>
+                    <a:lstStyle/>
+                    <a:p>
+                      <a:pPr algn="ctr"/>
+                      <a:r>
+                        <a:rPr sz="1500" b="1">
+                          <a:solidFill>
+                            <a:srgbClr val="FFFFFF"/>
+                          </a:solidFill>
+                          <a:latin typeface="Liberation Sans"/>
+                          <a:ea typeface="Liberation Sans"/>
+                          <a:cs typeface="Liberation Sans"/>
+                        </a:rPr>
+                        <a:t>12.10</a:t>
+                      </a:r>
+                    </a:p>
+                    <a:p>
+                      <a:pPr algn="ctr"/>
+                      <a:r>
+                        <a:rPr sz="1500" b="1">
+                          <a:solidFill>
+                            <a:srgbClr val="FFFFFF"/>
+                          </a:solidFill>
+                          <a:latin typeface="Liberation Sans"/>
+                          <a:ea typeface="Liberation Sans"/>
+                          <a:cs typeface="Liberation Sans"/>
+                        </a:rPr>
+                        <a:t>Bu hafta</a:t>
+                      </a:r>
+                    </a:p>
+                  </a:txBody>
+                  <a:tcPr marL="19050" marR="19050" marT="19050" marB="19050">
+                    <a:solidFill>
+                      <a:srgbClr val="008E86"/>
+                    </a:solidFill>
+                  </a:tcPr>
+                </a:tc>
+                <a:tc>
+                  <a:txBody>
+                    <a:bodyPr wrap="square" anchor="ctr">
+                      <a:noAutofit/>
+                    </a:bodyPr>
+                    <a:lstStyle/>
+                    <a:p>
+                      <a:pPr algn="ctr"/>
+                      <a:r>
+                        <a:rPr sz="1500" b="1">
+                          <a:solidFill>
+                            <a:srgbClr val="FFFFFF"/>
+                          </a:solidFill>
+                          <a:latin typeface="Liberation Sans"/>
+                          <a:ea typeface="Liberation Sans"/>
+                          <a:cs typeface="Liberation Sans"/>
+                        </a:rPr>
+                        <a:t>19.10</a:t>
+                      </a:r>
+                    </a:p>
+                  </a:txBody>
+                  <a:tcPr marL="19050" marR="19050" marT="19050" marB="19050">
+                    <a:solidFill>
+                      <a:srgbClr val="14344B"/>
+                    </a:solidFill>
+                  </a:tcPr>
+                </a:tc>
+                <a:tc>
+                  <a:txBody>
+                    <a:bodyPr wrap="square" anchor="ctr">
+                      <a:noAutofit/>
+                    </a:bodyPr>
+                    <a:lstStyle/>
+                    <a:p>
+                      <a:pPr algn="ctr"/>
+                      <a:r>
+                        <a:rPr sz="1500" b="1">
+                          <a:solidFill>
+                            <a:srgbClr val="FFFFFF"/>
+                          </a:solidFill>
+                          <a:latin typeface="Liberation Sans"/>
+                          <a:ea typeface="Liberation Sans"/>
+                          <a:cs typeface="Liberation Sans"/>
+                        </a:rPr>
+                        <a:t>26.10</a:t>
+                      </a:r>
+                    </a:p>
+                  </a:txBody>
+                  <a:tcPr marL="19050" marR="19050" marT="19050" marB="19050">
+                    <a:solidFill>
+                      <a:srgbClr val="14344B"/>
+                    </a:solidFill>
+                  </a:tcPr>
+                </a:tc>
+                <a:tc>
+                  <a:txBody>
+                    <a:bodyPr wrap="square" anchor="ctr">
+                      <a:noAutofit/>
+                    </a:bodyPr>
+                    <a:lstStyle/>
+                    <a:p>
+                      <a:pPr algn="ctr"/>
+                      <a:r>
+                        <a:rPr sz="1500" b="1">
+                          <a:solidFill>
+                            <a:srgbClr val="FFFFFF"/>
+                          </a:solidFill>
+                          <a:latin typeface="Liberation Sans"/>
+                          <a:ea typeface="Liberation Sans"/>
+                          <a:cs typeface="Liberation Sans"/>
+                        </a:rPr>
+                        <a:t>02.11</a:t>
+                      </a:r>
+                    </a:p>
+                  </a:txBody>
+                  <a:tcPr marL="19050" marR="19050" marT="19050" marB="19050">
+                    <a:solidFill>
+                      <a:srgbClr val="14344B"/>
+                    </a:solidFill>
+                  </a:tcPr>
+                </a:tc>
+                <a:tc>
+                  <a:txBody>
+                    <a:bodyPr wrap="square" anchor="ctr">
+                      <a:noAutofit/>
+                    </a:bodyPr>
+                    <a:lstStyle/>
+                    <a:p>
+                      <a:pPr algn="ctr"/>
+                      <a:r>
+                        <a:rPr sz="1500" b="1">
+                          <a:solidFill>
+                            <a:srgbClr val="FFFFFF"/>
+                          </a:solidFill>
+                          <a:latin typeface="Liberation Sans"/>
+                          <a:ea typeface="Liberation Sans"/>
+                          <a:cs typeface="Liberation Sans"/>
+                        </a:rPr>
+                        <a:t>09.11</a:t>
+                      </a:r>
+                    </a:p>
+                  </a:txBody>
+                  <a:tcPr marL="19050" marR="19050" marT="19050" marB="19050">
+                    <a:solidFill>
+                      <a:srgbClr val="14344B"/>
+                    </a:solidFill>
+                  </a:tcPr>
+                </a:tc>
+                <a:tc>
+                  <a:txBody>
+                    <a:bodyPr wrap="square" anchor="ctr">
+                      <a:noAutofit/>
+                    </a:bodyPr>
+                    <a:lstStyle/>
+                    <a:p>
+                      <a:pPr algn="ctr"/>
+                      <a:r>
+                        <a:rPr sz="1500" b="1">
+                          <a:solidFill>
+                            <a:srgbClr val="FFFFFF"/>
+                          </a:solidFill>
+                          <a:latin typeface="Liberation Sans"/>
+                          <a:ea typeface="Liberation Sans"/>
+                          <a:cs typeface="Liberation Sans"/>
+                        </a:rPr>
+                        <a:t>16.11</a:t>
+                      </a:r>
+                    </a:p>
+                  </a:txBody>
+                  <a:tcPr marL="19050" marR="19050" marT="19050" marB="19050">
+                    <a:solidFill>
+                      <a:srgbClr val="14344B"/>
+                    </a:solidFill>
+                  </a:tcPr>
+                </a:tc>
+                <a:tc>
+                  <a:txBody>
+                    <a:bodyPr wrap="square" anchor="ctr">
+                      <a:noAutofit/>
+                    </a:bodyPr>
+                    <a:lstStyle/>
+                    <a:p>
+                      <a:pPr algn="ctr"/>
+                      <a:r>
+                        <a:rPr sz="1500" b="1">
+                          <a:solidFill>
+                            <a:srgbClr val="FFFFFF"/>
+                          </a:solidFill>
+                          <a:latin typeface="Liberation Sans"/>
+                          <a:ea typeface="Liberation Sans"/>
+                          <a:cs typeface="Liberation Sans"/>
+                        </a:rPr>
+                        <a:t>23.11</a:t>
+                      </a:r>
+                    </a:p>
+                  </a:txBody>
+                  <a:tcPr marL="19050" marR="19050" marT="19050" marB="19050">
+                    <a:solidFill>
+                      <a:srgbClr val="14344B"/>
+                    </a:solidFill>
+                  </a:tcPr>
+                </a:tc>
+              </a:tr>
+              <a:tr h="400050">
+                <a:tc>
+                  <a:txBody>
+                    <a:bodyPr wrap="square" anchor="ctr">
+                      <a:noAutofit/>
+                    </a:bodyPr>
+                    <a:lstStyle/>
+                    <a:p>
+                      <a:pPr algn="l"/>
+                      <a:r>
+                        <a:rPr sz="1575" b="1">
+                          <a:solidFill>
+                            <a:srgbClr val="273F50"/>
+                          </a:solidFill>
+                          <a:latin typeface="Liberation Sans"/>
+                          <a:ea typeface="Liberation Sans"/>
+                          <a:cs typeface="Liberation Sans"/>
+                        </a:rPr>
+                        <a:t>Üretim</a:t>
+                      </a:r>
+                    </a:p>
+                  </a:txBody>
+                  <a:tcPr marL="19050" marR="19050" marT="19050" marB="19050">
+                    <a:solidFill>
+                      <a:srgbClr val="FFFFFF"/>
+                    </a:solidFill>
+                  </a:tcPr>
+                </a:tc>
+                <a:tc>
+                  <a:txBody>
+                    <a:bodyPr wrap="square" anchor="ctr">
+                      <a:noAutofit/>
+                    </a:bodyPr>
+                    <a:lstStyle/>
+                    <a:p>
+                      <a:pPr algn="ctr"/>
+                      <a:r>
+                        <a:rPr sz="1575" b="1">
+                          <a:solidFill>
+                            <a:srgbClr val="FFFFFF"/>
+                          </a:solidFill>
+                          <a:latin typeface="Liberation Sans"/>
+                          <a:ea typeface="Liberation Sans"/>
+                          <a:cs typeface="Liberation Sans"/>
+                        </a:rPr>
+                        <a:t>Tedarik</a:t>
+                      </a:r>
+                    </a:p>
+                  </a:txBody>
+                  <a:tcPr marL="19050" marR="19050" marT="19050" marB="19050">
+                    <a:solidFill>
+                      <a:srgbClr val="008E86"/>
+                    </a:solidFill>
+                  </a:tcPr>
+                </a:tc>
+                <a:tc>
+                  <a:txBody>
+                    <a:bodyPr wrap="square" anchor="ctr">
+                      <a:noAutofit/>
+                    </a:bodyPr>
+                    <a:lstStyle/>
+                    <a:p>
+                      <a:pPr algn="ctr"/>
+                      <a:r>
+                        <a:rPr sz="1575" b="0">
+                          <a:solidFill>
+                            <a:srgbClr val="2563EB"/>
+                          </a:solidFill>
+                          <a:latin typeface="Liberation Sans"/>
+                          <a:ea typeface="Liberation Sans"/>
+                          <a:cs typeface="Liberation Sans"/>
+                        </a:rPr>
+                        <a:t>Tedarik</a:t>
+                      </a:r>
+                    </a:p>
+                  </a:txBody>
+                  <a:tcPr marL="19050" marR="19050" marT="19050" marB="19050">
+                    <a:solidFill>
+                      <a:srgbClr val="E0EBFF"/>
+                    </a:solidFill>
+                  </a:tcPr>
+                </a:tc>
+                <a:tc>
+                  <a:txBody>
+                    <a:bodyPr wrap="square" anchor="ctr">
+                      <a:noAutofit/>
+                    </a:bodyPr>
+                    <a:lstStyle/>
+                    <a:p>
+                      <a:pPr algn="ctr"/>
+                      <a:r>
+                        <a:rPr sz="1575" b="1">
+                          <a:solidFill>
+                            <a:srgbClr val="D97B0A"/>
+                          </a:solidFill>
+                          <a:latin typeface="Liberation Sans"/>
+                          <a:ea typeface="Liberation Sans"/>
+                          <a:cs typeface="Liberation Sans"/>
+                        </a:rPr>
+                        <a:t>Motor</a:t>
+                      </a:r>
+                    </a:p>
+                  </a:txBody>
+                  <a:tcPr marL="19050" marR="19050" marT="19050" marB="19050">
+                    <a:solidFill>
+                      <a:srgbClr val="FFF0D6"/>
+                    </a:solidFill>
+                  </a:tcPr>
+                </a:tc>
+                <a:tc>
+                  <a:txBody>
+                    <a:bodyPr wrap="square" anchor="ctr">
+                      <a:noAutofit/>
+                    </a:bodyPr>
+                    <a:lstStyle/>
+                    <a:p>
+                      <a:pPr algn="ctr"/>
+                      <a:r>
+                        <a:rPr sz="1575" b="0">
+                          <a:solidFill>
+                            <a:srgbClr val="2563EB"/>
+                          </a:solidFill>
+                          <a:latin typeface="Liberation Sans"/>
+                          <a:ea typeface="Liberation Sans"/>
+                          <a:cs typeface="Liberation Sans"/>
+                        </a:rPr>
+                        <a:t>Kurulum</a:t>
+                      </a:r>
+                    </a:p>
+                  </a:txBody>
+                  <a:tcPr marL="19050" marR="19050" marT="19050" marB="19050">
+                    <a:solidFill>
+                      <a:srgbClr val="E0EBFF"/>
+                    </a:solidFill>
+                  </a:tcPr>
+                </a:tc>
+                <a:tc>
+                  <a:txBody>
+                    <a:bodyPr wrap="square" anchor="ctr">
+                      <a:noAutofit/>
+                    </a:bodyPr>
+                    <a:lstStyle/>
+                    <a:p>
+                      <a:pPr algn="ctr"/>
+                      <a:r>
+                        <a:rPr sz="1575" b="0">
+                          <a:solidFill>
+                            <a:srgbClr val="2563EB"/>
+                          </a:solidFill>
+                          <a:latin typeface="Liberation Sans"/>
+                          <a:ea typeface="Liberation Sans"/>
+                          <a:cs typeface="Liberation Sans"/>
+                        </a:rPr>
+                        <a:t>Kurulum</a:t>
+                      </a:r>
+                    </a:p>
+                  </a:txBody>
+                  <a:tcPr marL="19050" marR="19050" marT="19050" marB="19050">
+                    <a:solidFill>
+                      <a:srgbClr val="E0EBFF"/>
+                    </a:solidFill>
+                  </a:tcPr>
+                </a:tc>
+                <a:tc>
+                  <a:txBody>
+                    <a:bodyPr wrap="square" anchor="ctr">
+                      <a:noAutofit/>
+                    </a:bodyPr>
+                    <a:lstStyle/>
+                    <a:p>
+                      <a:pPr algn="ctr"/>
+                      <a:r>
+                        <a:rPr sz="1575" b="0">
+                          <a:solidFill>
+                            <a:srgbClr val="2563EB"/>
+                          </a:solidFill>
+                          <a:latin typeface="Liberation Sans"/>
+                          <a:ea typeface="Liberation Sans"/>
+                          <a:cs typeface="Liberation Sans"/>
+                        </a:rPr>
+                        <a:t>Kabul</a:t>
+                      </a:r>
+                    </a:p>
+                  </a:txBody>
+                  <a:tcPr marL="19050" marR="19050" marT="19050" marB="19050">
+                    <a:solidFill>
+                      <a:srgbClr val="E0EBFF"/>
+                    </a:solidFill>
+                  </a:tcPr>
+                </a:tc>
+                <a:tc>
+                  <a:txBody>
+                    <a:bodyPr wrap="square" anchor="ctr">
+                      <a:noAutofit/>
+                    </a:bodyPr>
+                    <a:lstStyle/>
+                    <a:p>
+                      <a:pPr algn="ctr"/>
+                      <a:r>
+                        <a:rPr sz="1575" b="0">
+                          <a:solidFill>
+                            <a:srgbClr val="2563EB"/>
+                          </a:solidFill>
+                          <a:latin typeface="Liberation Sans"/>
+                          <a:ea typeface="Liberation Sans"/>
+                          <a:cs typeface="Liberation Sans"/>
+                        </a:rPr>
+                        <a:t/>
+                      </a:r>
+                    </a:p>
+                  </a:txBody>
+                  <a:tcPr marL="19050" marR="19050" marT="19050" marB="19050">
+                    <a:solidFill>
+                      <a:srgbClr val="FFFFFF"/>
+                    </a:solidFill>
+                  </a:tcPr>
+                </a:tc>
+              </a:tr>
+              <a:tr h="400050">
+                <a:tc>
+                  <a:txBody>
+                    <a:bodyPr wrap="square" anchor="ctr">
+                      <a:noAutofit/>
+                    </a:bodyPr>
+                    <a:lstStyle/>
+                    <a:p>
+                      <a:pPr algn="l"/>
+                      <a:r>
+                        <a:rPr sz="1575" b="1">
+                          <a:solidFill>
+                            <a:srgbClr val="273F50"/>
+                          </a:solidFill>
+                          <a:latin typeface="Liberation Sans"/>
+                          <a:ea typeface="Liberation Sans"/>
+                          <a:cs typeface="Liberation Sans"/>
+                        </a:rPr>
+                        <a:t>Portal</a:t>
+                      </a:r>
+                    </a:p>
+                  </a:txBody>
+                  <a:tcPr marL="19050" marR="19050" marT="19050" marB="19050">
+                    <a:solidFill>
+                      <a:srgbClr val="F1F6FA"/>
+                    </a:solidFill>
+                  </a:tcPr>
+                </a:tc>
+                <a:tc>
+                  <a:txBody>
+                    <a:bodyPr wrap="square" anchor="ctr">
+                      <a:noAutofit/>
+                    </a:bodyPr>
+                    <a:lstStyle/>
+                    <a:p>
+                      <a:pPr algn="ctr"/>
+                      <a:r>
+                        <a:rPr sz="1575" b="1">
+                          <a:solidFill>
+                            <a:srgbClr val="FFFFFF"/>
+                          </a:solidFill>
+                          <a:latin typeface="Liberation Sans"/>
+                          <a:ea typeface="Liberation Sans"/>
+                          <a:cs typeface="Liberation Sans"/>
+                        </a:rPr>
+                        <a:t>Geliş.</a:t>
+                      </a:r>
+                    </a:p>
+                  </a:txBody>
+                  <a:tcPr marL="19050" marR="19050" marT="19050" marB="19050">
+                    <a:solidFill>
+                      <a:srgbClr val="008E86"/>
+                    </a:solidFill>
+                  </a:tcPr>
+                </a:tc>
+                <a:tc>
+                  <a:txBody>
+                    <a:bodyPr wrap="square" anchor="ctr">
+                      <a:noAutofit/>
+                    </a:bodyPr>
+                    <a:lstStyle/>
+                    <a:p>
+                      <a:pPr algn="ctr"/>
+                      <a:r>
+                        <a:rPr sz="1575" b="1">
+                          <a:solidFill>
+                            <a:srgbClr val="D97B0A"/>
+                          </a:solidFill>
+                          <a:latin typeface="Liberation Sans"/>
+                          <a:ea typeface="Liberation Sans"/>
+                          <a:cs typeface="Liberation Sans"/>
+                        </a:rPr>
+                        <a:t>Test</a:t>
+                      </a:r>
+                    </a:p>
+                  </a:txBody>
+                  <a:tcPr marL="19050" marR="19050" marT="19050" marB="19050">
+                    <a:solidFill>
+                      <a:srgbClr val="FFF0D6"/>
+                    </a:solidFill>
+                  </a:tcPr>
+                </a:tc>
+                <a:tc>
+                  <a:txBody>
+                    <a:bodyPr wrap="square" anchor="ctr">
+                      <a:noAutofit/>
+                    </a:bodyPr>
+                    <a:lstStyle/>
+                    <a:p>
+                      <a:pPr algn="ctr"/>
+                      <a:r>
+                        <a:rPr sz="1575" b="0">
+                          <a:solidFill>
+                            <a:srgbClr val="2563EB"/>
+                          </a:solidFill>
+                          <a:latin typeface="Liberation Sans"/>
+                          <a:ea typeface="Liberation Sans"/>
+                          <a:cs typeface="Liberation Sans"/>
+                        </a:rPr>
+                        <a:t>Pilot</a:t>
+                      </a:r>
+                    </a:p>
+                  </a:txBody>
+                  <a:tcPr marL="19050" marR="19050" marT="19050" marB="19050">
+                    <a:solidFill>
+                      <a:srgbClr val="E0EBFF"/>
+                    </a:solidFill>
+                  </a:tcPr>
+                </a:tc>
+                <a:tc>
+                  <a:txBody>
+                    <a:bodyPr wrap="square" anchor="ctr">
+                      <a:noAutofit/>
+                    </a:bodyPr>
+                    <a:lstStyle/>
+                    <a:p>
+                      <a:pPr algn="ctr"/>
+                      <a:r>
+                        <a:rPr sz="1575" b="0">
+                          <a:solidFill>
+                            <a:srgbClr val="2563EB"/>
+                          </a:solidFill>
+                          <a:latin typeface="Liberation Sans"/>
+                          <a:ea typeface="Liberation Sans"/>
+                          <a:cs typeface="Liberation Sans"/>
+                        </a:rPr>
+                        <a:t>Canlı</a:t>
+                      </a:r>
+                    </a:p>
+                  </a:txBody>
+                  <a:tcPr marL="19050" marR="19050" marT="19050" marB="19050">
+                    <a:solidFill>
+                      <a:srgbClr val="E0EBFF"/>
+                    </a:solidFill>
+                  </a:tcPr>
+                </a:tc>
+                <a:tc>
+                  <a:txBody>
+                    <a:bodyPr wrap="square" anchor="ctr">
+                      <a:noAutofit/>
+                    </a:bodyPr>
+                    <a:lstStyle/>
+                    <a:p>
+                      <a:pPr algn="ctr"/>
+                      <a:r>
+                        <a:rPr sz="1575" b="0">
+                          <a:solidFill>
+                            <a:srgbClr val="2563EB"/>
+                          </a:solidFill>
+                          <a:latin typeface="Liberation Sans"/>
+                          <a:ea typeface="Liberation Sans"/>
+                          <a:cs typeface="Liberation Sans"/>
+                        </a:rPr>
+                        <a:t/>
+                      </a:r>
+                    </a:p>
+                  </a:txBody>
+                  <a:tcPr marL="19050" marR="19050" marT="19050" marB="19050">
+                    <a:solidFill>
+                      <a:srgbClr val="FFFFFF"/>
+                    </a:solidFill>
+                  </a:tcPr>
+                </a:tc>
+                <a:tc>
+                  <a:txBody>
+                    <a:bodyPr wrap="square" anchor="ctr">
+                      <a:noAutofit/>
+                    </a:bodyPr>
+                    <a:lstStyle/>
+                    <a:p>
+                      <a:pPr algn="ctr"/>
+                      <a:r>
+                        <a:rPr sz="1575" b="0">
+                          <a:solidFill>
+                            <a:srgbClr val="2563EB"/>
+                          </a:solidFill>
+                          <a:latin typeface="Liberation Sans"/>
+                          <a:ea typeface="Liberation Sans"/>
+                          <a:cs typeface="Liberation Sans"/>
+                        </a:rPr>
+                        <a:t/>
+                      </a:r>
+                    </a:p>
+                  </a:txBody>
+                  <a:tcPr marL="19050" marR="19050" marT="19050" marB="19050">
+                    <a:solidFill>
+                      <a:srgbClr val="FFFFFF"/>
+                    </a:solidFill>
+                  </a:tcPr>
+                </a:tc>
+                <a:tc>
+                  <a:txBody>
+                    <a:bodyPr wrap="square" anchor="ctr">
+                      <a:noAutofit/>
+                    </a:bodyPr>
+                    <a:lstStyle/>
+                    <a:p>
+                      <a:pPr algn="ctr"/>
+                      <a:r>
+                        <a:rPr sz="1575" b="0">
+                          <a:solidFill>
+                            <a:srgbClr val="2563EB"/>
+                          </a:solidFill>
+                          <a:latin typeface="Liberation Sans"/>
+                          <a:ea typeface="Liberation Sans"/>
+                          <a:cs typeface="Liberation Sans"/>
+                        </a:rPr>
+                        <a:t/>
+                      </a:r>
+                    </a:p>
+                  </a:txBody>
+                  <a:tcPr marL="19050" marR="19050" marT="19050" marB="19050">
+                    <a:solidFill>
+                      <a:srgbClr val="FFFFFF"/>
+                    </a:solidFill>
+                  </a:tcPr>
+                </a:tc>
+              </a:tr>
+              <a:tr h="400050">
+                <a:tc>
+                  <a:txBody>
+                    <a:bodyPr wrap="square" anchor="ctr">
+                      <a:noAutofit/>
+                    </a:bodyPr>
+                    <a:lstStyle/>
+                    <a:p>
+                      <a:pPr algn="l"/>
+                      <a:r>
+                        <a:rPr sz="1575" b="1">
+                          <a:solidFill>
+                            <a:srgbClr val="273F50"/>
+                          </a:solidFill>
+                          <a:latin typeface="Liberation Sans"/>
+                          <a:ea typeface="Liberation Sans"/>
+                          <a:cs typeface="Liberation Sans"/>
+                        </a:rPr>
+                        <a:t>Depo</a:t>
+                      </a:r>
+                    </a:p>
+                  </a:txBody>
+                  <a:tcPr marL="19050" marR="19050" marT="19050" marB="19050">
+                    <a:solidFill>
+                      <a:srgbClr val="FFFFFF"/>
+                    </a:solidFill>
+                  </a:tcPr>
+                </a:tc>
+                <a:tc>
+                  <a:txBody>
+                    <a:bodyPr wrap="square" anchor="ctr">
+                      <a:noAutofit/>
+                    </a:bodyPr>
+                    <a:lstStyle/>
+                    <a:p>
+                      <a:pPr algn="ctr"/>
+                      <a:r>
+                        <a:rPr sz="1575" b="1">
+                          <a:solidFill>
+                            <a:srgbClr val="FFFFFF"/>
+                          </a:solidFill>
+                          <a:latin typeface="Liberation Sans"/>
+                          <a:ea typeface="Liberation Sans"/>
+                          <a:cs typeface="Liberation Sans"/>
+                        </a:rPr>
+                        <a:t>Analiz</a:t>
+                      </a:r>
+                    </a:p>
+                  </a:txBody>
+                  <a:tcPr marL="19050" marR="19050" marT="19050" marB="19050">
+                    <a:solidFill>
+                      <a:srgbClr val="008E86"/>
+                    </a:solidFill>
+                  </a:tcPr>
+                </a:tc>
+                <a:tc>
+                  <a:txBody>
+                    <a:bodyPr wrap="square" anchor="ctr">
+                      <a:noAutofit/>
+                    </a:bodyPr>
+                    <a:lstStyle/>
+                    <a:p>
+                      <a:pPr algn="ctr"/>
+                      <a:r>
+                        <a:rPr sz="1575" b="1">
+                          <a:solidFill>
+                            <a:srgbClr val="D97B0A"/>
+                          </a:solidFill>
+                          <a:latin typeface="Liberation Sans"/>
+                          <a:ea typeface="Liberation Sans"/>
+                          <a:cs typeface="Liberation Sans"/>
+                        </a:rPr>
+                        <a:t>Yazılım</a:t>
+                      </a:r>
+                    </a:p>
+                  </a:txBody>
+                  <a:tcPr marL="19050" marR="19050" marT="19050" marB="19050">
+                    <a:solidFill>
+                      <a:srgbClr val="FFF0D6"/>
+                    </a:solidFill>
+                  </a:tcPr>
+                </a:tc>
+                <a:tc>
+                  <a:txBody>
+                    <a:bodyPr wrap="square" anchor="ctr">
+                      <a:noAutofit/>
+                    </a:bodyPr>
+                    <a:lstStyle/>
+                    <a:p>
+                      <a:pPr algn="ctr"/>
+                      <a:r>
+                        <a:rPr sz="1575" b="0">
+                          <a:solidFill>
+                            <a:srgbClr val="2563EB"/>
+                          </a:solidFill>
+                          <a:latin typeface="Liberation Sans"/>
+                          <a:ea typeface="Liberation Sans"/>
+                          <a:cs typeface="Liberation Sans"/>
+                        </a:rPr>
+                        <a:t>Yazılım</a:t>
+                      </a:r>
+                    </a:p>
+                  </a:txBody>
+                  <a:tcPr marL="19050" marR="19050" marT="19050" marB="19050">
+                    <a:solidFill>
+                      <a:srgbClr val="E0EBFF"/>
+                    </a:solidFill>
+                  </a:tcPr>
+                </a:tc>
+                <a:tc>
+                  <a:txBody>
+                    <a:bodyPr wrap="square" anchor="ctr">
+                      <a:noAutofit/>
+                    </a:bodyPr>
+                    <a:lstStyle/>
+                    <a:p>
+                      <a:pPr algn="ctr"/>
+                      <a:r>
+                        <a:rPr sz="1575" b="0">
+                          <a:solidFill>
+                            <a:srgbClr val="2563EB"/>
+                          </a:solidFill>
+                          <a:latin typeface="Liberation Sans"/>
+                          <a:ea typeface="Liberation Sans"/>
+                          <a:cs typeface="Liberation Sans"/>
+                        </a:rPr>
+                        <a:t>Enteg.</a:t>
+                      </a:r>
+                    </a:p>
+                  </a:txBody>
+                  <a:tcPr marL="19050" marR="19050" marT="19050" marB="19050">
+                    <a:solidFill>
+                      <a:srgbClr val="E0EBFF"/>
+                    </a:solidFill>
+                  </a:tcPr>
+                </a:tc>
+                <a:tc>
+                  <a:txBody>
+                    <a:bodyPr wrap="square" anchor="ctr">
+                      <a:noAutofit/>
+                    </a:bodyPr>
+                    <a:lstStyle/>
+                    <a:p>
+                      <a:pPr algn="ctr"/>
+                      <a:r>
+                        <a:rPr sz="1575" b="0">
+                          <a:solidFill>
+                            <a:srgbClr val="2563EB"/>
+                          </a:solidFill>
+                          <a:latin typeface="Liberation Sans"/>
+                          <a:ea typeface="Liberation Sans"/>
+                          <a:cs typeface="Liberation Sans"/>
+                        </a:rPr>
+                        <a:t>Test</a:t>
+                      </a:r>
+                    </a:p>
+                  </a:txBody>
+                  <a:tcPr marL="19050" marR="19050" marT="19050" marB="19050">
+                    <a:solidFill>
+                      <a:srgbClr val="E0EBFF"/>
+                    </a:solidFill>
+                  </a:tcPr>
+                </a:tc>
+                <a:tc>
+                  <a:txBody>
+                    <a:bodyPr wrap="square" anchor="ctr">
+                      <a:noAutofit/>
+                    </a:bodyPr>
+                    <a:lstStyle/>
+                    <a:p>
+                      <a:pPr algn="ctr"/>
+                      <a:r>
+                        <a:rPr sz="1575" b="0">
+                          <a:solidFill>
+                            <a:srgbClr val="2563EB"/>
+                          </a:solidFill>
+                          <a:latin typeface="Liberation Sans"/>
+                          <a:ea typeface="Liberation Sans"/>
+                          <a:cs typeface="Liberation Sans"/>
+                        </a:rPr>
+                        <a:t>Pilot</a:t>
+                      </a:r>
+                    </a:p>
+                  </a:txBody>
+                  <a:tcPr marL="19050" marR="19050" marT="19050" marB="19050">
+                    <a:solidFill>
+                      <a:srgbClr val="E0EBFF"/>
+                    </a:solidFill>
+                  </a:tcPr>
+                </a:tc>
+                <a:tc>
+                  <a:txBody>
+                    <a:bodyPr wrap="square" anchor="ctr">
+                      <a:noAutofit/>
+                    </a:bodyPr>
+                    <a:lstStyle/>
+                    <a:p>
+                      <a:pPr algn="ctr"/>
+                      <a:r>
+                        <a:rPr sz="1575" b="0">
+                          <a:solidFill>
+                            <a:srgbClr val="2563EB"/>
+                          </a:solidFill>
+                          <a:latin typeface="Liberation Sans"/>
+                          <a:ea typeface="Liberation Sans"/>
+                          <a:cs typeface="Liberation Sans"/>
+                        </a:rPr>
+                        <a:t>Kabul</a:t>
+                      </a:r>
+                    </a:p>
+                  </a:txBody>
+                  <a:tcPr marL="19050" marR="19050" marT="19050" marB="19050">
+                    <a:solidFill>
+                      <a:srgbClr val="E0EBFF"/>
+                    </a:solidFill>
+                  </a:tcPr>
+                </a:tc>
+              </a:tr>
+            </a:tbl>
+          </a:graphicData>
+        </a:graphic>
+      </p:graphicFrame>
+      <p:graphicFrame>
+        <p:nvGraphicFramePr>
+          <p:cNvPr id="18" name="">
+            <a:extLst xmlns:a="http://schemas.openxmlformats.org/drawingml/2006/main">
+              <a:ext uri="{FF2B5EF4-FFF2-40B4-BE49-F238E27FC236}">
+                <a16:creationId xmlns:a16="http://schemas.microsoft.com/office/drawing/2014/main" id="{9777E873-A976-4708-AC03-5AC80171342A}"/>
+              </a:ext>
+            </a:extLst>
+          </p:cNvPr>
+          <p:cNvGraphicFramePr/>
+          <p:nvPr/>
+        </p:nvGraphicFramePr>
+        <p:xfrm>
+          <a:off xmlns:a="http://schemas.openxmlformats.org/drawingml/2006/main" x="457200" y="3581400"/>
+          <a:ext xmlns:a="http://schemas.openxmlformats.org/drawingml/2006/main" cx="14325600" cy="2133600"/>
+        </p:xfrm>
+        <a:graphic xmlns:a="http://schemas.openxmlformats.org/drawingml/2006/main">
+          <a:graphicData uri="http://schemas.openxmlformats.org/drawingml/2006/table">
+            <a:tbl>
+              <a:tblPr firstRow="0" bandRow="0"/>
+              <a:tblGrid>
+                <a:gridCol w="2190750"/>
                 <a:gridCol w="1619250"/>
-                <a:gridCol w="857250"/>
-                <a:gridCol w="857250"/>
-                <a:gridCol w="857250"/>
-                <a:gridCol w="857250"/>
-                <a:gridCol w="857250"/>
-                <a:gridCol w="857250"/>
-                <a:gridCol w="857250"/>
+                <a:gridCol w="1428750"/>
+                <a:gridCol w="1428750"/>
+                <a:gridCol w="2000250"/>
+                <a:gridCol w="5657850"/>
               </a:tblGrid>
-              <a:tr h="552450">
+              <a:tr h="419100">
                 <a:tc>
                   <a:txBody>
                     <a:bodyPr wrap="square" anchor="ctr">
@@ -3668,11 +4738,11 @@
                           <a:ea typeface="Liberation Sans"/>
                           <a:cs typeface="Liberation Sans"/>
                         </a:rPr>
-                        <a:t>Aşama</a:t>
-                      </a:r>
-                    </a:p>
-                  </a:txBody>
-                  <a:tcPr marL="57150" marR="57150" marT="19050" marB="19050">
+                        <a:t>Proje</a:t>
+                      </a:r>
+                    </a:p>
+                  </a:txBody>
+                  <a:tcPr marL="76200" marR="76200" marT="19050" marB="19050">
                     <a:solidFill>
                       <a:srgbClr val="14344B"/>
                     </a:solidFill>
@@ -3695,9 +4765,22 @@
                           <a:ea typeface="Liberation Sans"/>
                           <a:cs typeface="Liberation Sans"/>
                         </a:rPr>
-                        <a:t>Plan / güncel</a:t>
-                      </a:r>
-                    </a:p>
+                        <a:t>Mevcut aşama</a:t>
+                      </a:r>
+                    </a:p>
+                  </a:txBody>
+                  <a:tcPr marL="76200" marR="76200" marT="19050" marB="19050">
+                    <a:solidFill>
+                      <a:srgbClr val="14344B"/>
+                    </a:solidFill>
+                  </a:tcPr>
+                </a:tc>
+                <a:tc>
+                  <a:txBody>
+                    <a:bodyPr wrap="square" anchor="ctr">
+                      <a:noAutofit/>
+                    </a:bodyPr>
+                    <a:lstStyle/>
                     <a:p>
                       <a:pPr algn="l"/>
                       <a:r>
@@ -3709,11 +4792,11 @@
                           <a:ea typeface="Liberation Sans"/>
                           <a:cs typeface="Liberation Sans"/>
                         </a:rPr>
-                        <a:t>bitiş</a:t>
-                      </a:r>
-                    </a:p>
-                  </a:txBody>
-                  <a:tcPr marL="57150" marR="57150" marT="19050" marB="19050">
+                        <a:t>Plan bitiş</a:t>
+                      </a:r>
+                    </a:p>
+                  </a:txBody>
+                  <a:tcPr marL="76200" marR="76200" marT="19050" marB="19050">
                     <a:solidFill>
                       <a:srgbClr val="14344B"/>
                     </a:solidFill>
@@ -3726,9 +4809,9 @@
                     </a:bodyPr>
                     <a:lstStyle/>
                     <a:p>
-                      <a:pPr algn="ctr"/>
-                      <a:r>
-                        <a:rPr sz="1500" b="1">
+                      <a:pPr algn="l"/>
+                      <a:r>
+                        <a:rPr sz="1650" b="1">
                           <a:solidFill>
                             <a:srgbClr val="FFFFFF"/>
                           </a:solidFill>
@@ -3736,11 +4819,11 @@
                           <a:ea typeface="Liberation Sans"/>
                           <a:cs typeface="Liberation Sans"/>
                         </a:rPr>
-                        <a:t>05.10</a:t>
-                      </a:r>
-                    </a:p>
-                  </a:txBody>
-                  <a:tcPr marL="19050" marR="19050" marT="19050" marB="19050">
+                        <a:t>Güncel bitiş</a:t>
+                      </a:r>
+                    </a:p>
+                  </a:txBody>
+                  <a:tcPr marL="76200" marR="76200" marT="19050" marB="19050">
                     <a:solidFill>
                       <a:srgbClr val="14344B"/>
                     </a:solidFill>
@@ -3753,9 +4836,9 @@
                     </a:bodyPr>
                     <a:lstStyle/>
                     <a:p>
-                      <a:pPr algn="ctr"/>
-                      <a:r>
-                        <a:rPr sz="1500" b="1">
+                      <a:pPr algn="l"/>
+                      <a:r>
+                        <a:rPr sz="1650" b="1">
                           <a:solidFill>
                             <a:srgbClr val="FFFFFF"/>
                           </a:solidFill>
@@ -3763,13 +4846,26 @@
                           <a:ea typeface="Liberation Sans"/>
                           <a:cs typeface="Liberation Sans"/>
                         </a:rPr>
-                        <a:t>12.10</a:t>
-                      </a:r>
-                    </a:p>
-                    <a:p>
-                      <a:pPr algn="ctr"/>
-                      <a:r>
-                        <a:rPr sz="1500" b="1">
+                        <a:t>Plana göre</a:t>
+                      </a:r>
+                    </a:p>
+                  </a:txBody>
+                  <a:tcPr marL="76200" marR="76200" marT="19050" marB="19050">
+                    <a:solidFill>
+                      <a:srgbClr val="14344B"/>
+                    </a:solidFill>
+                  </a:tcPr>
+                </a:tc>
+                <a:tc>
+                  <a:txBody>
+                    <a:bodyPr wrap="square" anchor="ctr">
+                      <a:noAutofit/>
+                    </a:bodyPr>
+                    <a:lstStyle/>
+                    <a:p>
+                      <a:pPr algn="l"/>
+                      <a:r>
+                        <a:rPr sz="1650" b="1">
                           <a:solidFill>
                             <a:srgbClr val="FFFFFF"/>
                           </a:solidFill>
@@ -3777,153 +4873,18 @@
                           <a:ea typeface="Liberation Sans"/>
                           <a:cs typeface="Liberation Sans"/>
                         </a:rPr>
-                        <a:t>Bu hafta</a:t>
-                      </a:r>
-                    </a:p>
-                  </a:txBody>
-                  <a:tcPr marL="19050" marR="19050" marT="19050" marB="19050">
-                    <a:solidFill>
-                      <a:srgbClr val="008E86"/>
-                    </a:solidFill>
-                  </a:tcPr>
-                </a:tc>
-                <a:tc>
-                  <a:txBody>
-                    <a:bodyPr wrap="square" anchor="ctr">
-                      <a:noAutofit/>
-                    </a:bodyPr>
-                    <a:lstStyle/>
-                    <a:p>
-                      <a:pPr algn="ctr"/>
-                      <a:r>
-                        <a:rPr sz="1500" b="1">
-                          <a:solidFill>
-                            <a:srgbClr val="FFFFFF"/>
-                          </a:solidFill>
-                          <a:latin typeface="Liberation Sans"/>
-                          <a:ea typeface="Liberation Sans"/>
-                          <a:cs typeface="Liberation Sans"/>
-                        </a:rPr>
-                        <a:t>19.10</a:t>
-                      </a:r>
-                    </a:p>
-                  </a:txBody>
-                  <a:tcPr marL="19050" marR="19050" marT="19050" marB="19050">
+                        <a:t>Kritik alan</a:t>
+                      </a:r>
+                    </a:p>
+                  </a:txBody>
+                  <a:tcPr marL="76200" marR="76200" marT="19050" marB="19050">
                     <a:solidFill>
                       <a:srgbClr val="14344B"/>
                     </a:solidFill>
                   </a:tcPr>
                 </a:tc>
-                <a:tc>
-                  <a:txBody>
-                    <a:bodyPr wrap="square" anchor="ctr">
-                      <a:noAutofit/>
-                    </a:bodyPr>
-                    <a:lstStyle/>
-                    <a:p>
-                      <a:pPr algn="ctr"/>
-                      <a:r>
-                        <a:rPr sz="1500" b="1">
-                          <a:solidFill>
-                            <a:srgbClr val="FFFFFF"/>
-                          </a:solidFill>
-                          <a:latin typeface="Liberation Sans"/>
-                          <a:ea typeface="Liberation Sans"/>
-                          <a:cs typeface="Liberation Sans"/>
-                        </a:rPr>
-                        <a:t>26.10</a:t>
-                      </a:r>
-                    </a:p>
-                  </a:txBody>
-                  <a:tcPr marL="19050" marR="19050" marT="19050" marB="19050">
-                    <a:solidFill>
-                      <a:srgbClr val="14344B"/>
-                    </a:solidFill>
-                  </a:tcPr>
-                </a:tc>
-                <a:tc>
-                  <a:txBody>
-                    <a:bodyPr wrap="square" anchor="ctr">
-                      <a:noAutofit/>
-                    </a:bodyPr>
-                    <a:lstStyle/>
-                    <a:p>
-                      <a:pPr algn="ctr"/>
-                      <a:r>
-                        <a:rPr sz="1500" b="1">
-                          <a:solidFill>
-                            <a:srgbClr val="FFFFFF"/>
-                          </a:solidFill>
-                          <a:latin typeface="Liberation Sans"/>
-                          <a:ea typeface="Liberation Sans"/>
-                          <a:cs typeface="Liberation Sans"/>
-                        </a:rPr>
-                        <a:t>02.11</a:t>
-                      </a:r>
-                    </a:p>
-                  </a:txBody>
-                  <a:tcPr marL="19050" marR="19050" marT="19050" marB="19050">
-                    <a:solidFill>
-                      <a:srgbClr val="14344B"/>
-                    </a:solidFill>
-                  </a:tcPr>
-                </a:tc>
-                <a:tc>
-                  <a:txBody>
-                    <a:bodyPr wrap="square" anchor="ctr">
-                      <a:noAutofit/>
-                    </a:bodyPr>
-                    <a:lstStyle/>
-                    <a:p>
-                      <a:pPr algn="ctr"/>
-                      <a:r>
-                        <a:rPr sz="1500" b="1">
-                          <a:solidFill>
-                            <a:srgbClr val="FFFFFF"/>
-                          </a:solidFill>
-                          <a:latin typeface="Liberation Sans"/>
-                          <a:ea typeface="Liberation Sans"/>
-                          <a:cs typeface="Liberation Sans"/>
-                        </a:rPr>
-                        <a:t>09.11</a:t>
-                      </a:r>
-                    </a:p>
-                  </a:txBody>
-                  <a:tcPr marL="19050" marR="19050" marT="19050" marB="19050">
-                    <a:solidFill>
-                      <a:srgbClr val="14344B"/>
-                    </a:solidFill>
-                  </a:tcPr>
-                </a:tc>
-                <a:tc>
-                  <a:txBody>
-                    <a:bodyPr wrap="square" anchor="ctr">
-                      <a:noAutofit/>
-                    </a:bodyPr>
-                    <a:lstStyle/>
-                    <a:p>
-                      <a:pPr algn="ctr"/>
-                      <a:r>
-                        <a:rPr sz="1500" b="1">
-                          <a:solidFill>
-                            <a:srgbClr val="FFFFFF"/>
-                          </a:solidFill>
-                          <a:latin typeface="Liberation Sans"/>
-                          <a:ea typeface="Liberation Sans"/>
-                          <a:cs typeface="Liberation Sans"/>
-                        </a:rPr>
-                        <a:t>16.11</a:t>
-                      </a:r>
-                    </a:p>
-                  </a:txBody>
-                  <a:tcPr marL="19050" marR="19050" marT="19050" marB="19050">
-                    <a:solidFill>
-                      <a:srgbClr val="14344B"/>
-                    </a:solidFill>
-                  </a:tcPr>
-                </a:tc>
               </a:tr>
-              <a:tr h="457200">
+              <a:tr h="571500">
                 <a:tc>
                   <a:txBody>
                     <a:bodyPr wrap="square" anchor="ctr">
@@ -3941,11 +4902,11 @@
                           <a:ea typeface="Liberation Sans"/>
                           <a:cs typeface="Liberation Sans"/>
                         </a:rPr>
-                        <a:t>Tasarım</a:t>
-                      </a:r>
-                    </a:p>
-                  </a:txBody>
-                  <a:tcPr marL="57150" marR="57150" marT="19050" marB="19050">
+                        <a:t>Üretim Hattı</a:t>
+                      </a:r>
+                    </a:p>
+                  </a:txBody>
+                  <a:tcPr marL="76200" marR="76200" marT="19050" marB="19050">
                     <a:solidFill>
                       <a:srgbClr val="FFFFFF"/>
                     </a:solidFill>
@@ -3958,21 +4919,21 @@
                     </a:bodyPr>
                     <a:lstStyle/>
                     <a:p>
-                      <a:pPr algn="ctr"/>
-                      <a:r>
-                        <a:rPr sz="1575" b="0">
-                          <a:solidFill>
-                            <a:srgbClr val="273F50"/>
-                          </a:solidFill>
-                          <a:latin typeface="Liberation Sans"/>
-                          <a:ea typeface="Liberation Sans"/>
-                          <a:cs typeface="Liberation Sans"/>
-                        </a:rPr>
-                        <a:t>09.10 / 09.10</a:t>
-                      </a:r>
-                    </a:p>
-                  </a:txBody>
-                  <a:tcPr marL="57150" marR="57150" marT="19050" marB="19050">
+                      <a:pPr algn="l"/>
+                      <a:r>
+                        <a:rPr sz="1725" b="0">
+                          <a:solidFill>
+                            <a:srgbClr val="273F50"/>
+                          </a:solidFill>
+                          <a:latin typeface="Liberation Sans"/>
+                          <a:ea typeface="Liberation Sans"/>
+                          <a:cs typeface="Liberation Sans"/>
+                        </a:rPr>
+                        <a:t>Tedarik</a:t>
+                      </a:r>
+                    </a:p>
+                  </a:txBody>
+                  <a:tcPr marL="76200" marR="76200" marT="19050" marB="19050">
                     <a:solidFill>
                       <a:srgbClr val="FFFFFF"/>
                     </a:solidFill>
@@ -3985,48 +4946,21 @@
                     </a:bodyPr>
                     <a:lstStyle/>
                     <a:p>
-                      <a:pPr algn="ctr"/>
-                      <a:r>
-                        <a:rPr sz="1575" b="1">
-                          <a:solidFill>
-                            <a:srgbClr val="FFFFFF"/>
-                          </a:solidFill>
-                          <a:latin typeface="Liberation Sans"/>
-                          <a:ea typeface="Liberation Sans"/>
-                          <a:cs typeface="Liberation Sans"/>
-                        </a:rPr>
-                        <a:t>Bitti</a:t>
-                      </a:r>
-                    </a:p>
-                  </a:txBody>
-                  <a:tcPr marL="19050" marR="19050" marT="19050" marB="19050">
-                    <a:solidFill>
-                      <a:srgbClr val="2563EB"/>
-                    </a:solidFill>
-                  </a:tcPr>
-                </a:tc>
-                <a:tc>
-                  <a:txBody>
-                    <a:bodyPr wrap="square" anchor="ctr">
-                      <a:noAutofit/>
-                    </a:bodyPr>
-                    <a:lstStyle/>
-                    <a:p>
-                      <a:pPr algn="ctr"/>
-                      <a:r>
-                        <a:rPr sz="1575" b="0">
-                          <a:solidFill>
-                            <a:srgbClr val="273F50"/>
-                          </a:solidFill>
-                          <a:latin typeface="Liberation Sans"/>
-                          <a:ea typeface="Liberation Sans"/>
-                          <a:cs typeface="Liberation Sans"/>
-                        </a:rPr>
-                        <a:t/>
-                      </a:r>
-                    </a:p>
-                  </a:txBody>
-                  <a:tcPr marL="19050" marR="19050" marT="19050" marB="19050">
+                      <a:pPr algn="l"/>
+                      <a:r>
+                        <a:rPr sz="1725" b="0">
+                          <a:solidFill>
+                            <a:srgbClr val="273F50"/>
+                          </a:solidFill>
+                          <a:latin typeface="Liberation Sans"/>
+                          <a:ea typeface="Liberation Sans"/>
+                          <a:cs typeface="Liberation Sans"/>
+                        </a:rPr>
+                        <a:t>13.11</a:t>
+                      </a:r>
+                    </a:p>
+                  </a:txBody>
+                  <a:tcPr marL="76200" marR="76200" marT="19050" marB="19050">
                     <a:solidFill>
                       <a:srgbClr val="FFFFFF"/>
                     </a:solidFill>
@@ -4039,21 +4973,21 @@
                     </a:bodyPr>
                     <a:lstStyle/>
                     <a:p>
-                      <a:pPr algn="ctr"/>
-                      <a:r>
-                        <a:rPr sz="1575" b="0">
-                          <a:solidFill>
-                            <a:srgbClr val="273F50"/>
-                          </a:solidFill>
-                          <a:latin typeface="Liberation Sans"/>
-                          <a:ea typeface="Liberation Sans"/>
-                          <a:cs typeface="Liberation Sans"/>
-                        </a:rPr>
-                        <a:t/>
-                      </a:r>
-                    </a:p>
-                  </a:txBody>
-                  <a:tcPr marL="19050" marR="19050" marT="19050" marB="19050">
+                      <a:pPr algn="l"/>
+                      <a:r>
+                        <a:rPr sz="1725" b="0">
+                          <a:solidFill>
+                            <a:srgbClr val="273F50"/>
+                          </a:solidFill>
+                          <a:latin typeface="Liberation Sans"/>
+                          <a:ea typeface="Liberation Sans"/>
+                          <a:cs typeface="Liberation Sans"/>
+                        </a:rPr>
+                        <a:t>20.11</a:t>
+                      </a:r>
+                    </a:p>
+                  </a:txBody>
+                  <a:tcPr marL="76200" marR="76200" marT="19050" marB="19050">
                     <a:solidFill>
                       <a:srgbClr val="FFFFFF"/>
                     </a:solidFill>
@@ -4066,48 +5000,297 @@
                     </a:bodyPr>
                     <a:lstStyle/>
                     <a:p>
-                      <a:pPr algn="ctr"/>
-                      <a:r>
-                        <a:rPr sz="1575" b="0">
-                          <a:solidFill>
-                            <a:srgbClr val="273F50"/>
-                          </a:solidFill>
-                          <a:latin typeface="Liberation Sans"/>
-                          <a:ea typeface="Liberation Sans"/>
-                          <a:cs typeface="Liberation Sans"/>
-                        </a:rPr>
-                        <a:t/>
-                      </a:r>
-                    </a:p>
-                  </a:txBody>
-                  <a:tcPr marL="19050" marR="19050" marT="19050" marB="19050">
+                      <a:pPr algn="l"/>
+                      <a:r>
+                        <a:rPr sz="1725" b="1">
+                          <a:solidFill>
+                            <a:srgbClr val="D97B0A"/>
+                          </a:solidFill>
+                          <a:latin typeface="Liberation Sans"/>
+                          <a:ea typeface="Liberation Sans"/>
+                          <a:cs typeface="Liberation Sans"/>
+                        </a:rPr>
+                        <a:t>10 puan geride</a:t>
+                      </a:r>
+                    </a:p>
+                    <a:p>
+                      <a:pPr algn="l"/>
+                      <a:r>
+                        <a:rPr sz="1725" b="1">
+                          <a:solidFill>
+                            <a:srgbClr val="D97B0A"/>
+                          </a:solidFill>
+                          <a:latin typeface="Liberation Sans"/>
+                          <a:ea typeface="Liberation Sans"/>
+                          <a:cs typeface="Liberation Sans"/>
+                        </a:rPr>
+                        <a:t>7 gün gecikme</a:t>
+                      </a:r>
+                    </a:p>
+                  </a:txBody>
+                  <a:tcPr marL="76200" marR="76200" marT="19050" marB="19050">
+                    <a:solidFill>
+                      <a:srgbClr val="FFF0D6"/>
+                    </a:solidFill>
+                  </a:tcPr>
+                </a:tc>
+                <a:tc>
+                  <a:txBody>
+                    <a:bodyPr wrap="square" anchor="ctr">
+                      <a:noAutofit/>
+                    </a:bodyPr>
+                    <a:lstStyle/>
+                    <a:p>
+                      <a:pPr algn="l"/>
+                      <a:r>
+                        <a:rPr sz="1725" b="0">
+                          <a:solidFill>
+                            <a:srgbClr val="273F50"/>
+                          </a:solidFill>
+                          <a:latin typeface="Liberation Sans"/>
+                          <a:ea typeface="Liberation Sans"/>
+                          <a:cs typeface="Liberation Sans"/>
+                        </a:rPr>
+                        <a:t>Motor teslimi, 23.10 hedefi.</a:t>
+                      </a:r>
+                    </a:p>
+                    <a:p>
+                      <a:pPr algn="l"/>
+                      <a:r>
+                        <a:rPr sz="1725" b="0">
+                          <a:solidFill>
+                            <a:srgbClr val="273F50"/>
+                          </a:solidFill>
+                          <a:latin typeface="Liberation Sans"/>
+                          <a:ea typeface="Liberation Sans"/>
+                          <a:cs typeface="Liberation Sans"/>
+                        </a:rPr>
+                        <a:t>Alternatif tedarikçi gerekli.</a:t>
+                      </a:r>
+                    </a:p>
+                  </a:txBody>
+                  <a:tcPr marL="76200" marR="76200" marT="19050" marB="19050">
                     <a:solidFill>
                       <a:srgbClr val="FFFFFF"/>
                     </a:solidFill>
                   </a:tcPr>
                 </a:tc>
-                <a:tc>
-                  <a:txBody>
-                    <a:bodyPr wrap="square" anchor="ctr">
-                      <a:noAutofit/>
-                    </a:bodyPr>
-                    <a:lstStyle/>
-                    <a:p>
-                      <a:pPr algn="ctr"/>
-                      <a:r>
-                        <a:rPr sz="1575" b="0">
-                          <a:solidFill>
-                            <a:srgbClr val="273F50"/>
-                          </a:solidFill>
-                          <a:latin typeface="Liberation Sans"/>
-                          <a:ea typeface="Liberation Sans"/>
-                          <a:cs typeface="Liberation Sans"/>
-                        </a:rPr>
-                        <a:t/>
-                      </a:r>
-                    </a:p>
-                  </a:txBody>
-                  <a:tcPr marL="19050" marR="19050" marT="19050" marB="19050">
+              </a:tr>
+              <a:tr h="571500">
+                <a:tc>
+                  <a:txBody>
+                    <a:bodyPr wrap="square" anchor="ctr">
+                      <a:noAutofit/>
+                    </a:bodyPr>
+                    <a:lstStyle/>
+                    <a:p>
+                      <a:pPr algn="l"/>
+                      <a:r>
+                        <a:rPr sz="1725" b="1">
+                          <a:solidFill>
+                            <a:srgbClr val="273F50"/>
+                          </a:solidFill>
+                          <a:latin typeface="Liberation Sans"/>
+                          <a:ea typeface="Liberation Sans"/>
+                          <a:cs typeface="Liberation Sans"/>
+                        </a:rPr>
+                        <a:t>Müşteri Portalı</a:t>
+                      </a:r>
+                    </a:p>
+                  </a:txBody>
+                  <a:tcPr marL="76200" marR="76200" marT="19050" marB="19050">
+                    <a:solidFill>
+                      <a:srgbClr val="F1F6FA"/>
+                    </a:solidFill>
+                  </a:tcPr>
+                </a:tc>
+                <a:tc>
+                  <a:txBody>
+                    <a:bodyPr wrap="square" anchor="ctr">
+                      <a:noAutofit/>
+                    </a:bodyPr>
+                    <a:lstStyle/>
+                    <a:p>
+                      <a:pPr algn="l"/>
+                      <a:r>
+                        <a:rPr sz="1725" b="0">
+                          <a:solidFill>
+                            <a:srgbClr val="273F50"/>
+                          </a:solidFill>
+                          <a:latin typeface="Liberation Sans"/>
+                          <a:ea typeface="Liberation Sans"/>
+                          <a:cs typeface="Liberation Sans"/>
+                        </a:rPr>
+                        <a:t>Geliştirme</a:t>
+                      </a:r>
+                    </a:p>
+                  </a:txBody>
+                  <a:tcPr marL="76200" marR="76200" marT="19050" marB="19050">
+                    <a:solidFill>
+                      <a:srgbClr val="F1F6FA"/>
+                    </a:solidFill>
+                  </a:tcPr>
+                </a:tc>
+                <a:tc>
+                  <a:txBody>
+                    <a:bodyPr wrap="square" anchor="ctr">
+                      <a:noAutofit/>
+                    </a:bodyPr>
+                    <a:lstStyle/>
+                    <a:p>
+                      <a:pPr algn="l"/>
+                      <a:r>
+                        <a:rPr sz="1725" b="0">
+                          <a:solidFill>
+                            <a:srgbClr val="273F50"/>
+                          </a:solidFill>
+                          <a:latin typeface="Liberation Sans"/>
+                          <a:ea typeface="Liberation Sans"/>
+                          <a:cs typeface="Liberation Sans"/>
+                        </a:rPr>
+                        <a:t>06.11</a:t>
+                      </a:r>
+                    </a:p>
+                  </a:txBody>
+                  <a:tcPr marL="76200" marR="76200" marT="19050" marB="19050">
+                    <a:solidFill>
+                      <a:srgbClr val="F1F6FA"/>
+                    </a:solidFill>
+                  </a:tcPr>
+                </a:tc>
+                <a:tc>
+                  <a:txBody>
+                    <a:bodyPr wrap="square" anchor="ctr">
+                      <a:noAutofit/>
+                    </a:bodyPr>
+                    <a:lstStyle/>
+                    <a:p>
+                      <a:pPr algn="l"/>
+                      <a:r>
+                        <a:rPr sz="1725" b="0">
+                          <a:solidFill>
+                            <a:srgbClr val="273F50"/>
+                          </a:solidFill>
+                          <a:latin typeface="Liberation Sans"/>
+                          <a:ea typeface="Liberation Sans"/>
+                          <a:cs typeface="Liberation Sans"/>
+                        </a:rPr>
+                        <a:t>03.11</a:t>
+                      </a:r>
+                    </a:p>
+                  </a:txBody>
+                  <a:tcPr marL="76200" marR="76200" marT="19050" marB="19050">
+                    <a:solidFill>
+                      <a:srgbClr val="F1F6FA"/>
+                    </a:solidFill>
+                  </a:tcPr>
+                </a:tc>
+                <a:tc>
+                  <a:txBody>
+                    <a:bodyPr wrap="square" anchor="ctr">
+                      <a:noAutofit/>
+                    </a:bodyPr>
+                    <a:lstStyle/>
+                    <a:p>
+                      <a:pPr algn="l"/>
+                      <a:r>
+                        <a:rPr sz="1725" b="1">
+                          <a:solidFill>
+                            <a:srgbClr val="008E86"/>
+                          </a:solidFill>
+                          <a:latin typeface="Liberation Sans"/>
+                          <a:ea typeface="Liberation Sans"/>
+                          <a:cs typeface="Liberation Sans"/>
+                        </a:rPr>
+                        <a:t>5 puan ileride</a:t>
+                      </a:r>
+                    </a:p>
+                    <a:p>
+                      <a:pPr algn="l"/>
+                      <a:r>
+                        <a:rPr sz="1725" b="1">
+                          <a:solidFill>
+                            <a:srgbClr val="008E86"/>
+                          </a:solidFill>
+                          <a:latin typeface="Liberation Sans"/>
+                          <a:ea typeface="Liberation Sans"/>
+                          <a:cs typeface="Liberation Sans"/>
+                        </a:rPr>
+                        <a:t>3 gün erken</a:t>
+                      </a:r>
+                    </a:p>
+                  </a:txBody>
+                  <a:tcPr marL="76200" marR="76200" marT="19050" marB="19050">
+                    <a:solidFill>
+                      <a:srgbClr val="DDF2EE"/>
+                    </a:solidFill>
+                  </a:tcPr>
+                </a:tc>
+                <a:tc>
+                  <a:txBody>
+                    <a:bodyPr wrap="square" anchor="ctr">
+                      <a:noAutofit/>
+                    </a:bodyPr>
+                    <a:lstStyle/>
+                    <a:p>
+                      <a:pPr algn="l"/>
+                      <a:r>
+                        <a:rPr sz="1725" b="0">
+                          <a:solidFill>
+                            <a:srgbClr val="273F50"/>
+                          </a:solidFill>
+                          <a:latin typeface="Liberation Sans"/>
+                          <a:ea typeface="Liberation Sans"/>
+                          <a:cs typeface="Liberation Sans"/>
+                        </a:rPr>
+                        <a:t>Güvenlik testleri, 19.10.</a:t>
+                      </a:r>
+                    </a:p>
+                    <a:p>
+                      <a:pPr algn="l"/>
+                      <a:r>
+                        <a:rPr sz="1725" b="0">
+                          <a:solidFill>
+                            <a:srgbClr val="273F50"/>
+                          </a:solidFill>
+                          <a:latin typeface="Liberation Sans"/>
+                          <a:ea typeface="Liberation Sans"/>
+                          <a:cs typeface="Liberation Sans"/>
+                        </a:rPr>
+                        <a:t>Test ortamına erişim gerekli.</a:t>
+                      </a:r>
+                    </a:p>
+                  </a:txBody>
+                  <a:tcPr marL="76200" marR="76200" marT="19050" marB="19050">
+                    <a:solidFill>
+                      <a:srgbClr val="F1F6FA"/>
+                    </a:solidFill>
+                  </a:tcPr>
+                </a:tc>
+              </a:tr>
+              <a:tr h="571500">
+                <a:tc>
+                  <a:txBody>
+                    <a:bodyPr wrap="square" anchor="ctr">
+                      <a:noAutofit/>
+                    </a:bodyPr>
+                    <a:lstStyle/>
+                    <a:p>
+                      <a:pPr algn="l"/>
+                      <a:r>
+                        <a:rPr sz="1725" b="1">
+                          <a:solidFill>
+                            <a:srgbClr val="273F50"/>
+                          </a:solidFill>
+                          <a:latin typeface="Liberation Sans"/>
+                          <a:ea typeface="Liberation Sans"/>
+                          <a:cs typeface="Liberation Sans"/>
+                        </a:rPr>
+                        <a:t>Depo Otomasyonu</a:t>
+                      </a:r>
+                    </a:p>
+                  </a:txBody>
+                  <a:tcPr marL="76200" marR="76200" marT="19050" marB="19050">
                     <a:solidFill>
                       <a:srgbClr val="FFFFFF"/>
                     </a:solidFill>
@@ -4120,21 +5303,21 @@
                     </a:bodyPr>
                     <a:lstStyle/>
                     <a:p>
-                      <a:pPr algn="ctr"/>
-                      <a:r>
-                        <a:rPr sz="1575" b="0">
-                          <a:solidFill>
-                            <a:srgbClr val="273F50"/>
-                          </a:solidFill>
-                          <a:latin typeface="Liberation Sans"/>
-                          <a:ea typeface="Liberation Sans"/>
-                          <a:cs typeface="Liberation Sans"/>
-                        </a:rPr>
-                        <a:t/>
-                      </a:r>
-                    </a:p>
-                  </a:txBody>
-                  <a:tcPr marL="19050" marR="19050" marT="19050" marB="19050">
+                      <a:pPr algn="l"/>
+                      <a:r>
+                        <a:rPr sz="1725" b="0">
+                          <a:solidFill>
+                            <a:srgbClr val="273F50"/>
+                          </a:solidFill>
+                          <a:latin typeface="Liberation Sans"/>
+                          <a:ea typeface="Liberation Sans"/>
+                          <a:cs typeface="Liberation Sans"/>
+                        </a:rPr>
+                        <a:t>Analiz</a:t>
+                      </a:r>
+                    </a:p>
+                  </a:txBody>
+                  <a:tcPr marL="76200" marR="76200" marT="19050" marB="19050">
                     <a:solidFill>
                       <a:srgbClr val="FFFFFF"/>
                     </a:solidFill>
@@ -4147,28 +5330,26 @@
                     </a:bodyPr>
                     <a:lstStyle/>
                     <a:p>
-                      <a:pPr algn="ctr"/>
-                      <a:r>
-                        <a:rPr sz="1575" b="0">
-                          <a:solidFill>
-                            <a:srgbClr val="273F50"/>
-                          </a:solidFill>
-                          <a:latin typeface="Liberation Sans"/>
-                          <a:ea typeface="Liberation Sans"/>
-                          <a:cs typeface="Liberation Sans"/>
-                        </a:rPr>
-                        <a:t/>
-                      </a:r>
-                    </a:p>
-                  </a:txBody>
-                  <a:tcPr marL="19050" marR="19050" marT="19050" marB="19050">
+                      <a:pPr algn="l"/>
+                      <a:r>
+                        <a:rPr sz="1725" b="0">
+                          <a:solidFill>
+                            <a:srgbClr val="273F50"/>
+                          </a:solidFill>
+                          <a:latin typeface="Liberation Sans"/>
+                          <a:ea typeface="Liberation Sans"/>
+                          <a:cs typeface="Liberation Sans"/>
+                        </a:rPr>
+                        <a:t>27.11</a:t>
+                      </a:r>
+                    </a:p>
+                  </a:txBody>
+                  <a:tcPr marL="76200" marR="76200" marT="19050" marB="19050">
                     <a:solidFill>
                       <a:srgbClr val="FFFFFF"/>
                     </a:solidFill>
                   </a:tcPr>
                 </a:tc>
-              </a:tr>
-              <a:tr h="457200">
                 <a:tc>
                   <a:txBody>
                     <a:bodyPr wrap="square" anchor="ctr">
@@ -4178,972 +5359,103 @@
                     <a:p>
                       <a:pPr algn="l"/>
                       <a:r>
+                        <a:rPr sz="1725" b="0">
+                          <a:solidFill>
+                            <a:srgbClr val="273F50"/>
+                          </a:solidFill>
+                          <a:latin typeface="Liberation Sans"/>
+                          <a:ea typeface="Liberation Sans"/>
+                          <a:cs typeface="Liberation Sans"/>
+                        </a:rPr>
+                        <a:t>27.11</a:t>
+                      </a:r>
+                    </a:p>
+                  </a:txBody>
+                  <a:tcPr marL="76200" marR="76200" marT="19050" marB="19050">
+                    <a:solidFill>
+                      <a:srgbClr val="FFFFFF"/>
+                    </a:solidFill>
+                  </a:tcPr>
+                </a:tc>
+                <a:tc>
+                  <a:txBody>
+                    <a:bodyPr wrap="square" anchor="ctr">
+                      <a:noAutofit/>
+                    </a:bodyPr>
+                    <a:lstStyle/>
+                    <a:p>
+                      <a:pPr algn="l"/>
+                      <a:r>
                         <a:rPr sz="1725" b="1">
                           <a:solidFill>
-                            <a:srgbClr val="273F50"/>
-                          </a:solidFill>
-                          <a:latin typeface="Liberation Sans"/>
-                          <a:ea typeface="Liberation Sans"/>
-                          <a:cs typeface="Liberation Sans"/>
-                        </a:rPr>
-                        <a:t>Tedarik</a:t>
-                      </a:r>
-                    </a:p>
-                  </a:txBody>
-                  <a:tcPr marL="57150" marR="57150" marT="19050" marB="19050">
-                    <a:solidFill>
-                      <a:srgbClr val="F1F6FA"/>
-                    </a:solidFill>
-                  </a:tcPr>
-                </a:tc>
-                <a:tc>
-                  <a:txBody>
-                    <a:bodyPr wrap="square" anchor="ctr">
-                      <a:noAutofit/>
-                    </a:bodyPr>
-                    <a:lstStyle/>
-                    <a:p>
-                      <a:pPr algn="ctr"/>
-                      <a:r>
-                        <a:rPr sz="1575" b="0">
-                          <a:solidFill>
-                            <a:srgbClr val="273F50"/>
-                          </a:solidFill>
-                          <a:latin typeface="Liberation Sans"/>
-                          <a:ea typeface="Liberation Sans"/>
-                          <a:cs typeface="Liberation Sans"/>
-                        </a:rPr>
-                        <a:t>23.10 / 30.10</a:t>
-                      </a:r>
-                    </a:p>
-                  </a:txBody>
-                  <a:tcPr marL="57150" marR="57150" marT="19050" marB="19050">
-                    <a:solidFill>
-                      <a:srgbClr val="F1F6FA"/>
-                    </a:solidFill>
-                  </a:tcPr>
-                </a:tc>
-                <a:tc>
-                  <a:txBody>
-                    <a:bodyPr wrap="square" anchor="ctr">
-                      <a:noAutofit/>
-                    </a:bodyPr>
-                    <a:lstStyle/>
-                    <a:p>
-                      <a:pPr algn="ctr"/>
-                      <a:r>
-                        <a:rPr sz="1575" b="0">
-                          <a:solidFill>
-                            <a:srgbClr val="273F50"/>
-                          </a:solidFill>
-                          <a:latin typeface="Liberation Sans"/>
-                          <a:ea typeface="Liberation Sans"/>
-                          <a:cs typeface="Liberation Sans"/>
-                        </a:rPr>
-                        <a:t/>
-                      </a:r>
-                    </a:p>
-                  </a:txBody>
-                  <a:tcPr marL="19050" marR="19050" marT="19050" marB="19050">
-                    <a:solidFill>
-                      <a:srgbClr val="F1F6FA"/>
-                    </a:solidFill>
-                  </a:tcPr>
-                </a:tc>
-                <a:tc>
-                  <a:txBody>
-                    <a:bodyPr wrap="square" anchor="ctr">
-                      <a:noAutofit/>
-                    </a:bodyPr>
-                    <a:lstStyle/>
-                    <a:p>
-                      <a:pPr algn="ctr"/>
-                      <a:r>
-                        <a:rPr sz="1575" b="1">
-                          <a:solidFill>
-                            <a:srgbClr val="FFFFFF"/>
-                          </a:solidFill>
-                          <a:latin typeface="Liberation Sans"/>
-                          <a:ea typeface="Liberation Sans"/>
-                          <a:cs typeface="Liberation Sans"/>
-                        </a:rPr>
-                        <a:t>Devam</a:t>
-                      </a:r>
-                    </a:p>
-                  </a:txBody>
-                  <a:tcPr marL="19050" marR="19050" marT="19050" marB="19050">
-                    <a:solidFill>
-                      <a:srgbClr val="008E86"/>
-                    </a:solidFill>
-                  </a:tcPr>
-                </a:tc>
-                <a:tc>
-                  <a:txBody>
-                    <a:bodyPr wrap="square" anchor="ctr">
-                      <a:noAutofit/>
-                    </a:bodyPr>
-                    <a:lstStyle/>
-                    <a:p>
-                      <a:pPr algn="ctr"/>
-                      <a:r>
-                        <a:rPr sz="1575" b="1">
-                          <a:solidFill>
-                            <a:srgbClr val="2563EB"/>
-                          </a:solidFill>
-                          <a:latin typeface="Liberation Sans"/>
-                          <a:ea typeface="Liberation Sans"/>
-                          <a:cs typeface="Liberation Sans"/>
-                        </a:rPr>
-                        <a:t>Plan</a:t>
-                      </a:r>
-                    </a:p>
-                  </a:txBody>
-                  <a:tcPr marL="19050" marR="19050" marT="19050" marB="19050">
-                    <a:solidFill>
-                      <a:srgbClr val="E0EBFF"/>
-                    </a:solidFill>
-                  </a:tcPr>
-                </a:tc>
-                <a:tc>
-                  <a:txBody>
-                    <a:bodyPr wrap="square" anchor="ctr">
-                      <a:noAutofit/>
-                    </a:bodyPr>
-                    <a:lstStyle/>
-                    <a:p>
-                      <a:pPr algn="ctr"/>
-                      <a:r>
-                        <a:rPr sz="1575" b="1">
-                          <a:solidFill>
-                            <a:srgbClr val="D97B0A"/>
-                          </a:solidFill>
-                          <a:latin typeface="Liberation Sans"/>
-                          <a:ea typeface="Liberation Sans"/>
-                          <a:cs typeface="Liberation Sans"/>
-                        </a:rPr>
-                        <a:t>Güncel</a:t>
-                      </a:r>
-                    </a:p>
-                  </a:txBody>
-                  <a:tcPr marL="19050" marR="19050" marT="19050" marB="19050">
-                    <a:solidFill>
-                      <a:srgbClr val="FFF0D6"/>
-                    </a:solidFill>
-                  </a:tcPr>
-                </a:tc>
-                <a:tc>
-                  <a:txBody>
-                    <a:bodyPr wrap="square" anchor="ctr">
-                      <a:noAutofit/>
-                    </a:bodyPr>
-                    <a:lstStyle/>
-                    <a:p>
-                      <a:pPr algn="ctr"/>
-                      <a:r>
-                        <a:rPr sz="1575" b="0">
-                          <a:solidFill>
-                            <a:srgbClr val="273F50"/>
-                          </a:solidFill>
-                          <a:latin typeface="Liberation Sans"/>
-                          <a:ea typeface="Liberation Sans"/>
-                          <a:cs typeface="Liberation Sans"/>
-                        </a:rPr>
-                        <a:t/>
-                      </a:r>
-                    </a:p>
-                  </a:txBody>
-                  <a:tcPr marL="19050" marR="19050" marT="19050" marB="19050">
-                    <a:solidFill>
-                      <a:srgbClr val="F1F6FA"/>
-                    </a:solidFill>
-                  </a:tcPr>
-                </a:tc>
-                <a:tc>
-                  <a:txBody>
-                    <a:bodyPr wrap="square" anchor="ctr">
-                      <a:noAutofit/>
-                    </a:bodyPr>
-                    <a:lstStyle/>
-                    <a:p>
-                      <a:pPr algn="ctr"/>
-                      <a:r>
-                        <a:rPr sz="1575" b="0">
-                          <a:solidFill>
-                            <a:srgbClr val="273F50"/>
-                          </a:solidFill>
-                          <a:latin typeface="Liberation Sans"/>
-                          <a:ea typeface="Liberation Sans"/>
-                          <a:cs typeface="Liberation Sans"/>
-                        </a:rPr>
-                        <a:t/>
-                      </a:r>
-                    </a:p>
-                  </a:txBody>
-                  <a:tcPr marL="19050" marR="19050" marT="19050" marB="19050">
-                    <a:solidFill>
-                      <a:srgbClr val="F1F6FA"/>
-                    </a:solidFill>
-                  </a:tcPr>
-                </a:tc>
-                <a:tc>
-                  <a:txBody>
-                    <a:bodyPr wrap="square" anchor="ctr">
-                      <a:noAutofit/>
-                    </a:bodyPr>
-                    <a:lstStyle/>
-                    <a:p>
-                      <a:pPr algn="ctr"/>
-                      <a:r>
-                        <a:rPr sz="1575" b="0">
-                          <a:solidFill>
-                            <a:srgbClr val="273F50"/>
-                          </a:solidFill>
-                          <a:latin typeface="Liberation Sans"/>
-                          <a:ea typeface="Liberation Sans"/>
-                          <a:cs typeface="Liberation Sans"/>
-                        </a:rPr>
-                        <a:t/>
-                      </a:r>
-                    </a:p>
-                  </a:txBody>
-                  <a:tcPr marL="19050" marR="19050" marT="19050" marB="19050">
-                    <a:solidFill>
-                      <a:srgbClr val="F1F6FA"/>
-                    </a:solidFill>
-                  </a:tcPr>
-                </a:tc>
-              </a:tr>
-              <a:tr h="457200">
-                <a:tc>
-                  <a:txBody>
-                    <a:bodyPr wrap="square" anchor="ctr">
-                      <a:noAutofit/>
-                    </a:bodyPr>
-                    <a:lstStyle/>
+                            <a:srgbClr val="008E86"/>
+                          </a:solidFill>
+                          <a:latin typeface="Liberation Sans"/>
+                          <a:ea typeface="Liberation Sans"/>
+                          <a:cs typeface="Liberation Sans"/>
+                        </a:rPr>
+                        <a:t>Planında</a:t>
+                      </a:r>
+                    </a:p>
                     <a:p>
                       <a:pPr algn="l"/>
                       <a:r>
                         <a:rPr sz="1725" b="1">
                           <a:solidFill>
-                            <a:srgbClr val="273F50"/>
-                          </a:solidFill>
-                          <a:latin typeface="Liberation Sans"/>
-                          <a:ea typeface="Liberation Sans"/>
-                          <a:cs typeface="Liberation Sans"/>
-                        </a:rPr>
-                        <a:t>Kurulum</a:t>
-                      </a:r>
-                    </a:p>
-                  </a:txBody>
-                  <a:tcPr marL="57150" marR="57150" marT="19050" marB="19050">
+                            <a:srgbClr val="008E86"/>
+                          </a:solidFill>
+                          <a:latin typeface="Liberation Sans"/>
+                          <a:ea typeface="Liberation Sans"/>
+                          <a:cs typeface="Liberation Sans"/>
+                        </a:rPr>
+                        <a:t>0 gün sapma</a:t>
+                      </a:r>
+                    </a:p>
+                  </a:txBody>
+                  <a:tcPr marL="76200" marR="76200" marT="19050" marB="19050">
+                    <a:solidFill>
+                      <a:srgbClr val="DDF2EE"/>
+                    </a:solidFill>
+                  </a:tcPr>
+                </a:tc>
+                <a:tc>
+                  <a:txBody>
+                    <a:bodyPr wrap="square" anchor="ctr">
+                      <a:noAutofit/>
+                    </a:bodyPr>
+                    <a:lstStyle/>
+                    <a:p>
+                      <a:pPr algn="l"/>
+                      <a:r>
+                        <a:rPr sz="1725" b="0">
+                          <a:solidFill>
+                            <a:srgbClr val="273F50"/>
+                          </a:solidFill>
+                          <a:latin typeface="Liberation Sans"/>
+                          <a:ea typeface="Liberation Sans"/>
+                          <a:cs typeface="Liberation Sans"/>
+                        </a:rPr>
+                        <a:t>Yedek ağ bağlantısı, 20.10.</a:t>
+                      </a:r>
+                    </a:p>
+                    <a:p>
+                      <a:pPr algn="l"/>
+                      <a:r>
+                        <a:rPr sz="1725" b="0">
+                          <a:solidFill>
+                            <a:srgbClr val="273F50"/>
+                          </a:solidFill>
+                          <a:latin typeface="Liberation Sans"/>
+                          <a:ea typeface="Liberation Sans"/>
+                          <a:cs typeface="Liberation Sans"/>
+                        </a:rPr>
+                        <a:t>Saha erişimi doğrulanmalı.</a:t>
+                      </a:r>
+                    </a:p>
+                  </a:txBody>
+                  <a:tcPr marL="76200" marR="76200" marT="19050" marB="19050">
                     <a:solidFill>
                       <a:srgbClr val="FFFFFF"/>
-                    </a:solidFill>
-                  </a:tcPr>
-                </a:tc>
-                <a:tc>
-                  <a:txBody>
-                    <a:bodyPr wrap="square" anchor="ctr">
-                      <a:noAutofit/>
-                    </a:bodyPr>
-                    <a:lstStyle/>
-                    <a:p>
-                      <a:pPr algn="ctr"/>
-                      <a:r>
-                        <a:rPr sz="1575" b="0">
-                          <a:solidFill>
-                            <a:srgbClr val="273F50"/>
-                          </a:solidFill>
-                          <a:latin typeface="Liberation Sans"/>
-                          <a:ea typeface="Liberation Sans"/>
-                          <a:cs typeface="Liberation Sans"/>
-                        </a:rPr>
-                        <a:t>06.11 / 13.11</a:t>
-                      </a:r>
-                    </a:p>
-                  </a:txBody>
-                  <a:tcPr marL="57150" marR="57150" marT="19050" marB="19050">
-                    <a:solidFill>
-                      <a:srgbClr val="FFFFFF"/>
-                    </a:solidFill>
-                  </a:tcPr>
-                </a:tc>
-                <a:tc>
-                  <a:txBody>
-                    <a:bodyPr wrap="square" anchor="ctr">
-                      <a:noAutofit/>
-                    </a:bodyPr>
-                    <a:lstStyle/>
-                    <a:p>
-                      <a:pPr algn="ctr"/>
-                      <a:r>
-                        <a:rPr sz="1575" b="0">
-                          <a:solidFill>
-                            <a:srgbClr val="273F50"/>
-                          </a:solidFill>
-                          <a:latin typeface="Liberation Sans"/>
-                          <a:ea typeface="Liberation Sans"/>
-                          <a:cs typeface="Liberation Sans"/>
-                        </a:rPr>
-                        <a:t/>
-                      </a:r>
-                    </a:p>
-                  </a:txBody>
-                  <a:tcPr marL="19050" marR="19050" marT="19050" marB="19050">
-                    <a:solidFill>
-                      <a:srgbClr val="FFFFFF"/>
-                    </a:solidFill>
-                  </a:tcPr>
-                </a:tc>
-                <a:tc>
-                  <a:txBody>
-                    <a:bodyPr wrap="square" anchor="ctr">
-                      <a:noAutofit/>
-                    </a:bodyPr>
-                    <a:lstStyle/>
-                    <a:p>
-                      <a:pPr algn="ctr"/>
-                      <a:r>
-                        <a:rPr sz="1575" b="0">
-                          <a:solidFill>
-                            <a:srgbClr val="273F50"/>
-                          </a:solidFill>
-                          <a:latin typeface="Liberation Sans"/>
-                          <a:ea typeface="Liberation Sans"/>
-                          <a:cs typeface="Liberation Sans"/>
-                        </a:rPr>
-                        <a:t/>
-                      </a:r>
-                    </a:p>
-                  </a:txBody>
-                  <a:tcPr marL="19050" marR="19050" marT="19050" marB="19050">
-                    <a:solidFill>
-                      <a:srgbClr val="FFFFFF"/>
-                    </a:solidFill>
-                  </a:tcPr>
-                </a:tc>
-                <a:tc>
-                  <a:txBody>
-                    <a:bodyPr wrap="square" anchor="ctr">
-                      <a:noAutofit/>
-                    </a:bodyPr>
-                    <a:lstStyle/>
-                    <a:p>
-                      <a:pPr algn="ctr"/>
-                      <a:r>
-                        <a:rPr sz="1575" b="0">
-                          <a:solidFill>
-                            <a:srgbClr val="273F50"/>
-                          </a:solidFill>
-                          <a:latin typeface="Liberation Sans"/>
-                          <a:ea typeface="Liberation Sans"/>
-                          <a:cs typeface="Liberation Sans"/>
-                        </a:rPr>
-                        <a:t/>
-                      </a:r>
-                    </a:p>
-                  </a:txBody>
-                  <a:tcPr marL="19050" marR="19050" marT="19050" marB="19050">
-                    <a:solidFill>
-                      <a:srgbClr val="FFFFFF"/>
-                    </a:solidFill>
-                  </a:tcPr>
-                </a:tc>
-                <a:tc>
-                  <a:txBody>
-                    <a:bodyPr wrap="square" anchor="ctr">
-                      <a:noAutofit/>
-                    </a:bodyPr>
-                    <a:lstStyle/>
-                    <a:p>
-                      <a:pPr algn="ctr"/>
-                      <a:r>
-                        <a:rPr sz="1575" b="1">
-                          <a:solidFill>
-                            <a:srgbClr val="2563EB"/>
-                          </a:solidFill>
-                          <a:latin typeface="Liberation Sans"/>
-                          <a:ea typeface="Liberation Sans"/>
-                          <a:cs typeface="Liberation Sans"/>
-                        </a:rPr>
-                        <a:t>Plan</a:t>
-                      </a:r>
-                    </a:p>
-                  </a:txBody>
-                  <a:tcPr marL="19050" marR="19050" marT="19050" marB="19050">
-                    <a:solidFill>
-                      <a:srgbClr val="E0EBFF"/>
-                    </a:solidFill>
-                  </a:tcPr>
-                </a:tc>
-                <a:tc>
-                  <a:txBody>
-                    <a:bodyPr wrap="square" anchor="ctr">
-                      <a:noAutofit/>
-                    </a:bodyPr>
-                    <a:lstStyle/>
-                    <a:p>
-                      <a:pPr algn="ctr"/>
-                      <a:r>
-                        <a:rPr sz="1575" b="1">
-                          <a:solidFill>
-                            <a:srgbClr val="2563EB"/>
-                          </a:solidFill>
-                          <a:latin typeface="Liberation Sans"/>
-                          <a:ea typeface="Liberation Sans"/>
-                          <a:cs typeface="Liberation Sans"/>
-                        </a:rPr>
-                        <a:t>Plan</a:t>
-                      </a:r>
-                    </a:p>
-                  </a:txBody>
-                  <a:tcPr marL="19050" marR="19050" marT="19050" marB="19050">
-                    <a:solidFill>
-                      <a:srgbClr val="E0EBFF"/>
-                    </a:solidFill>
-                  </a:tcPr>
-                </a:tc>
-                <a:tc>
-                  <a:txBody>
-                    <a:bodyPr wrap="square" anchor="ctr">
-                      <a:noAutofit/>
-                    </a:bodyPr>
-                    <a:lstStyle/>
-                    <a:p>
-                      <a:pPr algn="ctr"/>
-                      <a:r>
-                        <a:rPr sz="1575" b="1">
-                          <a:solidFill>
-                            <a:srgbClr val="D97B0A"/>
-                          </a:solidFill>
-                          <a:latin typeface="Liberation Sans"/>
-                          <a:ea typeface="Liberation Sans"/>
-                          <a:cs typeface="Liberation Sans"/>
-                        </a:rPr>
-                        <a:t>Güncel</a:t>
-                      </a:r>
-                    </a:p>
-                  </a:txBody>
-                  <a:tcPr marL="19050" marR="19050" marT="19050" marB="19050">
-                    <a:solidFill>
-                      <a:srgbClr val="FFF0D6"/>
-                    </a:solidFill>
-                  </a:tcPr>
-                </a:tc>
-                <a:tc>
-                  <a:txBody>
-                    <a:bodyPr wrap="square" anchor="ctr">
-                      <a:noAutofit/>
-                    </a:bodyPr>
-                    <a:lstStyle/>
-                    <a:p>
-                      <a:pPr algn="ctr"/>
-                      <a:r>
-                        <a:rPr sz="1575" b="0">
-                          <a:solidFill>
-                            <a:srgbClr val="273F50"/>
-                          </a:solidFill>
-                          <a:latin typeface="Liberation Sans"/>
-                          <a:ea typeface="Liberation Sans"/>
-                          <a:cs typeface="Liberation Sans"/>
-                        </a:rPr>
-                        <a:t/>
-                      </a:r>
-                    </a:p>
-                  </a:txBody>
-                  <a:tcPr marL="19050" marR="19050" marT="19050" marB="19050">
-                    <a:solidFill>
-                      <a:srgbClr val="FFFFFF"/>
-                    </a:solidFill>
-                  </a:tcPr>
-                </a:tc>
-              </a:tr>
-              <a:tr h="457200">
-                <a:tc>
-                  <a:txBody>
-                    <a:bodyPr wrap="square" anchor="ctr">
-                      <a:noAutofit/>
-                    </a:bodyPr>
-                    <a:lstStyle/>
-                    <a:p>
-                      <a:pPr algn="l"/>
-                      <a:r>
-                        <a:rPr sz="1725" b="1">
-                          <a:solidFill>
-                            <a:srgbClr val="273F50"/>
-                          </a:solidFill>
-                          <a:latin typeface="Liberation Sans"/>
-                          <a:ea typeface="Liberation Sans"/>
-                          <a:cs typeface="Liberation Sans"/>
-                        </a:rPr>
-                        <a:t>Test</a:t>
-                      </a:r>
-                    </a:p>
-                  </a:txBody>
-                  <a:tcPr marL="57150" marR="57150" marT="19050" marB="19050">
-                    <a:solidFill>
-                      <a:srgbClr val="F1F6FA"/>
-                    </a:solidFill>
-                  </a:tcPr>
-                </a:tc>
-                <a:tc>
-                  <a:txBody>
-                    <a:bodyPr wrap="square" anchor="ctr">
-                      <a:noAutofit/>
-                    </a:bodyPr>
-                    <a:lstStyle/>
-                    <a:p>
-                      <a:pPr algn="ctr"/>
-                      <a:r>
-                        <a:rPr sz="1575" b="0">
-                          <a:solidFill>
-                            <a:srgbClr val="273F50"/>
-                          </a:solidFill>
-                          <a:latin typeface="Liberation Sans"/>
-                          <a:ea typeface="Liberation Sans"/>
-                          <a:cs typeface="Liberation Sans"/>
-                        </a:rPr>
-                        <a:t>12.11 / 19.11</a:t>
-                      </a:r>
-                    </a:p>
-                  </a:txBody>
-                  <a:tcPr marL="57150" marR="57150" marT="19050" marB="19050">
-                    <a:solidFill>
-                      <a:srgbClr val="F1F6FA"/>
-                    </a:solidFill>
-                  </a:tcPr>
-                </a:tc>
-                <a:tc>
-                  <a:txBody>
-                    <a:bodyPr wrap="square" anchor="ctr">
-                      <a:noAutofit/>
-                    </a:bodyPr>
-                    <a:lstStyle/>
-                    <a:p>
-                      <a:pPr algn="ctr"/>
-                      <a:r>
-                        <a:rPr sz="1575" b="0">
-                          <a:solidFill>
-                            <a:srgbClr val="273F50"/>
-                          </a:solidFill>
-                          <a:latin typeface="Liberation Sans"/>
-                          <a:ea typeface="Liberation Sans"/>
-                          <a:cs typeface="Liberation Sans"/>
-                        </a:rPr>
-                        <a:t/>
-                      </a:r>
-                    </a:p>
-                  </a:txBody>
-                  <a:tcPr marL="19050" marR="19050" marT="19050" marB="19050">
-                    <a:solidFill>
-                      <a:srgbClr val="F1F6FA"/>
-                    </a:solidFill>
-                  </a:tcPr>
-                </a:tc>
-                <a:tc>
-                  <a:txBody>
-                    <a:bodyPr wrap="square" anchor="ctr">
-                      <a:noAutofit/>
-                    </a:bodyPr>
-                    <a:lstStyle/>
-                    <a:p>
-                      <a:pPr algn="ctr"/>
-                      <a:r>
-                        <a:rPr sz="1575" b="0">
-                          <a:solidFill>
-                            <a:srgbClr val="273F50"/>
-                          </a:solidFill>
-                          <a:latin typeface="Liberation Sans"/>
-                          <a:ea typeface="Liberation Sans"/>
-                          <a:cs typeface="Liberation Sans"/>
-                        </a:rPr>
-                        <a:t/>
-                      </a:r>
-                    </a:p>
-                  </a:txBody>
-                  <a:tcPr marL="19050" marR="19050" marT="19050" marB="19050">
-                    <a:solidFill>
-                      <a:srgbClr val="F1F6FA"/>
-                    </a:solidFill>
-                  </a:tcPr>
-                </a:tc>
-                <a:tc>
-                  <a:txBody>
-                    <a:bodyPr wrap="square" anchor="ctr">
-                      <a:noAutofit/>
-                    </a:bodyPr>
-                    <a:lstStyle/>
-                    <a:p>
-                      <a:pPr algn="ctr"/>
-                      <a:r>
-                        <a:rPr sz="1575" b="0">
-                          <a:solidFill>
-                            <a:srgbClr val="273F50"/>
-                          </a:solidFill>
-                          <a:latin typeface="Liberation Sans"/>
-                          <a:ea typeface="Liberation Sans"/>
-                          <a:cs typeface="Liberation Sans"/>
-                        </a:rPr>
-                        <a:t/>
-                      </a:r>
-                    </a:p>
-                  </a:txBody>
-                  <a:tcPr marL="19050" marR="19050" marT="19050" marB="19050">
-                    <a:solidFill>
-                      <a:srgbClr val="F1F6FA"/>
-                    </a:solidFill>
-                  </a:tcPr>
-                </a:tc>
-                <a:tc>
-                  <a:txBody>
-                    <a:bodyPr wrap="square" anchor="ctr">
-                      <a:noAutofit/>
-                    </a:bodyPr>
-                    <a:lstStyle/>
-                    <a:p>
-                      <a:pPr algn="ctr"/>
-                      <a:r>
-                        <a:rPr sz="1575" b="0">
-                          <a:solidFill>
-                            <a:srgbClr val="273F50"/>
-                          </a:solidFill>
-                          <a:latin typeface="Liberation Sans"/>
-                          <a:ea typeface="Liberation Sans"/>
-                          <a:cs typeface="Liberation Sans"/>
-                        </a:rPr>
-                        <a:t/>
-                      </a:r>
-                    </a:p>
-                  </a:txBody>
-                  <a:tcPr marL="19050" marR="19050" marT="19050" marB="19050">
-                    <a:solidFill>
-                      <a:srgbClr val="F1F6FA"/>
-                    </a:solidFill>
-                  </a:tcPr>
-                </a:tc>
-                <a:tc>
-                  <a:txBody>
-                    <a:bodyPr wrap="square" anchor="ctr">
-                      <a:noAutofit/>
-                    </a:bodyPr>
-                    <a:lstStyle/>
-                    <a:p>
-                      <a:pPr algn="ctr"/>
-                      <a:r>
-                        <a:rPr sz="1575" b="0">
-                          <a:solidFill>
-                            <a:srgbClr val="273F50"/>
-                          </a:solidFill>
-                          <a:latin typeface="Liberation Sans"/>
-                          <a:ea typeface="Liberation Sans"/>
-                          <a:cs typeface="Liberation Sans"/>
-                        </a:rPr>
-                        <a:t/>
-                      </a:r>
-                    </a:p>
-                  </a:txBody>
-                  <a:tcPr marL="19050" marR="19050" marT="19050" marB="19050">
-                    <a:solidFill>
-                      <a:srgbClr val="F1F6FA"/>
-                    </a:solidFill>
-                  </a:tcPr>
-                </a:tc>
-                <a:tc>
-                  <a:txBody>
-                    <a:bodyPr wrap="square" anchor="ctr">
-                      <a:noAutofit/>
-                    </a:bodyPr>
-                    <a:lstStyle/>
-                    <a:p>
-                      <a:pPr algn="ctr"/>
-                      <a:r>
-                        <a:rPr sz="1575" b="1">
-                          <a:solidFill>
-                            <a:srgbClr val="2563EB"/>
-                          </a:solidFill>
-                          <a:latin typeface="Liberation Sans"/>
-                          <a:ea typeface="Liberation Sans"/>
-                          <a:cs typeface="Liberation Sans"/>
-                        </a:rPr>
-                        <a:t>Plan</a:t>
-                      </a:r>
-                    </a:p>
-                  </a:txBody>
-                  <a:tcPr marL="19050" marR="19050" marT="19050" marB="19050">
-                    <a:solidFill>
-                      <a:srgbClr val="E0EBFF"/>
-                    </a:solidFill>
-                  </a:tcPr>
-                </a:tc>
-                <a:tc>
-                  <a:txBody>
-                    <a:bodyPr wrap="square" anchor="ctr">
-                      <a:noAutofit/>
-                    </a:bodyPr>
-                    <a:lstStyle/>
-                    <a:p>
-                      <a:pPr algn="ctr"/>
-                      <a:r>
-                        <a:rPr sz="1575" b="1">
-                          <a:solidFill>
-                            <a:srgbClr val="D97B0A"/>
-                          </a:solidFill>
-                          <a:latin typeface="Liberation Sans"/>
-                          <a:ea typeface="Liberation Sans"/>
-                          <a:cs typeface="Liberation Sans"/>
-                        </a:rPr>
-                        <a:t>Güncel</a:t>
-                      </a:r>
-                    </a:p>
-                  </a:txBody>
-                  <a:tcPr marL="19050" marR="19050" marT="19050" marB="19050">
-                    <a:solidFill>
-                      <a:srgbClr val="FFF0D6"/>
-                    </a:solidFill>
-                  </a:tcPr>
-                </a:tc>
-              </a:tr>
-              <a:tr h="457200">
-                <a:tc>
-                  <a:txBody>
-                    <a:bodyPr wrap="square" anchor="ctr">
-                      <a:noAutofit/>
-                    </a:bodyPr>
-                    <a:lstStyle/>
-                    <a:p>
-                      <a:pPr algn="l"/>
-                      <a:r>
-                        <a:rPr sz="1725" b="1">
-                          <a:solidFill>
-                            <a:srgbClr val="273F50"/>
-                          </a:solidFill>
-                          <a:latin typeface="Liberation Sans"/>
-                          <a:ea typeface="Liberation Sans"/>
-                          <a:cs typeface="Liberation Sans"/>
-                        </a:rPr>
-                        <a:t>Devreye alma</a:t>
-                      </a:r>
-                    </a:p>
-                  </a:txBody>
-                  <a:tcPr marL="57150" marR="57150" marT="19050" marB="19050">
-                    <a:solidFill>
-                      <a:srgbClr val="FFFFFF"/>
-                    </a:solidFill>
-                  </a:tcPr>
-                </a:tc>
-                <a:tc>
-                  <a:txBody>
-                    <a:bodyPr wrap="square" anchor="ctr">
-                      <a:noAutofit/>
-                    </a:bodyPr>
-                    <a:lstStyle/>
-                    <a:p>
-                      <a:pPr algn="ctr"/>
-                      <a:r>
-                        <a:rPr sz="1575" b="0">
-                          <a:solidFill>
-                            <a:srgbClr val="273F50"/>
-                          </a:solidFill>
-                          <a:latin typeface="Liberation Sans"/>
-                          <a:ea typeface="Liberation Sans"/>
-                          <a:cs typeface="Liberation Sans"/>
-                        </a:rPr>
-                        <a:t>13.11 / 20.11</a:t>
-                      </a:r>
-                    </a:p>
-                  </a:txBody>
-                  <a:tcPr marL="57150" marR="57150" marT="19050" marB="19050">
-                    <a:solidFill>
-                      <a:srgbClr val="FFFFFF"/>
-                    </a:solidFill>
-                  </a:tcPr>
-                </a:tc>
-                <a:tc>
-                  <a:txBody>
-                    <a:bodyPr wrap="square" anchor="ctr">
-                      <a:noAutofit/>
-                    </a:bodyPr>
-                    <a:lstStyle/>
-                    <a:p>
-                      <a:pPr algn="ctr"/>
-                      <a:r>
-                        <a:rPr sz="1575" b="0">
-                          <a:solidFill>
-                            <a:srgbClr val="273F50"/>
-                          </a:solidFill>
-                          <a:latin typeface="Liberation Sans"/>
-                          <a:ea typeface="Liberation Sans"/>
-                          <a:cs typeface="Liberation Sans"/>
-                        </a:rPr>
-                        <a:t/>
-                      </a:r>
-                    </a:p>
-                  </a:txBody>
-                  <a:tcPr marL="19050" marR="19050" marT="19050" marB="19050">
-                    <a:solidFill>
-                      <a:srgbClr val="FFFFFF"/>
-                    </a:solidFill>
-                  </a:tcPr>
-                </a:tc>
-                <a:tc>
-                  <a:txBody>
-                    <a:bodyPr wrap="square" anchor="ctr">
-                      <a:noAutofit/>
-                    </a:bodyPr>
-                    <a:lstStyle/>
-                    <a:p>
-                      <a:pPr algn="ctr"/>
-                      <a:r>
-                        <a:rPr sz="1575" b="0">
-                          <a:solidFill>
-                            <a:srgbClr val="273F50"/>
-                          </a:solidFill>
-                          <a:latin typeface="Liberation Sans"/>
-                          <a:ea typeface="Liberation Sans"/>
-                          <a:cs typeface="Liberation Sans"/>
-                        </a:rPr>
-                        <a:t/>
-                      </a:r>
-                    </a:p>
-                  </a:txBody>
-                  <a:tcPr marL="19050" marR="19050" marT="19050" marB="19050">
-                    <a:solidFill>
-                      <a:srgbClr val="FFFFFF"/>
-                    </a:solidFill>
-                  </a:tcPr>
-                </a:tc>
-                <a:tc>
-                  <a:txBody>
-                    <a:bodyPr wrap="square" anchor="ctr">
-                      <a:noAutofit/>
-                    </a:bodyPr>
-                    <a:lstStyle/>
-                    <a:p>
-                      <a:pPr algn="ctr"/>
-                      <a:r>
-                        <a:rPr sz="1575" b="0">
-                          <a:solidFill>
-                            <a:srgbClr val="273F50"/>
-                          </a:solidFill>
-                          <a:latin typeface="Liberation Sans"/>
-                          <a:ea typeface="Liberation Sans"/>
-                          <a:cs typeface="Liberation Sans"/>
-                        </a:rPr>
-                        <a:t/>
-                      </a:r>
-                    </a:p>
-                  </a:txBody>
-                  <a:tcPr marL="19050" marR="19050" marT="19050" marB="19050">
-                    <a:solidFill>
-                      <a:srgbClr val="FFFFFF"/>
-                    </a:solidFill>
-                  </a:tcPr>
-                </a:tc>
-                <a:tc>
-                  <a:txBody>
-                    <a:bodyPr wrap="square" anchor="ctr">
-                      <a:noAutofit/>
-                    </a:bodyPr>
-                    <a:lstStyle/>
-                    <a:p>
-                      <a:pPr algn="ctr"/>
-                      <a:r>
-                        <a:rPr sz="1575" b="0">
-                          <a:solidFill>
-                            <a:srgbClr val="273F50"/>
-                          </a:solidFill>
-                          <a:latin typeface="Liberation Sans"/>
-                          <a:ea typeface="Liberation Sans"/>
-                          <a:cs typeface="Liberation Sans"/>
-                        </a:rPr>
-                        <a:t/>
-                      </a:r>
-                    </a:p>
-                  </a:txBody>
-                  <a:tcPr marL="19050" marR="19050" marT="19050" marB="19050">
-                    <a:solidFill>
-                      <a:srgbClr val="FFFFFF"/>
-                    </a:solidFill>
-                  </a:tcPr>
-                </a:tc>
-                <a:tc>
-                  <a:txBody>
-                    <a:bodyPr wrap="square" anchor="ctr">
-                      <a:noAutofit/>
-                    </a:bodyPr>
-                    <a:lstStyle/>
-                    <a:p>
-                      <a:pPr algn="ctr"/>
-                      <a:r>
-                        <a:rPr sz="1575" b="0">
-                          <a:solidFill>
-                            <a:srgbClr val="273F50"/>
-                          </a:solidFill>
-                          <a:latin typeface="Liberation Sans"/>
-                          <a:ea typeface="Liberation Sans"/>
-                          <a:cs typeface="Liberation Sans"/>
-                        </a:rPr>
-                        <a:t/>
-                      </a:r>
-                    </a:p>
-                  </a:txBody>
-                  <a:tcPr marL="19050" marR="19050" marT="19050" marB="19050">
-                    <a:solidFill>
-                      <a:srgbClr val="FFFFFF"/>
-                    </a:solidFill>
-                  </a:tcPr>
-                </a:tc>
-                <a:tc>
-                  <a:txBody>
-                    <a:bodyPr wrap="square" anchor="ctr">
-                      <a:noAutofit/>
-                    </a:bodyPr>
-                    <a:lstStyle/>
-                    <a:p>
-                      <a:pPr algn="ctr"/>
-                      <a:r>
-                        <a:rPr sz="1575" b="1">
-                          <a:solidFill>
-                            <a:srgbClr val="2563EB"/>
-                          </a:solidFill>
-                          <a:latin typeface="Liberation Sans"/>
-                          <a:ea typeface="Liberation Sans"/>
-                          <a:cs typeface="Liberation Sans"/>
-                        </a:rPr>
-                        <a:t>Plan</a:t>
-                      </a:r>
-                    </a:p>
-                  </a:txBody>
-                  <a:tcPr marL="19050" marR="19050" marT="19050" marB="19050">
-                    <a:solidFill>
-                      <a:srgbClr val="E0EBFF"/>
-                    </a:solidFill>
-                  </a:tcPr>
-                </a:tc>
-                <a:tc>
-                  <a:txBody>
-                    <a:bodyPr wrap="square" anchor="ctr">
-                      <a:noAutofit/>
-                    </a:bodyPr>
-                    <a:lstStyle/>
-                    <a:p>
-                      <a:pPr algn="ctr"/>
-                      <a:r>
-                        <a:rPr sz="1575" b="1">
-                          <a:solidFill>
-                            <a:srgbClr val="D97B0A"/>
-                          </a:solidFill>
-                          <a:latin typeface="Liberation Sans"/>
-                          <a:ea typeface="Liberation Sans"/>
-                          <a:cs typeface="Liberation Sans"/>
-                        </a:rPr>
-                        <a:t>Güncel</a:t>
-                      </a:r>
-                    </a:p>
-                  </a:txBody>
-                  <a:tcPr marL="19050" marR="19050" marT="19050" marB="19050">
-                    <a:solidFill>
-                      <a:srgbClr val="FFF0D6"/>
                     </a:solidFill>
                   </a:tcPr>
                 </a:tc>
@@ -5154,10 +5466,10 @@
       </p:graphicFrame>
       <p:sp>
         <p:nvSpPr>
-          <p:cNvPr id="7" name="critical">
+          <p:cNvPr id="19" name="effort-heading">
             <a:extLst xmlns:a="http://schemas.openxmlformats.org/drawingml/2006/main">
               <a:ext uri="{FF2B5EF4-FFF2-40B4-BE49-F238E27FC236}">
-                <a16:creationId xmlns:a16="http://schemas.microsoft.com/office/drawing/2014/main" id="{A94A256B-9255-406C-AD91-2543CF32BEB3}"/>
+                <a16:creationId xmlns:a16="http://schemas.microsoft.com/office/drawing/2014/main" id="{9D41F820-5F8A-4102-9116-314E4177494A}"/>
               </a:ext>
             </a:extLst>
           </p:cNvPr>
@@ -5168,77 +5480,8 @@
         </p:nvSpPr>
         <p:spPr>
           <a:xfrm xmlns:a="http://schemas.openxmlformats.org/drawingml/2006/main">
-            <a:off x="457200" y="4991100"/>
-            <a:ext cx="9525000" cy="419100"/>
-          </a:xfrm>
-          <a:prstGeom xmlns:a="http://schemas.openxmlformats.org/drawingml/2006/main" prst="rect">
-            <a:avLst/>
-          </a:prstGeom>
-          <a:noFill xmlns:a="http://schemas.openxmlformats.org/drawingml/2006/main"/>
-          <a:ln xmlns:a="http://schemas.openxmlformats.org/drawingml/2006/main" w="0">
-            <a:noFill/>
-            <a:prstDash val="solid"/>
-          </a:ln>
-        </p:spPr>
-        <p:txBody>
-          <a:bodyPr xmlns:a="http://schemas.openxmlformats.org/drawingml/2006/main" wrap="square" lIns="0" tIns="0" rIns="0" bIns="0" anchor="ctr">
-            <a:noAutofit/>
-          </a:bodyPr>
-          <a:lstStyle xmlns:a="http://schemas.openxmlformats.org/drawingml/2006/main">
-            <a:defPPr algn="l">
-              <a:defRPr sz="1800" b="1">
-                <a:solidFill>
-                  <a:srgbClr val="D97B0A"/>
-                </a:solidFill>
-                <a:latin typeface="Liberation Sans"/>
-                <a:ea typeface="Liberation Sans"/>
-                <a:cs typeface="Liberation Sans"/>
-              </a:defRPr>
-            </a:defPPr>
-          </a:lstStyle>
-          <a:p xmlns:a="http://schemas.openxmlformats.org/drawingml/2006/main">
-            <a:pPr algn="l">
-              <a:defRPr sz="1800" b="1">
-                <a:solidFill>
-                  <a:srgbClr val="D97B0A"/>
-                </a:solidFill>
-                <a:latin typeface="Liberation Sans"/>
-                <a:ea typeface="Liberation Sans"/>
-                <a:cs typeface="Liberation Sans"/>
-              </a:defRPr>
-            </a:pPr>
-            <a:r>
-              <a:rPr sz="1800" b="1">
-                <a:solidFill>
-                  <a:srgbClr val="D97B0A"/>
-                </a:solidFill>
-                <a:latin typeface="Liberation Sans"/>
-                <a:ea typeface="Liberation Sans"/>
-                <a:cs typeface="Liberation Sans"/>
-              </a:rPr>
-              <a:t>Kritik alan: motor teslimi. 23 Ekim hedefi için alternatif tedarikçi gerekli.</a:t>
-            </a:r>
-          </a:p>
-        </p:txBody>
-      </p:sp>
-      <p:sp>
-        <p:nvSpPr>
-          <p:cNvPr id="8" name="effort-title">
-            <a:extLst xmlns:a="http://schemas.openxmlformats.org/drawingml/2006/main">
-              <a:ext uri="{FF2B5EF4-FFF2-40B4-BE49-F238E27FC236}">
-                <a16:creationId xmlns:a16="http://schemas.microsoft.com/office/drawing/2014/main" id="{F294DC7E-437D-4A40-B3B0-5F9CF54F20D2}"/>
-              </a:ext>
-            </a:extLst>
-          </p:cNvPr>
-          <p:cNvSpPr>
-            <a:spLocks xmlns:a="http://schemas.openxmlformats.org/drawingml/2006/main" noGrp="1"/>
-          </p:cNvSpPr>
-          <p:nvPr/>
-        </p:nvSpPr>
-        <p:spPr>
-          <a:xfrm xmlns:a="http://schemas.openxmlformats.org/drawingml/2006/main">
-            <a:off x="457200" y="5476875"/>
-            <a:ext cx="9525000" cy="304800"/>
+            <a:off x="457200" y="5753100"/>
+            <a:ext cx="14325600" cy="304800"/>
           </a:xfrm>
           <a:prstGeom xmlns:a="http://schemas.openxmlformats.org/drawingml/2006/main" prst="rect">
             <a:avLst/>
@@ -5285,17 +5528,17 @@
                 <a:ea typeface="Liberation Sans"/>
                 <a:cs typeface="Liberation Sans"/>
               </a:rPr>
-              <a:t>Efor: 8 kişi, 240 saat</a:t>
+              <a:t>Departman bazında efor (kişi / rapor tarihine kadar saat)</a:t>
             </a:r>
           </a:p>
         </p:txBody>
       </p:sp>
       <p:graphicFrame>
         <p:nvGraphicFramePr>
-          <p:cNvPr id="9" name="">
+          <p:cNvPr id="20" name="">
             <a:extLst xmlns:a="http://schemas.openxmlformats.org/drawingml/2006/main">
               <a:ext uri="{FF2B5EF4-FFF2-40B4-BE49-F238E27FC236}">
-                <a16:creationId xmlns:a16="http://schemas.microsoft.com/office/drawing/2014/main" id="{6467D473-73AF-4ADD-8B25-BF1D46CC710E}"/>
+                <a16:creationId xmlns:a16="http://schemas.microsoft.com/office/drawing/2014/main" id="{AAD47A0B-090F-4838-A1A1-5574EADD162C}"/>
               </a:ext>
             </a:extLst>
           </p:cNvPr>
@@ -5303,19 +5546,24 @@
           <p:nvPr/>
         </p:nvGraphicFramePr>
         <p:xfrm>
-          <a:off xmlns:a="http://schemas.openxmlformats.org/drawingml/2006/main" x="457200" y="5848350"/>
-          <a:ext xmlns:a="http://schemas.openxmlformats.org/drawingml/2006/main" cx="9525000" cy="2476500"/>
+          <a:off xmlns:a="http://schemas.openxmlformats.org/drawingml/2006/main" x="457200" y="6115050"/>
+          <a:ext xmlns:a="http://schemas.openxmlformats.org/drawingml/2006/main" cx="14325600" cy="2209800"/>
         </p:xfrm>
         <a:graphic xmlns:a="http://schemas.openxmlformats.org/drawingml/2006/main">
           <a:graphicData uri="http://schemas.openxmlformats.org/drawingml/2006/table">
             <a:tbl>
               <a:tblPr firstRow="0" bandRow="0"/>
               <a:tblGrid>
-                <a:gridCol w="5715000"/>
+                <a:gridCol w="2000250"/>
                 <a:gridCol w="1524000"/>
-                <a:gridCol w="2286000"/>
+                <a:gridCol w="1762125"/>
+                <a:gridCol w="1666875"/>
+                <a:gridCol w="1666875"/>
+                <a:gridCol w="1666875"/>
+                <a:gridCol w="1666875"/>
+                <a:gridCol w="2371725"/>
               </a:tblGrid>
-              <a:tr h="381000">
+              <a:tr h="552450">
                 <a:tc>
                   <a:txBody>
                     <a:bodyPr wrap="square" anchor="ctr">
@@ -5325,7 +5573,7 @@
                     <a:p>
                       <a:pPr algn="l"/>
                       <a:r>
-                        <a:rPr sz="1725" b="1">
+                        <a:rPr sz="1650" b="1">
                           <a:solidFill>
                             <a:srgbClr val="FFFFFF"/>
                           </a:solidFill>
@@ -5333,11 +5581,11 @@
                           <a:ea typeface="Liberation Sans"/>
                           <a:cs typeface="Liberation Sans"/>
                         </a:rPr>
-                        <a:t>Departman</a:t>
-                      </a:r>
-                    </a:p>
-                  </a:txBody>
-                  <a:tcPr marL="114300" marR="95250" marT="38100" marB="38100">
+                        <a:t>Proje</a:t>
+                      </a:r>
+                    </a:p>
+                  </a:txBody>
+                  <a:tcPr marL="76200" marR="76200" marT="19050" marB="19050">
                     <a:solidFill>
                       <a:srgbClr val="008E86"/>
                     </a:solidFill>
@@ -5352,7 +5600,7 @@
                     <a:p>
                       <a:pPr algn="l"/>
                       <a:r>
-                        <a:rPr sz="1725" b="1">
+                        <a:rPr sz="1650" b="1">
                           <a:solidFill>
                             <a:srgbClr val="FFFFFF"/>
                           </a:solidFill>
@@ -5360,11 +5608,25 @@
                           <a:ea typeface="Liberation Sans"/>
                           <a:cs typeface="Liberation Sans"/>
                         </a:rPr>
-                        <a:t>Kişi</a:t>
-                      </a:r>
-                    </a:p>
-                  </a:txBody>
-                  <a:tcPr marL="114300" marR="95250" marT="38100" marB="38100">
+                        <a:t>Toplam</a:t>
+                      </a:r>
+                    </a:p>
+                    <a:p>
+                      <a:pPr algn="l"/>
+                      <a:r>
+                        <a:rPr sz="1650" b="1">
+                          <a:solidFill>
+                            <a:srgbClr val="FFFFFF"/>
+                          </a:solidFill>
+                          <a:latin typeface="Liberation Sans"/>
+                          <a:ea typeface="Liberation Sans"/>
+                          <a:cs typeface="Liberation Sans"/>
+                        </a:rPr>
+                        <a:t>kişi / saat</a:t>
+                      </a:r>
+                    </a:p>
+                  </a:txBody>
+                  <a:tcPr marL="76200" marR="76200" marT="19050" marB="19050">
                     <a:solidFill>
                       <a:srgbClr val="008E86"/>
                     </a:solidFill>
@@ -5379,7 +5641,7 @@
                     <a:p>
                       <a:pPr algn="l"/>
                       <a:r>
-                        <a:rPr sz="1725" b="1">
+                        <a:rPr sz="1650" b="1">
                           <a:solidFill>
                             <a:srgbClr val="FFFFFF"/>
                           </a:solidFill>
@@ -5387,18 +5649,153 @@
                           <a:ea typeface="Liberation Sans"/>
                           <a:cs typeface="Liberation Sans"/>
                         </a:rPr>
-                        <a:t>Saat</a:t>
-                      </a:r>
-                    </a:p>
-                  </a:txBody>
-                  <a:tcPr marL="114300" marR="95250" marT="38100" marB="38100">
+                        <a:t>Mühendislik</a:t>
+                      </a:r>
+                    </a:p>
+                  </a:txBody>
+                  <a:tcPr marL="76200" marR="76200" marT="19050" marB="19050">
                     <a:solidFill>
                       <a:srgbClr val="008E86"/>
                     </a:solidFill>
                   </a:tcPr>
                 </a:tc>
+                <a:tc>
+                  <a:txBody>
+                    <a:bodyPr wrap="square" anchor="ctr">
+                      <a:noAutofit/>
+                    </a:bodyPr>
+                    <a:lstStyle/>
+                    <a:p>
+                      <a:pPr algn="l"/>
+                      <a:r>
+                        <a:rPr sz="1650" b="1">
+                          <a:solidFill>
+                            <a:srgbClr val="FFFFFF"/>
+                          </a:solidFill>
+                          <a:latin typeface="Liberation Sans"/>
+                          <a:ea typeface="Liberation Sans"/>
+                          <a:cs typeface="Liberation Sans"/>
+                        </a:rPr>
+                        <a:t>Üretim</a:t>
+                      </a:r>
+                    </a:p>
+                  </a:txBody>
+                  <a:tcPr marL="76200" marR="76200" marT="19050" marB="19050">
+                    <a:solidFill>
+                      <a:srgbClr val="008E86"/>
+                    </a:solidFill>
+                  </a:tcPr>
+                </a:tc>
+                <a:tc>
+                  <a:txBody>
+                    <a:bodyPr wrap="square" anchor="ctr">
+                      <a:noAutofit/>
+                    </a:bodyPr>
+                    <a:lstStyle/>
+                    <a:p>
+                      <a:pPr algn="l"/>
+                      <a:r>
+                        <a:rPr sz="1650" b="1">
+                          <a:solidFill>
+                            <a:srgbClr val="FFFFFF"/>
+                          </a:solidFill>
+                          <a:latin typeface="Liberation Sans"/>
+                          <a:ea typeface="Liberation Sans"/>
+                          <a:cs typeface="Liberation Sans"/>
+                        </a:rPr>
+                        <a:t>Satın alma</a:t>
+                      </a:r>
+                    </a:p>
+                  </a:txBody>
+                  <a:tcPr marL="76200" marR="76200" marT="19050" marB="19050">
+                    <a:solidFill>
+                      <a:srgbClr val="008E86"/>
+                    </a:solidFill>
+                  </a:tcPr>
+                </a:tc>
+                <a:tc>
+                  <a:txBody>
+                    <a:bodyPr wrap="square" anchor="ctr">
+                      <a:noAutofit/>
+                    </a:bodyPr>
+                    <a:lstStyle/>
+                    <a:p>
+                      <a:pPr algn="l"/>
+                      <a:r>
+                        <a:rPr sz="1650" b="1">
+                          <a:solidFill>
+                            <a:srgbClr val="FFFFFF"/>
+                          </a:solidFill>
+                          <a:latin typeface="Liberation Sans"/>
+                          <a:ea typeface="Liberation Sans"/>
+                          <a:cs typeface="Liberation Sans"/>
+                        </a:rPr>
+                        <a:t>Kalite</a:t>
+                      </a:r>
+                    </a:p>
+                  </a:txBody>
+                  <a:tcPr marL="76200" marR="76200" marT="19050" marB="19050">
+                    <a:solidFill>
+                      <a:srgbClr val="008E86"/>
+                    </a:solidFill>
+                  </a:tcPr>
+                </a:tc>
+                <a:tc>
+                  <a:txBody>
+                    <a:bodyPr wrap="square" anchor="ctr">
+                      <a:noAutofit/>
+                    </a:bodyPr>
+                    <a:lstStyle/>
+                    <a:p>
+                      <a:pPr algn="l"/>
+                      <a:r>
+                        <a:rPr sz="1650" b="1">
+                          <a:solidFill>
+                            <a:srgbClr val="FFFFFF"/>
+                          </a:solidFill>
+                          <a:latin typeface="Liberation Sans"/>
+                          <a:ea typeface="Liberation Sans"/>
+                          <a:cs typeface="Liberation Sans"/>
+                        </a:rPr>
+                        <a:t>Bilgi tekn.</a:t>
+                      </a:r>
+                    </a:p>
+                  </a:txBody>
+                  <a:tcPr marL="76200" marR="76200" marT="19050" marB="19050">
+                    <a:solidFill>
+                      <a:srgbClr val="008E86"/>
+                    </a:solidFill>
+                  </a:tcPr>
+                </a:tc>
+                <a:tc>
+                  <a:txBody>
+                    <a:bodyPr wrap="square" anchor="ctr">
+                      <a:noAutofit/>
+                    </a:bodyPr>
+                    <a:lstStyle/>
+                    <a:p>
+                      <a:pPr algn="l"/>
+                      <a:r>
+                        <a:rPr sz="1650" b="1">
+                          <a:solidFill>
+                            <a:srgbClr val="FFFFFF"/>
+                          </a:solidFill>
+                          <a:latin typeface="Liberation Sans"/>
+                          <a:ea typeface="Liberation Sans"/>
+                          <a:cs typeface="Liberation Sans"/>
+                        </a:rPr>
+                        <a:t>Proje yön.</a:t>
+                      </a:r>
+                    </a:p>
+                  </a:txBody>
+                  <a:tcPr marL="76200" marR="76200" marT="19050" marB="19050">
+                    <a:solidFill>
+                      <a:srgbClr val="008E86"/>
+                    </a:solidFill>
+                  </a:tcPr>
+                </a:tc>
               </a:tr>
-              <a:tr h="342900">
+              <a:tr h="552450">
                 <a:tc>
                   <a:txBody>
                     <a:bodyPr wrap="square" anchor="ctr">
@@ -5408,19 +5805,19 @@
                     <a:p>
                       <a:pPr algn="l"/>
                       <a:r>
-                        <a:rPr sz="1800" b="1">
-                          <a:solidFill>
-                            <a:srgbClr val="273F50"/>
-                          </a:solidFill>
-                          <a:latin typeface="Liberation Sans"/>
-                          <a:ea typeface="Liberation Sans"/>
-                          <a:cs typeface="Liberation Sans"/>
-                        </a:rPr>
-                        <a:t>Mühendislik</a:t>
-                      </a:r>
-                    </a:p>
-                  </a:txBody>
-                  <a:tcPr marL="114300" marR="95250" marT="38100" marB="38100">
+                        <a:rPr sz="1650" b="1">
+                          <a:solidFill>
+                            <a:srgbClr val="273F50"/>
+                          </a:solidFill>
+                          <a:latin typeface="Liberation Sans"/>
+                          <a:ea typeface="Liberation Sans"/>
+                          <a:cs typeface="Liberation Sans"/>
+                        </a:rPr>
+                        <a:t>Üretim Hattı</a:t>
+                      </a:r>
+                    </a:p>
+                  </a:txBody>
+                  <a:tcPr marL="76200" marR="76200" marT="19050" marB="19050">
                     <a:solidFill>
                       <a:srgbClr val="FFFFFF"/>
                     </a:solidFill>
@@ -5435,19 +5832,74 @@
                     <a:p>
                       <a:pPr algn="ctr"/>
                       <a:r>
-                        <a:rPr sz="1800" b="0">
-                          <a:solidFill>
-                            <a:srgbClr val="273F50"/>
-                          </a:solidFill>
-                          <a:latin typeface="Liberation Sans"/>
-                          <a:ea typeface="Liberation Sans"/>
-                          <a:cs typeface="Liberation Sans"/>
-                        </a:rPr>
-                        <a:t>3</a:t>
-                      </a:r>
-                    </a:p>
-                  </a:txBody>
-                  <a:tcPr marL="114300" marR="95250" marT="38100" marB="38100">
+                        <a:rPr sz="1650" b="1">
+                          <a:solidFill>
+                            <a:srgbClr val="273F50"/>
+                          </a:solidFill>
+                          <a:latin typeface="Liberation Sans"/>
+                          <a:ea typeface="Liberation Sans"/>
+                          <a:cs typeface="Liberation Sans"/>
+                        </a:rPr>
+                        <a:t>8 kişi</a:t>
+                      </a:r>
+                    </a:p>
+                    <a:p>
+                      <a:pPr algn="ctr"/>
+                      <a:r>
+                        <a:rPr sz="1650" b="1">
+                          <a:solidFill>
+                            <a:srgbClr val="273F50"/>
+                          </a:solidFill>
+                          <a:latin typeface="Liberation Sans"/>
+                          <a:ea typeface="Liberation Sans"/>
+                          <a:cs typeface="Liberation Sans"/>
+                        </a:rPr>
+                        <a:t>240 saat</a:t>
+                      </a:r>
+                    </a:p>
+                  </a:txBody>
+                  <a:tcPr marL="76200" marR="76200" marT="19050" marB="19050">
+                    <a:solidFill>
+                      <a:srgbClr val="DDF2EE"/>
+                    </a:solidFill>
+                  </a:tcPr>
+                </a:tc>
+                <a:tc>
+                  <a:txBody>
+                    <a:bodyPr wrap="square" anchor="ctr">
+                      <a:noAutofit/>
+                    </a:bodyPr>
+                    <a:lstStyle/>
+                    <a:p>
+                      <a:pPr algn="ctr"/>
+                      <a:r>
+                        <a:rPr sz="1650" b="0">
+                          <a:solidFill>
+                            <a:srgbClr val="273F50"/>
+                          </a:solidFill>
+                          <a:latin typeface="Liberation Sans"/>
+                          <a:ea typeface="Liberation Sans"/>
+                          <a:cs typeface="Liberation Sans"/>
+                        </a:rPr>
+                        <a:t>3 kişi</a:t>
+                      </a:r>
+                    </a:p>
+                    <a:p>
+                      <a:pPr algn="ctr"/>
+                      <a:r>
+                        <a:rPr sz="1650" b="0">
+                          <a:solidFill>
+                            <a:srgbClr val="273F50"/>
+                          </a:solidFill>
+                          <a:latin typeface="Liberation Sans"/>
+                          <a:ea typeface="Liberation Sans"/>
+                          <a:cs typeface="Liberation Sans"/>
+                        </a:rPr>
+                        <a:t>96 saat</a:t>
+                      </a:r>
+                    </a:p>
+                  </a:txBody>
+                  <a:tcPr marL="76200" marR="76200" marT="19050" marB="19050">
                     <a:solidFill>
                       <a:srgbClr val="FFFFFF"/>
                     </a:solidFill>
@@ -5462,26 +5914,190 @@
                     <a:p>
                       <a:pPr algn="ctr"/>
                       <a:r>
-                        <a:rPr sz="1800" b="0">
-                          <a:solidFill>
-                            <a:srgbClr val="273F50"/>
-                          </a:solidFill>
-                          <a:latin typeface="Liberation Sans"/>
-                          <a:ea typeface="Liberation Sans"/>
-                          <a:cs typeface="Liberation Sans"/>
-                        </a:rPr>
-                        <a:t>96</a:t>
-                      </a:r>
-                    </a:p>
-                  </a:txBody>
-                  <a:tcPr marL="114300" marR="95250" marT="38100" marB="38100">
+                        <a:rPr sz="1650" b="0">
+                          <a:solidFill>
+                            <a:srgbClr val="273F50"/>
+                          </a:solidFill>
+                          <a:latin typeface="Liberation Sans"/>
+                          <a:ea typeface="Liberation Sans"/>
+                          <a:cs typeface="Liberation Sans"/>
+                        </a:rPr>
+                        <a:t>2 kişi</a:t>
+                      </a:r>
+                    </a:p>
+                    <a:p>
+                      <a:pPr algn="ctr"/>
+                      <a:r>
+                        <a:rPr sz="1650" b="0">
+                          <a:solidFill>
+                            <a:srgbClr val="273F50"/>
+                          </a:solidFill>
+                          <a:latin typeface="Liberation Sans"/>
+                          <a:ea typeface="Liberation Sans"/>
+                          <a:cs typeface="Liberation Sans"/>
+                        </a:rPr>
+                        <a:t>72 saat</a:t>
+                      </a:r>
+                    </a:p>
+                  </a:txBody>
+                  <a:tcPr marL="76200" marR="76200" marT="19050" marB="19050">
                     <a:solidFill>
                       <a:srgbClr val="FFFFFF"/>
                     </a:solidFill>
                   </a:tcPr>
                 </a:tc>
+                <a:tc>
+                  <a:txBody>
+                    <a:bodyPr wrap="square" anchor="ctr">
+                      <a:noAutofit/>
+                    </a:bodyPr>
+                    <a:lstStyle/>
+                    <a:p>
+                      <a:pPr algn="ctr"/>
+                      <a:r>
+                        <a:rPr sz="1650" b="0">
+                          <a:solidFill>
+                            <a:srgbClr val="273F50"/>
+                          </a:solidFill>
+                          <a:latin typeface="Liberation Sans"/>
+                          <a:ea typeface="Liberation Sans"/>
+                          <a:cs typeface="Liberation Sans"/>
+                        </a:rPr>
+                        <a:t>1 kişi</a:t>
+                      </a:r>
+                    </a:p>
+                    <a:p>
+                      <a:pPr algn="ctr"/>
+                      <a:r>
+                        <a:rPr sz="1650" b="0">
+                          <a:solidFill>
+                            <a:srgbClr val="273F50"/>
+                          </a:solidFill>
+                          <a:latin typeface="Liberation Sans"/>
+                          <a:ea typeface="Liberation Sans"/>
+                          <a:cs typeface="Liberation Sans"/>
+                        </a:rPr>
+                        <a:t>24 saat</a:t>
+                      </a:r>
+                    </a:p>
+                  </a:txBody>
+                  <a:tcPr marL="76200" marR="76200" marT="19050" marB="19050">
+                    <a:solidFill>
+                      <a:srgbClr val="FFFFFF"/>
+                    </a:solidFill>
+                  </a:tcPr>
+                </a:tc>
+                <a:tc>
+                  <a:txBody>
+                    <a:bodyPr wrap="square" anchor="ctr">
+                      <a:noAutofit/>
+                    </a:bodyPr>
+                    <a:lstStyle/>
+                    <a:p>
+                      <a:pPr algn="ctr"/>
+                      <a:r>
+                        <a:rPr sz="1650" b="0">
+                          <a:solidFill>
+                            <a:srgbClr val="273F50"/>
+                          </a:solidFill>
+                          <a:latin typeface="Liberation Sans"/>
+                          <a:ea typeface="Liberation Sans"/>
+                          <a:cs typeface="Liberation Sans"/>
+                        </a:rPr>
+                        <a:t>1 kişi</a:t>
+                      </a:r>
+                    </a:p>
+                    <a:p>
+                      <a:pPr algn="ctr"/>
+                      <a:r>
+                        <a:rPr sz="1650" b="0">
+                          <a:solidFill>
+                            <a:srgbClr val="273F50"/>
+                          </a:solidFill>
+                          <a:latin typeface="Liberation Sans"/>
+                          <a:ea typeface="Liberation Sans"/>
+                          <a:cs typeface="Liberation Sans"/>
+                        </a:rPr>
+                        <a:t>24 saat</a:t>
+                      </a:r>
+                    </a:p>
+                  </a:txBody>
+                  <a:tcPr marL="76200" marR="76200" marT="19050" marB="19050">
+                    <a:solidFill>
+                      <a:srgbClr val="FFFFFF"/>
+                    </a:solidFill>
+                  </a:tcPr>
+                </a:tc>
+                <a:tc>
+                  <a:txBody>
+                    <a:bodyPr wrap="square" anchor="ctr">
+                      <a:noAutofit/>
+                    </a:bodyPr>
+                    <a:lstStyle/>
+                    <a:p>
+                      <a:pPr algn="ctr"/>
+                      <a:r>
+                        <a:rPr sz="1650" b="0">
+                          <a:solidFill>
+                            <a:srgbClr val="273F50"/>
+                          </a:solidFill>
+                          <a:latin typeface="Liberation Sans"/>
+                          <a:ea typeface="Liberation Sans"/>
+                          <a:cs typeface="Liberation Sans"/>
+                        </a:rPr>
+                        <a:t>—</a:t>
+                      </a:r>
+                    </a:p>
+                  </a:txBody>
+                  <a:tcPr marL="76200" marR="76200" marT="19050" marB="19050">
+                    <a:solidFill>
+                      <a:srgbClr val="FFFFFF"/>
+                    </a:solidFill>
+                  </a:tcPr>
+                </a:tc>
+                <a:tc>
+                  <a:txBody>
+                    <a:bodyPr wrap="square" anchor="ctr">
+                      <a:noAutofit/>
+                    </a:bodyPr>
+                    <a:lstStyle/>
+                    <a:p>
+                      <a:pPr algn="ctr"/>
+                      <a:r>
+                        <a:rPr sz="1650" b="0">
+                          <a:solidFill>
+                            <a:srgbClr val="273F50"/>
+                          </a:solidFill>
+                          <a:latin typeface="Liberation Sans"/>
+                          <a:ea typeface="Liberation Sans"/>
+                          <a:cs typeface="Liberation Sans"/>
+                        </a:rPr>
+                        <a:t>1 kişi</a:t>
+                      </a:r>
+                    </a:p>
+                    <a:p>
+                      <a:pPr algn="ctr"/>
+                      <a:r>
+                        <a:rPr sz="1650" b="0">
+                          <a:solidFill>
+                            <a:srgbClr val="273F50"/>
+                          </a:solidFill>
+                          <a:latin typeface="Liberation Sans"/>
+                          <a:ea typeface="Liberation Sans"/>
+                          <a:cs typeface="Liberation Sans"/>
+                        </a:rPr>
+                        <a:t>24 saat</a:t>
+                      </a:r>
+                    </a:p>
+                  </a:txBody>
+                  <a:tcPr marL="76200" marR="76200" marT="19050" marB="19050">
+                    <a:solidFill>
+                      <a:srgbClr val="FFFFFF"/>
+                    </a:solidFill>
+                  </a:tcPr>
+                </a:tc>
               </a:tr>
-              <a:tr h="342900">
+              <a:tr h="552450">
                 <a:tc>
                   <a:txBody>
                     <a:bodyPr wrap="square" anchor="ctr">
@@ -5491,19 +6107,19 @@
                     <a:p>
                       <a:pPr algn="l"/>
                       <a:r>
-                        <a:rPr sz="1800" b="1">
-                          <a:solidFill>
-                            <a:srgbClr val="273F50"/>
-                          </a:solidFill>
-                          <a:latin typeface="Liberation Sans"/>
-                          <a:ea typeface="Liberation Sans"/>
-                          <a:cs typeface="Liberation Sans"/>
-                        </a:rPr>
-                        <a:t>Üretim</a:t>
-                      </a:r>
-                    </a:p>
-                  </a:txBody>
-                  <a:tcPr marL="114300" marR="95250" marT="38100" marB="38100">
+                        <a:rPr sz="1650" b="1">
+                          <a:solidFill>
+                            <a:srgbClr val="273F50"/>
+                          </a:solidFill>
+                          <a:latin typeface="Liberation Sans"/>
+                          <a:ea typeface="Liberation Sans"/>
+                          <a:cs typeface="Liberation Sans"/>
+                        </a:rPr>
+                        <a:t>Müşteri Portalı</a:t>
+                      </a:r>
+                    </a:p>
+                  </a:txBody>
+                  <a:tcPr marL="76200" marR="76200" marT="19050" marB="19050">
                     <a:solidFill>
                       <a:srgbClr val="F1F6FA"/>
                     </a:solidFill>
@@ -5518,19 +6134,60 @@
                     <a:p>
                       <a:pPr algn="ctr"/>
                       <a:r>
-                        <a:rPr sz="1800" b="0">
-                          <a:solidFill>
-                            <a:srgbClr val="273F50"/>
-                          </a:solidFill>
-                          <a:latin typeface="Liberation Sans"/>
-                          <a:ea typeface="Liberation Sans"/>
-                          <a:cs typeface="Liberation Sans"/>
-                        </a:rPr>
-                        <a:t>2</a:t>
-                      </a:r>
-                    </a:p>
-                  </a:txBody>
-                  <a:tcPr marL="114300" marR="95250" marT="38100" marB="38100">
+                        <a:rPr sz="1650" b="1">
+                          <a:solidFill>
+                            <a:srgbClr val="273F50"/>
+                          </a:solidFill>
+                          <a:latin typeface="Liberation Sans"/>
+                          <a:ea typeface="Liberation Sans"/>
+                          <a:cs typeface="Liberation Sans"/>
+                        </a:rPr>
+                        <a:t>5 kişi</a:t>
+                      </a:r>
+                    </a:p>
+                    <a:p>
+                      <a:pPr algn="ctr"/>
+                      <a:r>
+                        <a:rPr sz="1650" b="1">
+                          <a:solidFill>
+                            <a:srgbClr val="273F50"/>
+                          </a:solidFill>
+                          <a:latin typeface="Liberation Sans"/>
+                          <a:ea typeface="Liberation Sans"/>
+                          <a:cs typeface="Liberation Sans"/>
+                        </a:rPr>
+                        <a:t>160 saat</a:t>
+                      </a:r>
+                    </a:p>
+                  </a:txBody>
+                  <a:tcPr marL="76200" marR="76200" marT="19050" marB="19050">
+                    <a:solidFill>
+                      <a:srgbClr val="DDF2EE"/>
+                    </a:solidFill>
+                  </a:tcPr>
+                </a:tc>
+                <a:tc>
+                  <a:txBody>
+                    <a:bodyPr wrap="square" anchor="ctr">
+                      <a:noAutofit/>
+                    </a:bodyPr>
+                    <a:lstStyle/>
+                    <a:p>
+                      <a:pPr algn="ctr"/>
+                      <a:r>
+                        <a:rPr sz="1650" b="0">
+                          <a:solidFill>
+                            <a:srgbClr val="273F50"/>
+                          </a:solidFill>
+                          <a:latin typeface="Liberation Sans"/>
+                          <a:ea typeface="Liberation Sans"/>
+                          <a:cs typeface="Liberation Sans"/>
+                        </a:rPr>
+                        <a:t>—</a:t>
+                      </a:r>
+                    </a:p>
+                  </a:txBody>
+                  <a:tcPr marL="76200" marR="76200" marT="19050" marB="19050">
                     <a:solidFill>
                       <a:srgbClr val="F1F6FA"/>
                     </a:solidFill>
@@ -5545,26 +6202,176 @@
                     <a:p>
                       <a:pPr algn="ctr"/>
                       <a:r>
-                        <a:rPr sz="1800" b="0">
-                          <a:solidFill>
-                            <a:srgbClr val="273F50"/>
-                          </a:solidFill>
-                          <a:latin typeface="Liberation Sans"/>
-                          <a:ea typeface="Liberation Sans"/>
-                          <a:cs typeface="Liberation Sans"/>
-                        </a:rPr>
-                        <a:t>72</a:t>
-                      </a:r>
-                    </a:p>
-                  </a:txBody>
-                  <a:tcPr marL="114300" marR="95250" marT="38100" marB="38100">
+                        <a:rPr sz="1650" b="0">
+                          <a:solidFill>
+                            <a:srgbClr val="273F50"/>
+                          </a:solidFill>
+                          <a:latin typeface="Liberation Sans"/>
+                          <a:ea typeface="Liberation Sans"/>
+                          <a:cs typeface="Liberation Sans"/>
+                        </a:rPr>
+                        <a:t>—</a:t>
+                      </a:r>
+                    </a:p>
+                  </a:txBody>
+                  <a:tcPr marL="76200" marR="76200" marT="19050" marB="19050">
                     <a:solidFill>
                       <a:srgbClr val="F1F6FA"/>
                     </a:solidFill>
                   </a:tcPr>
                 </a:tc>
+                <a:tc>
+                  <a:txBody>
+                    <a:bodyPr wrap="square" anchor="ctr">
+                      <a:noAutofit/>
+                    </a:bodyPr>
+                    <a:lstStyle/>
+                    <a:p>
+                      <a:pPr algn="ctr"/>
+                      <a:r>
+                        <a:rPr sz="1650" b="0">
+                          <a:solidFill>
+                            <a:srgbClr val="273F50"/>
+                          </a:solidFill>
+                          <a:latin typeface="Liberation Sans"/>
+                          <a:ea typeface="Liberation Sans"/>
+                          <a:cs typeface="Liberation Sans"/>
+                        </a:rPr>
+                        <a:t>—</a:t>
+                      </a:r>
+                    </a:p>
+                  </a:txBody>
+                  <a:tcPr marL="76200" marR="76200" marT="19050" marB="19050">
+                    <a:solidFill>
+                      <a:srgbClr val="F1F6FA"/>
+                    </a:solidFill>
+                  </a:tcPr>
+                </a:tc>
+                <a:tc>
+                  <a:txBody>
+                    <a:bodyPr wrap="square" anchor="ctr">
+                      <a:noAutofit/>
+                    </a:bodyPr>
+                    <a:lstStyle/>
+                    <a:p>
+                      <a:pPr algn="ctr"/>
+                      <a:r>
+                        <a:rPr sz="1650" b="0">
+                          <a:solidFill>
+                            <a:srgbClr val="273F50"/>
+                          </a:solidFill>
+                          <a:latin typeface="Liberation Sans"/>
+                          <a:ea typeface="Liberation Sans"/>
+                          <a:cs typeface="Liberation Sans"/>
+                        </a:rPr>
+                        <a:t>1 kişi</a:t>
+                      </a:r>
+                    </a:p>
+                    <a:p>
+                      <a:pPr algn="ctr"/>
+                      <a:r>
+                        <a:rPr sz="1650" b="0">
+                          <a:solidFill>
+                            <a:srgbClr val="273F50"/>
+                          </a:solidFill>
+                          <a:latin typeface="Liberation Sans"/>
+                          <a:ea typeface="Liberation Sans"/>
+                          <a:cs typeface="Liberation Sans"/>
+                        </a:rPr>
+                        <a:t>24 saat</a:t>
+                      </a:r>
+                    </a:p>
+                  </a:txBody>
+                  <a:tcPr marL="76200" marR="76200" marT="19050" marB="19050">
+                    <a:solidFill>
+                      <a:srgbClr val="F1F6FA"/>
+                    </a:solidFill>
+                  </a:tcPr>
+                </a:tc>
+                <a:tc>
+                  <a:txBody>
+                    <a:bodyPr wrap="square" anchor="ctr">
+                      <a:noAutofit/>
+                    </a:bodyPr>
+                    <a:lstStyle/>
+                    <a:p>
+                      <a:pPr algn="ctr"/>
+                      <a:r>
+                        <a:rPr sz="1650" b="0">
+                          <a:solidFill>
+                            <a:srgbClr val="273F50"/>
+                          </a:solidFill>
+                          <a:latin typeface="Liberation Sans"/>
+                          <a:ea typeface="Liberation Sans"/>
+                          <a:cs typeface="Liberation Sans"/>
+                        </a:rPr>
+                        <a:t>3 kişi</a:t>
+                      </a:r>
+                    </a:p>
+                    <a:p>
+                      <a:pPr algn="ctr"/>
+                      <a:r>
+                        <a:rPr sz="1650" b="0">
+                          <a:solidFill>
+                            <a:srgbClr val="273F50"/>
+                          </a:solidFill>
+                          <a:latin typeface="Liberation Sans"/>
+                          <a:ea typeface="Liberation Sans"/>
+                          <a:cs typeface="Liberation Sans"/>
+                        </a:rPr>
+                        <a:t>120 saat</a:t>
+                      </a:r>
+                    </a:p>
+                  </a:txBody>
+                  <a:tcPr marL="76200" marR="76200" marT="19050" marB="19050">
+                    <a:solidFill>
+                      <a:srgbClr val="F1F6FA"/>
+                    </a:solidFill>
+                  </a:tcPr>
+                </a:tc>
+                <a:tc>
+                  <a:txBody>
+                    <a:bodyPr wrap="square" anchor="ctr">
+                      <a:noAutofit/>
+                    </a:bodyPr>
+                    <a:lstStyle/>
+                    <a:p>
+                      <a:pPr algn="ctr"/>
+                      <a:r>
+                        <a:rPr sz="1650" b="0">
+                          <a:solidFill>
+                            <a:srgbClr val="273F50"/>
+                          </a:solidFill>
+                          <a:latin typeface="Liberation Sans"/>
+                          <a:ea typeface="Liberation Sans"/>
+                          <a:cs typeface="Liberation Sans"/>
+                        </a:rPr>
+                        <a:t>1 kişi</a:t>
+                      </a:r>
+                    </a:p>
+                    <a:p>
+                      <a:pPr algn="ctr"/>
+                      <a:r>
+                        <a:rPr sz="1650" b="0">
+                          <a:solidFill>
+                            <a:srgbClr val="273F50"/>
+                          </a:solidFill>
+                          <a:latin typeface="Liberation Sans"/>
+                          <a:ea typeface="Liberation Sans"/>
+                          <a:cs typeface="Liberation Sans"/>
+                        </a:rPr>
+                        <a:t>16 saat</a:t>
+                      </a:r>
+                    </a:p>
+                  </a:txBody>
+                  <a:tcPr marL="76200" marR="76200" marT="19050" marB="19050">
+                    <a:solidFill>
+                      <a:srgbClr val="F1F6FA"/>
+                    </a:solidFill>
+                  </a:tcPr>
+                </a:tc>
               </a:tr>
-              <a:tr h="342900">
+              <a:tr h="552450">
                 <a:tc>
                   <a:txBody>
                     <a:bodyPr wrap="square" anchor="ctr">
@@ -5574,19 +6381,19 @@
                     <a:p>
                       <a:pPr algn="l"/>
                       <a:r>
-                        <a:rPr sz="1800" b="1">
-                          <a:solidFill>
-                            <a:srgbClr val="273F50"/>
-                          </a:solidFill>
-                          <a:latin typeface="Liberation Sans"/>
-                          <a:ea typeface="Liberation Sans"/>
-                          <a:cs typeface="Liberation Sans"/>
-                        </a:rPr>
-                        <a:t>Satın alma</a:t>
-                      </a:r>
-                    </a:p>
-                  </a:txBody>
-                  <a:tcPr marL="114300" marR="95250" marT="38100" marB="38100">
+                        <a:rPr sz="1650" b="1">
+                          <a:solidFill>
+                            <a:srgbClr val="273F50"/>
+                          </a:solidFill>
+                          <a:latin typeface="Liberation Sans"/>
+                          <a:ea typeface="Liberation Sans"/>
+                          <a:cs typeface="Liberation Sans"/>
+                        </a:rPr>
+                        <a:t>Depo Otomasyonu</a:t>
+                      </a:r>
+                    </a:p>
+                  </a:txBody>
+                  <a:tcPr marL="76200" marR="76200" marT="19050" marB="19050">
                     <a:solidFill>
                       <a:srgbClr val="FFFFFF"/>
                     </a:solidFill>
@@ -5601,19 +6408,74 @@
                     <a:p>
                       <a:pPr algn="ctr"/>
                       <a:r>
-                        <a:rPr sz="1800" b="0">
-                          <a:solidFill>
-                            <a:srgbClr val="273F50"/>
-                          </a:solidFill>
-                          <a:latin typeface="Liberation Sans"/>
-                          <a:ea typeface="Liberation Sans"/>
-                          <a:cs typeface="Liberation Sans"/>
-                        </a:rPr>
-                        <a:t>1</a:t>
-                      </a:r>
-                    </a:p>
-                  </a:txBody>
-                  <a:tcPr marL="114300" marR="95250" marT="38100" marB="38100">
+                        <a:rPr sz="1650" b="1">
+                          <a:solidFill>
+                            <a:srgbClr val="273F50"/>
+                          </a:solidFill>
+                          <a:latin typeface="Liberation Sans"/>
+                          <a:ea typeface="Liberation Sans"/>
+                          <a:cs typeface="Liberation Sans"/>
+                        </a:rPr>
+                        <a:t>8 kişi</a:t>
+                      </a:r>
+                    </a:p>
+                    <a:p>
+                      <a:pPr algn="ctr"/>
+                      <a:r>
+                        <a:rPr sz="1650" b="1">
+                          <a:solidFill>
+                            <a:srgbClr val="273F50"/>
+                          </a:solidFill>
+                          <a:latin typeface="Liberation Sans"/>
+                          <a:ea typeface="Liberation Sans"/>
+                          <a:cs typeface="Liberation Sans"/>
+                        </a:rPr>
+                        <a:t>192 saat</a:t>
+                      </a:r>
+                    </a:p>
+                  </a:txBody>
+                  <a:tcPr marL="76200" marR="76200" marT="19050" marB="19050">
+                    <a:solidFill>
+                      <a:srgbClr val="DDF2EE"/>
+                    </a:solidFill>
+                  </a:tcPr>
+                </a:tc>
+                <a:tc>
+                  <a:txBody>
+                    <a:bodyPr wrap="square" anchor="ctr">
+                      <a:noAutofit/>
+                    </a:bodyPr>
+                    <a:lstStyle/>
+                    <a:p>
+                      <a:pPr algn="ctr"/>
+                      <a:r>
+                        <a:rPr sz="1650" b="0">
+                          <a:solidFill>
+                            <a:srgbClr val="273F50"/>
+                          </a:solidFill>
+                          <a:latin typeface="Liberation Sans"/>
+                          <a:ea typeface="Liberation Sans"/>
+                          <a:cs typeface="Liberation Sans"/>
+                        </a:rPr>
+                        <a:t>2 kişi</a:t>
+                      </a:r>
+                    </a:p>
+                    <a:p>
+                      <a:pPr algn="ctr"/>
+                      <a:r>
+                        <a:rPr sz="1650" b="0">
+                          <a:solidFill>
+                            <a:srgbClr val="273F50"/>
+                          </a:solidFill>
+                          <a:latin typeface="Liberation Sans"/>
+                          <a:ea typeface="Liberation Sans"/>
+                          <a:cs typeface="Liberation Sans"/>
+                        </a:rPr>
+                        <a:t>48 saat</a:t>
+                      </a:r>
+                    </a:p>
+                  </a:txBody>
+                  <a:tcPr marL="76200" marR="76200" marT="19050" marB="19050">
                     <a:solidFill>
                       <a:srgbClr val="FFFFFF"/>
                     </a:solidFill>
@@ -5628,53 +6490,38 @@
                     <a:p>
                       <a:pPr algn="ctr"/>
                       <a:r>
-                        <a:rPr sz="1800" b="0">
-                          <a:solidFill>
-                            <a:srgbClr val="273F50"/>
-                          </a:solidFill>
-                          <a:latin typeface="Liberation Sans"/>
-                          <a:ea typeface="Liberation Sans"/>
-                          <a:cs typeface="Liberation Sans"/>
-                        </a:rPr>
-                        <a:t>24</a:t>
-                      </a:r>
-                    </a:p>
-                  </a:txBody>
-                  <a:tcPr marL="114300" marR="95250" marT="38100" marB="38100">
+                        <a:rPr sz="1650" b="0">
+                          <a:solidFill>
+                            <a:srgbClr val="273F50"/>
+                          </a:solidFill>
+                          <a:latin typeface="Liberation Sans"/>
+                          <a:ea typeface="Liberation Sans"/>
+                          <a:cs typeface="Liberation Sans"/>
+                        </a:rPr>
+                        <a:t>1 kişi</a:t>
+                      </a:r>
+                    </a:p>
+                    <a:p>
+                      <a:pPr algn="ctr"/>
+                      <a:r>
+                        <a:rPr sz="1650" b="0">
+                          <a:solidFill>
+                            <a:srgbClr val="273F50"/>
+                          </a:solidFill>
+                          <a:latin typeface="Liberation Sans"/>
+                          <a:ea typeface="Liberation Sans"/>
+                          <a:cs typeface="Liberation Sans"/>
+                        </a:rPr>
+                        <a:t>24 saat</a:t>
+                      </a:r>
+                    </a:p>
+                  </a:txBody>
+                  <a:tcPr marL="76200" marR="76200" marT="19050" marB="19050">
                     <a:solidFill>
                       <a:srgbClr val="FFFFFF"/>
                     </a:solidFill>
                   </a:tcPr>
                 </a:tc>
-              </a:tr>
-              <a:tr h="342900">
-                <a:tc>
-                  <a:txBody>
-                    <a:bodyPr wrap="square" anchor="ctr">
-                      <a:noAutofit/>
-                    </a:bodyPr>
-                    <a:lstStyle/>
-                    <a:p>
-                      <a:pPr algn="l"/>
-                      <a:r>
-                        <a:rPr sz="1800" b="1">
-                          <a:solidFill>
-                            <a:srgbClr val="273F50"/>
-                          </a:solidFill>
-                          <a:latin typeface="Liberation Sans"/>
-                          <a:ea typeface="Liberation Sans"/>
-                          <a:cs typeface="Liberation Sans"/>
-                        </a:rPr>
-                        <a:t>Kalite</a:t>
-                      </a:r>
-                    </a:p>
-                  </a:txBody>
-                  <a:tcPr marL="114300" marR="95250" marT="38100" marB="38100">
-                    <a:solidFill>
-                      <a:srgbClr val="F1F6FA"/>
-                    </a:solidFill>
-                  </a:tcPr>
-                </a:tc>
                 <a:tc>
                   <a:txBody>
                     <a:bodyPr wrap="square" anchor="ctr">
@@ -5684,75 +6531,33 @@
                     <a:p>
                       <a:pPr algn="ctr"/>
                       <a:r>
-                        <a:rPr sz="1800" b="0">
-                          <a:solidFill>
-                            <a:srgbClr val="273F50"/>
-                          </a:solidFill>
-                          <a:latin typeface="Liberation Sans"/>
-                          <a:ea typeface="Liberation Sans"/>
-                          <a:cs typeface="Liberation Sans"/>
-                        </a:rPr>
-                        <a:t>1</a:t>
-                      </a:r>
-                    </a:p>
-                  </a:txBody>
-                  <a:tcPr marL="114300" marR="95250" marT="38100" marB="38100">
-                    <a:solidFill>
-                      <a:srgbClr val="F1F6FA"/>
-                    </a:solidFill>
-                  </a:tcPr>
-                </a:tc>
-                <a:tc>
-                  <a:txBody>
-                    <a:bodyPr wrap="square" anchor="ctr">
-                      <a:noAutofit/>
-                    </a:bodyPr>
-                    <a:lstStyle/>
+                        <a:rPr sz="1650" b="0">
+                          <a:solidFill>
+                            <a:srgbClr val="273F50"/>
+                          </a:solidFill>
+                          <a:latin typeface="Liberation Sans"/>
+                          <a:ea typeface="Liberation Sans"/>
+                          <a:cs typeface="Liberation Sans"/>
+                        </a:rPr>
+                        <a:t>1 kişi</a:t>
+                      </a:r>
+                    </a:p>
                     <a:p>
                       <a:pPr algn="ctr"/>
                       <a:r>
-                        <a:rPr sz="1800" b="0">
-                          <a:solidFill>
-                            <a:srgbClr val="273F50"/>
-                          </a:solidFill>
-                          <a:latin typeface="Liberation Sans"/>
-                          <a:ea typeface="Liberation Sans"/>
-                          <a:cs typeface="Liberation Sans"/>
-                        </a:rPr>
-                        <a:t>24</a:t>
-                      </a:r>
-                    </a:p>
-                  </a:txBody>
-                  <a:tcPr marL="114300" marR="95250" marT="38100" marB="38100">
-                    <a:solidFill>
-                      <a:srgbClr val="F1F6FA"/>
-                    </a:solidFill>
-                  </a:tcPr>
-                </a:tc>
-              </a:tr>
-              <a:tr h="342900">
-                <a:tc>
-                  <a:txBody>
-                    <a:bodyPr wrap="square" anchor="ctr">
-                      <a:noAutofit/>
-                    </a:bodyPr>
-                    <a:lstStyle/>
-                    <a:p>
-                      <a:pPr algn="l"/>
-                      <a:r>
-                        <a:rPr sz="1800" b="1">
-                          <a:solidFill>
-                            <a:srgbClr val="273F50"/>
-                          </a:solidFill>
-                          <a:latin typeface="Liberation Sans"/>
-                          <a:ea typeface="Liberation Sans"/>
-                          <a:cs typeface="Liberation Sans"/>
-                        </a:rPr>
-                        <a:t>Proje yönetimi</a:t>
-                      </a:r>
-                    </a:p>
-                  </a:txBody>
-                  <a:tcPr marL="114300" marR="95250" marT="38100" marB="38100">
+                        <a:rPr sz="1650" b="0">
+                          <a:solidFill>
+                            <a:srgbClr val="273F50"/>
+                          </a:solidFill>
+                          <a:latin typeface="Liberation Sans"/>
+                          <a:ea typeface="Liberation Sans"/>
+                          <a:cs typeface="Liberation Sans"/>
+                        </a:rPr>
+                        <a:t>16 saat</a:t>
+                      </a:r>
+                    </a:p>
+                  </a:txBody>
+                  <a:tcPr marL="76200" marR="76200" marT="19050" marB="19050">
                     <a:solidFill>
                       <a:srgbClr val="FFFFFF"/>
                     </a:solidFill>
@@ -5767,19 +6572,33 @@
                     <a:p>
                       <a:pPr algn="ctr"/>
                       <a:r>
-                        <a:rPr sz="1800" b="0">
-                          <a:solidFill>
-                            <a:srgbClr val="273F50"/>
-                          </a:solidFill>
-                          <a:latin typeface="Liberation Sans"/>
-                          <a:ea typeface="Liberation Sans"/>
-                          <a:cs typeface="Liberation Sans"/>
-                        </a:rPr>
-                        <a:t>1</a:t>
-                      </a:r>
-                    </a:p>
-                  </a:txBody>
-                  <a:tcPr marL="114300" marR="95250" marT="38100" marB="38100">
+                        <a:rPr sz="1650" b="0">
+                          <a:solidFill>
+                            <a:srgbClr val="273F50"/>
+                          </a:solidFill>
+                          <a:latin typeface="Liberation Sans"/>
+                          <a:ea typeface="Liberation Sans"/>
+                          <a:cs typeface="Liberation Sans"/>
+                        </a:rPr>
+                        <a:t>1 kişi</a:t>
+                      </a:r>
+                    </a:p>
+                    <a:p>
+                      <a:pPr algn="ctr"/>
+                      <a:r>
+                        <a:rPr sz="1650" b="0">
+                          <a:solidFill>
+                            <a:srgbClr val="273F50"/>
+                          </a:solidFill>
+                          <a:latin typeface="Liberation Sans"/>
+                          <a:ea typeface="Liberation Sans"/>
+                          <a:cs typeface="Liberation Sans"/>
+                        </a:rPr>
+                        <a:t>24 saat</a:t>
+                      </a:r>
+                    </a:p>
+                  </a:txBody>
+                  <a:tcPr marL="76200" marR="76200" marT="19050" marB="19050">
                     <a:solidFill>
                       <a:srgbClr val="FFFFFF"/>
                     </a:solidFill>
@@ -5794,53 +6613,38 @@
                     <a:p>
                       <a:pPr algn="ctr"/>
                       <a:r>
-                        <a:rPr sz="1800" b="0">
-                          <a:solidFill>
-                            <a:srgbClr val="273F50"/>
-                          </a:solidFill>
-                          <a:latin typeface="Liberation Sans"/>
-                          <a:ea typeface="Liberation Sans"/>
-                          <a:cs typeface="Liberation Sans"/>
-                        </a:rPr>
-                        <a:t>24</a:t>
-                      </a:r>
-                    </a:p>
-                  </a:txBody>
-                  <a:tcPr marL="114300" marR="95250" marT="38100" marB="38100">
+                        <a:rPr sz="1650" b="0">
+                          <a:solidFill>
+                            <a:srgbClr val="273F50"/>
+                          </a:solidFill>
+                          <a:latin typeface="Liberation Sans"/>
+                          <a:ea typeface="Liberation Sans"/>
+                          <a:cs typeface="Liberation Sans"/>
+                        </a:rPr>
+                        <a:t>2 kişi</a:t>
+                      </a:r>
+                    </a:p>
+                    <a:p>
+                      <a:pPr algn="ctr"/>
+                      <a:r>
+                        <a:rPr sz="1650" b="0">
+                          <a:solidFill>
+                            <a:srgbClr val="273F50"/>
+                          </a:solidFill>
+                          <a:latin typeface="Liberation Sans"/>
+                          <a:ea typeface="Liberation Sans"/>
+                          <a:cs typeface="Liberation Sans"/>
+                        </a:rPr>
+                        <a:t>64 saat</a:t>
+                      </a:r>
+                    </a:p>
+                  </a:txBody>
+                  <a:tcPr marL="76200" marR="76200" marT="19050" marB="19050">
                     <a:solidFill>
                       <a:srgbClr val="FFFFFF"/>
                     </a:solidFill>
                   </a:tcPr>
                 </a:tc>
-              </a:tr>
-              <a:tr h="381000">
-                <a:tc>
-                  <a:txBody>
-                    <a:bodyPr wrap="square" anchor="ctr">
-                      <a:noAutofit/>
-                    </a:bodyPr>
-                    <a:lstStyle/>
-                    <a:p>
-                      <a:pPr algn="l"/>
-                      <a:r>
-                        <a:rPr sz="1800" b="1">
-                          <a:solidFill>
-                            <a:srgbClr val="273F50"/>
-                          </a:solidFill>
-                          <a:latin typeface="Liberation Sans"/>
-                          <a:ea typeface="Liberation Sans"/>
-                          <a:cs typeface="Liberation Sans"/>
-                        </a:rPr>
-                        <a:t>TOPLAM</a:t>
-                      </a:r>
-                    </a:p>
-                  </a:txBody>
-                  <a:tcPr marL="114300" marR="95250" marT="38100" marB="38100">
-                    <a:solidFill>
-                      <a:srgbClr val="DDF2EE"/>
-                    </a:solidFill>
-                  </a:tcPr>
-                </a:tc>
                 <a:tc>
                   <a:txBody>
                     <a:bodyPr wrap="square" anchor="ctr">
@@ -5850,48 +6654,35 @@
                     <a:p>
                       <a:pPr algn="ctr"/>
                       <a:r>
-                        <a:rPr sz="1800" b="1">
-                          <a:solidFill>
-                            <a:srgbClr val="273F50"/>
-                          </a:solidFill>
-                          <a:latin typeface="Liberation Sans"/>
-                          <a:ea typeface="Liberation Sans"/>
-                          <a:cs typeface="Liberation Sans"/>
-                        </a:rPr>
-                        <a:t>8</a:t>
-                      </a:r>
-                    </a:p>
-                  </a:txBody>
-                  <a:tcPr marL="114300" marR="95250" marT="38100" marB="38100">
-                    <a:solidFill>
-                      <a:srgbClr val="DDF2EE"/>
-                    </a:solidFill>
-                  </a:tcPr>
-                </a:tc>
-                <a:tc>
-                  <a:txBody>
-                    <a:bodyPr wrap="square" anchor="ctr">
-                      <a:noAutofit/>
-                    </a:bodyPr>
-                    <a:lstStyle/>
+                        <a:rPr sz="1650" b="0">
+                          <a:solidFill>
+                            <a:srgbClr val="273F50"/>
+                          </a:solidFill>
+                          <a:latin typeface="Liberation Sans"/>
+                          <a:ea typeface="Liberation Sans"/>
+                          <a:cs typeface="Liberation Sans"/>
+                        </a:rPr>
+                        <a:t>1 kişi</a:t>
+                      </a:r>
+                    </a:p>
                     <a:p>
                       <a:pPr algn="ctr"/>
                       <a:r>
-                        <a:rPr sz="1800" b="1">
-                          <a:solidFill>
-                            <a:srgbClr val="273F50"/>
-                          </a:solidFill>
-                          <a:latin typeface="Liberation Sans"/>
-                          <a:ea typeface="Liberation Sans"/>
-                          <a:cs typeface="Liberation Sans"/>
-                        </a:rPr>
-                        <a:t>240</a:t>
-                      </a:r>
-                    </a:p>
-                  </a:txBody>
-                  <a:tcPr marL="114300" marR="95250" marT="38100" marB="38100">
-                    <a:solidFill>
-                      <a:srgbClr val="DDF2EE"/>
+                        <a:rPr sz="1650" b="0">
+                          <a:solidFill>
+                            <a:srgbClr val="273F50"/>
+                          </a:solidFill>
+                          <a:latin typeface="Liberation Sans"/>
+                          <a:ea typeface="Liberation Sans"/>
+                          <a:cs typeface="Liberation Sans"/>
+                        </a:rPr>
+                        <a:t>16 saat</a:t>
+                      </a:r>
+                    </a:p>
+                  </a:txBody>
+                  <a:tcPr marL="76200" marR="76200" marT="19050" marB="19050">
+                    <a:solidFill>
+                      <a:srgbClr val="FFFFFF"/>
                     </a:solidFill>
                   </a:tcPr>
                 </a:tc>
@@ -5900,281 +6691,6 @@
           </a:graphicData>
         </a:graphic>
       </p:graphicFrame>
-      <p:graphicFrame>
-        <p:nvGraphicFramePr>
-          <p:cNvPr id="10" name="Chart">
-            <a:extLst xmlns:a="http://schemas.openxmlformats.org/drawingml/2006/main">
-              <a:ext uri="{FF2B5EF4-FFF2-40B4-BE49-F238E27FC236}">
-                <a16:creationId xmlns:a16="http://schemas.microsoft.com/office/drawing/2014/main" id="{AB54FD7B-564E-4A2C-8190-454ABF8BD796}"/>
-              </a:ext>
-            </a:extLst>
-          </p:cNvPr>
-          <p:cNvGraphicFramePr/>
-          <p:nvPr/>
-        </p:nvGraphicFramePr>
-        <p:xfrm>
-          <a:off xmlns:a="http://schemas.openxmlformats.org/drawingml/2006/main" x="10382250" y="1695450"/>
-          <a:ext xmlns:a="http://schemas.openxmlformats.org/drawingml/2006/main" cx="4400550" cy="3295650"/>
-        </p:xfrm>
-        <a:graphic xmlns:a="http://schemas.openxmlformats.org/drawingml/2006/main">
-          <a:graphicData uri="http://schemas.openxmlformats.org/drawingml/2006/chart">
-            <c:chart xmlns:r="http://schemas.openxmlformats.org/officeDocument/2006/relationships" xmlns:c="http://schemas.openxmlformats.org/drawingml/2006/chart" r:id="R9a3613a90e2648a8"/>
-          </a:graphicData>
-        </a:graphic>
-      </p:graphicFrame>
-      <p:sp>
-        <p:nvSpPr>
-          <p:cNvPr id="11" name="variance">
-            <a:extLst xmlns:a="http://schemas.openxmlformats.org/drawingml/2006/main">
-              <a:ext uri="{FF2B5EF4-FFF2-40B4-BE49-F238E27FC236}">
-                <a16:creationId xmlns:a16="http://schemas.microsoft.com/office/drawing/2014/main" id="{8A3FD8EA-A5D3-4024-91E2-76C19B22D998}"/>
-              </a:ext>
-            </a:extLst>
-          </p:cNvPr>
-          <p:cNvSpPr>
-            <a:spLocks xmlns:a="http://schemas.openxmlformats.org/drawingml/2006/main" noGrp="1"/>
-          </p:cNvSpPr>
-          <p:nvPr/>
-        </p:nvSpPr>
-        <p:spPr>
-          <a:xfrm xmlns:a="http://schemas.openxmlformats.org/drawingml/2006/main">
-            <a:off x="10382250" y="5219700"/>
-            <a:ext cx="4400550" cy="800100"/>
-          </a:xfrm>
-          <a:prstGeom xmlns:a="http://schemas.openxmlformats.org/drawingml/2006/main" prst="rect">
-            <a:avLst/>
-          </a:prstGeom>
-          <a:noFill xmlns:a="http://schemas.openxmlformats.org/drawingml/2006/main"/>
-          <a:ln xmlns:a="http://schemas.openxmlformats.org/drawingml/2006/main" w="0">
-            <a:noFill/>
-            <a:prstDash val="solid"/>
-          </a:ln>
-        </p:spPr>
-        <p:txBody>
-          <a:bodyPr xmlns:a="http://schemas.openxmlformats.org/drawingml/2006/main" wrap="square" lIns="0" tIns="0" rIns="0" bIns="0" anchor="ctr">
-            <a:noAutofit/>
-          </a:bodyPr>
-          <a:lstStyle xmlns:a="http://schemas.openxmlformats.org/drawingml/2006/main">
-            <a:defPPr algn="l">
-              <a:defRPr sz="2550" b="1">
-                <a:solidFill>
-                  <a:srgbClr val="D97B0A"/>
-                </a:solidFill>
-                <a:latin typeface="Liberation Sans"/>
-                <a:ea typeface="Liberation Sans"/>
-                <a:cs typeface="Liberation Sans"/>
-              </a:defRPr>
-            </a:defPPr>
-          </a:lstStyle>
-          <a:p xmlns:a="http://schemas.openxmlformats.org/drawingml/2006/main">
-            <a:pPr algn="l">
-              <a:defRPr sz="2550" b="1">
-                <a:solidFill>
-                  <a:srgbClr val="D97B0A"/>
-                </a:solidFill>
-                <a:latin typeface="Liberation Sans"/>
-                <a:ea typeface="Liberation Sans"/>
-                <a:cs typeface="Liberation Sans"/>
-              </a:defRPr>
-            </a:pPr>
-            <a:r>
-              <a:rPr sz="2550" b="1">
-                <a:solidFill>
-                  <a:srgbClr val="D97B0A"/>
-                </a:solidFill>
-                <a:latin typeface="Liberation Sans"/>
-                <a:ea typeface="Liberation Sans"/>
-                <a:cs typeface="Liberation Sans"/>
-              </a:rPr>
-              <a:t>Planın 10 puan gerisinde</a:t>
-            </a:r>
-          </a:p>
-        </p:txBody>
-      </p:sp>
-      <p:sp>
-        <p:nvSpPr>
-          <p:cNvPr id="12" name="finish">
-            <a:extLst xmlns:a="http://schemas.openxmlformats.org/drawingml/2006/main">
-              <a:ext uri="{FF2B5EF4-FFF2-40B4-BE49-F238E27FC236}">
-                <a16:creationId xmlns:a16="http://schemas.microsoft.com/office/drawing/2014/main" id="{35342B8A-770E-4981-B79A-2608E5DC7E78}"/>
-              </a:ext>
-            </a:extLst>
-          </p:cNvPr>
-          <p:cNvSpPr>
-            <a:spLocks xmlns:a="http://schemas.openxmlformats.org/drawingml/2006/main" noGrp="1"/>
-          </p:cNvSpPr>
-          <p:nvPr/>
-        </p:nvSpPr>
-        <p:spPr>
-          <a:xfrm xmlns:a="http://schemas.openxmlformats.org/drawingml/2006/main">
-            <a:off x="10382250" y="6267450"/>
-            <a:ext cx="4400550" cy="1085850"/>
-          </a:xfrm>
-          <a:prstGeom xmlns:a="http://schemas.openxmlformats.org/drawingml/2006/main" prst="rect">
-            <a:avLst/>
-          </a:prstGeom>
-          <a:noFill xmlns:a="http://schemas.openxmlformats.org/drawingml/2006/main"/>
-          <a:ln xmlns:a="http://schemas.openxmlformats.org/drawingml/2006/main" w="0">
-            <a:noFill/>
-            <a:prstDash val="solid"/>
-          </a:ln>
-        </p:spPr>
-        <p:txBody>
-          <a:bodyPr xmlns:a="http://schemas.openxmlformats.org/drawingml/2006/main" wrap="square" lIns="0" tIns="0" rIns="0" bIns="0" anchor="ctr">
-            <a:noAutofit/>
-          </a:bodyPr>
-          <a:lstStyle xmlns:a="http://schemas.openxmlformats.org/drawingml/2006/main">
-            <a:defPPr algn="l">
-              <a:defRPr sz="2025" b="0">
-                <a:solidFill>
-                  <a:srgbClr val="273F50"/>
-                </a:solidFill>
-                <a:latin typeface="Liberation Sans"/>
-                <a:ea typeface="Liberation Sans"/>
-                <a:cs typeface="Liberation Sans"/>
-              </a:defRPr>
-            </a:defPPr>
-          </a:lstStyle>
-          <a:p xmlns:a="http://schemas.openxmlformats.org/drawingml/2006/main">
-            <a:pPr algn="l">
-              <a:defRPr sz="2025" b="0">
-                <a:solidFill>
-                  <a:srgbClr val="273F50"/>
-                </a:solidFill>
-                <a:latin typeface="Liberation Sans"/>
-                <a:ea typeface="Liberation Sans"/>
-                <a:cs typeface="Liberation Sans"/>
-              </a:defRPr>
-            </a:pPr>
-            <a:r>
-              <a:rPr sz="2025" b="0">
-                <a:solidFill>
-                  <a:srgbClr val="273F50"/>
-                </a:solidFill>
-                <a:latin typeface="Liberation Sans"/>
-                <a:ea typeface="Liberation Sans"/>
-                <a:cs typeface="Liberation Sans"/>
-              </a:rPr>
-              <a:t>Hedef bitiş: 13 Kasım</a:t>
-            </a:r>
-          </a:p>
-          <a:p xmlns:a="http://schemas.openxmlformats.org/drawingml/2006/main">
-            <a:pPr algn="l">
-              <a:defRPr sz="2025" b="0">
-                <a:solidFill>
-                  <a:srgbClr val="273F50"/>
-                </a:solidFill>
-                <a:latin typeface="Liberation Sans"/>
-                <a:ea typeface="Liberation Sans"/>
-                <a:cs typeface="Liberation Sans"/>
-              </a:defRPr>
-            </a:pPr>
-            <a:r>
-              <a:rPr sz="2025" b="0">
-                <a:solidFill>
-                  <a:srgbClr val="273F50"/>
-                </a:solidFill>
-                <a:latin typeface="Liberation Sans"/>
-                <a:ea typeface="Liberation Sans"/>
-                <a:cs typeface="Liberation Sans"/>
-              </a:rPr>
-              <a:t>Güncel tahmin: 20 Kasım</a:t>
-            </a:r>
-          </a:p>
-          <a:p xmlns:a="http://schemas.openxmlformats.org/drawingml/2006/main">
-            <a:pPr algn="l">
-              <a:defRPr sz="2025" b="0">
-                <a:solidFill>
-                  <a:srgbClr val="273F50"/>
-                </a:solidFill>
-                <a:latin typeface="Liberation Sans"/>
-                <a:ea typeface="Liberation Sans"/>
-                <a:cs typeface="Liberation Sans"/>
-              </a:defRPr>
-            </a:pPr>
-            <a:r>
-              <a:rPr sz="2025" b="0">
-                <a:solidFill>
-                  <a:srgbClr val="273F50"/>
-                </a:solidFill>
-                <a:latin typeface="Liberation Sans"/>
-                <a:ea typeface="Liberation Sans"/>
-                <a:cs typeface="Liberation Sans"/>
-              </a:rPr>
-              <a:t>Takvim sapması: +7 gün</a:t>
-            </a:r>
-          </a:p>
-        </p:txBody>
-      </p:sp>
-      <p:sp>
-        <p:nvSpPr>
-          <p:cNvPr id="13" name="stage">
-            <a:extLst xmlns:a="http://schemas.openxmlformats.org/drawingml/2006/main">
-              <a:ext uri="{FF2B5EF4-FFF2-40B4-BE49-F238E27FC236}">
-                <a16:creationId xmlns:a16="http://schemas.microsoft.com/office/drawing/2014/main" id="{954CF565-C5FB-42FC-BC0C-B30BF6ECFEEF}"/>
-              </a:ext>
-            </a:extLst>
-          </p:cNvPr>
-          <p:cNvSpPr>
-            <a:spLocks xmlns:a="http://schemas.openxmlformats.org/drawingml/2006/main" noGrp="1"/>
-          </p:cNvSpPr>
-          <p:nvPr/>
-        </p:nvSpPr>
-        <p:spPr>
-          <a:xfrm xmlns:a="http://schemas.openxmlformats.org/drawingml/2006/main">
-            <a:off x="10382250" y="7629525"/>
-            <a:ext cx="4400550" cy="476250"/>
-          </a:xfrm>
-          <a:prstGeom xmlns:a="http://schemas.openxmlformats.org/drawingml/2006/main" prst="rect">
-            <a:avLst/>
-          </a:prstGeom>
-          <a:noFill xmlns:a="http://schemas.openxmlformats.org/drawingml/2006/main"/>
-          <a:ln xmlns:a="http://schemas.openxmlformats.org/drawingml/2006/main" w="0">
-            <a:noFill/>
-            <a:prstDash val="solid"/>
-          </a:ln>
-        </p:spPr>
-        <p:txBody>
-          <a:bodyPr xmlns:a="http://schemas.openxmlformats.org/drawingml/2006/main" wrap="square" lIns="0" tIns="0" rIns="0" bIns="0" anchor="ctr">
-            <a:noAutofit/>
-          </a:bodyPr>
-          <a:lstStyle xmlns:a="http://schemas.openxmlformats.org/drawingml/2006/main">
-            <a:defPPr algn="l">
-              <a:defRPr sz="2100" b="1">
-                <a:solidFill>
-                  <a:srgbClr val="008E86"/>
-                </a:solidFill>
-                <a:latin typeface="Liberation Sans"/>
-                <a:ea typeface="Liberation Sans"/>
-                <a:cs typeface="Liberation Sans"/>
-              </a:defRPr>
-            </a:defPPr>
-          </a:lstStyle>
-          <a:p xmlns:a="http://schemas.openxmlformats.org/drawingml/2006/main">
-            <a:pPr algn="l">
-              <a:defRPr sz="2100" b="1">
-                <a:solidFill>
-                  <a:srgbClr val="008E86"/>
-                </a:solidFill>
-                <a:latin typeface="Liberation Sans"/>
-                <a:ea typeface="Liberation Sans"/>
-                <a:cs typeface="Liberation Sans"/>
-              </a:defRPr>
-            </a:pPr>
-            <a:r>
-              <a:rPr sz="2100" b="1">
-                <a:solidFill>
-                  <a:srgbClr val="008E86"/>
-                </a:solidFill>
-                <a:latin typeface="Liberation Sans"/>
-                <a:ea typeface="Liberation Sans"/>
-                <a:cs typeface="Liberation Sans"/>
-              </a:rPr>
-              <a:t>Mevcut aşama: Tedarik</a:t>
-            </a:r>
-          </a:p>
-        </p:txBody>
-      </p:sp>
     </p:spTree>
     <p:extLst>
       <p:ext uri="{BB962C8B-B14F-4D97-AF65-F5344CB8AC3E}">
@@ -6250,6 +6766,7 @@
           </a:lstStyle>
           <a:p xmlns:a="http://schemas.openxmlformats.org/drawingml/2006/main">
             <a:pPr algn="l">
+              <a:buNone/>
               <a:defRPr sz="3300" b="1">
                 <a:solidFill>
                   <a:srgbClr val="14344B"/>
@@ -6268,7 +6785,7 @@
                 <a:ea typeface="Liberation Sans"/>
                 <a:cs typeface="Liberation Sans"/>
               </a:rPr>
-              <a:t>Maliyet, bütçe ve haftalık işler</a:t>
+              <a:t>Projelerimin maliyet, risk ve işleri</a:t>
             </a:r>
           </a:p>
         </p:txBody>
@@ -6290,7 +6807,7 @@
         <p:spPr>
           <a:xfrm xmlns:a="http://schemas.openxmlformats.org/drawingml/2006/main">
             <a:off x="457200" y="847725"/>
-            <a:ext cx="14325600" cy="361950"/>
+            <a:ext cx="12763500" cy="361950"/>
           </a:xfrm>
           <a:prstGeom xmlns:a="http://schemas.openxmlformats.org/drawingml/2006/main" prst="rect">
             <a:avLst/>
@@ -6307,76 +6824,7 @@
           </a:bodyPr>
           <a:lstStyle xmlns:a="http://schemas.openxmlformats.org/drawingml/2006/main">
             <a:defPPr algn="l">
-              <a:defRPr sz="2250" b="1">
-                <a:solidFill>
-                  <a:srgbClr val="008E86"/>
-                </a:solidFill>
-                <a:latin typeface="Liberation Sans"/>
-                <a:ea typeface="Liberation Sans"/>
-                <a:cs typeface="Liberation Sans"/>
-              </a:defRPr>
-            </a:defPPr>
-          </a:lstStyle>
-          <a:p xmlns:a="http://schemas.openxmlformats.org/drawingml/2006/main">
-            <a:pPr algn="l">
-              <a:defRPr sz="2250" b="1">
-                <a:solidFill>
-                  <a:srgbClr val="008E86"/>
-                </a:solidFill>
-                <a:latin typeface="Liberation Sans"/>
-                <a:ea typeface="Liberation Sans"/>
-                <a:cs typeface="Liberation Sans"/>
-              </a:defRPr>
-            </a:pPr>
-            <a:r>
-              <a:rPr sz="2250" b="1">
-                <a:solidFill>
-                  <a:srgbClr val="008E86"/>
-                </a:solidFill>
-                <a:latin typeface="Liberation Sans"/>
-                <a:ea typeface="Liberation Sans"/>
-                <a:cs typeface="Liberation Sans"/>
-              </a:rPr>
-              <a:t>Üretim Hattı Modernizasyonu</a:t>
-            </a:r>
-          </a:p>
-        </p:txBody>
-      </p:sp>
-      <p:sp>
-        <p:nvSpPr>
-          <p:cNvPr id="3" name="report">
-            <a:extLst xmlns:a="http://schemas.openxmlformats.org/drawingml/2006/main">
-              <a:ext uri="{FF2B5EF4-FFF2-40B4-BE49-F238E27FC236}">
-                <a16:creationId xmlns:a16="http://schemas.microsoft.com/office/drawing/2014/main" id="{FBF5B57F-8731-420D-9A71-FAFC8BCCF917}"/>
-              </a:ext>
-            </a:extLst>
-          </p:cNvPr>
-          <p:cNvSpPr>
-            <a:spLocks xmlns:a="http://schemas.openxmlformats.org/drawingml/2006/main" noGrp="1"/>
-          </p:cNvSpPr>
-          <p:nvPr/>
-        </p:nvSpPr>
-        <p:spPr>
-          <a:xfrm xmlns:a="http://schemas.openxmlformats.org/drawingml/2006/main">
-            <a:off x="457200" y="1257300"/>
-            <a:ext cx="12763500" cy="304800"/>
-          </a:xfrm>
-          <a:prstGeom xmlns:a="http://schemas.openxmlformats.org/drawingml/2006/main" prst="rect">
-            <a:avLst/>
-          </a:prstGeom>
-          <a:noFill xmlns:a="http://schemas.openxmlformats.org/drawingml/2006/main"/>
-          <a:ln xmlns:a="http://schemas.openxmlformats.org/drawingml/2006/main" w="0">
-            <a:noFill/>
-            <a:prstDash val="solid"/>
-          </a:ln>
-        </p:spPr>
-        <p:txBody>
-          <a:bodyPr xmlns:a="http://schemas.openxmlformats.org/drawingml/2006/main" wrap="square" lIns="0" tIns="0" rIns="0" bIns="0" anchor="ctr">
-            <a:noAutofit/>
-          </a:bodyPr>
-          <a:lstStyle xmlns:a="http://schemas.openxmlformats.org/drawingml/2006/main">
-            <a:defPPr algn="l">
-              <a:defRPr sz="1650" b="0">
+              <a:defRPr sz="1725" b="0">
                 <a:solidFill>
                   <a:srgbClr val="61778A"/>
                 </a:solidFill>
@@ -6388,7 +6836,8 @@
           </a:lstStyle>
           <a:p xmlns:a="http://schemas.openxmlformats.org/drawingml/2006/main">
             <a:pPr algn="l">
-              <a:defRPr sz="1650" b="0">
+              <a:buNone/>
+              <a:defRPr sz="1725" b="0">
                 <a:solidFill>
                   <a:srgbClr val="61778A"/>
                 </a:solidFill>
@@ -6398,7 +6847,7 @@
               </a:defRPr>
             </a:pPr>
             <a:r>
-              <a:rPr sz="1650" b="0">
+              <a:rPr sz="1725" b="0">
                 <a:solidFill>
                   <a:srgbClr val="61778A"/>
                 </a:solidFill>
@@ -6406,7 +6855,7 @@
                 <a:ea typeface="Liberation Sans"/>
                 <a:cs typeface="Liberation Sans"/>
               </a:rPr>
-              <a:t>Proje yöneticisi: [Ad Soyad]     Rapor: 15 Ekim 2026     Örnek veriler</a:t>
+              <a:t>Proje yöneticisi: [Ad Soyad]     Rapor: 15 Ekim 2026     3 örnek proje</a:t>
             </a:r>
           </a:p>
         </p:txBody>
@@ -6427,8 +6876,8 @@
         </p:nvSpPr>
         <p:spPr>
           <a:xfrm xmlns:a="http://schemas.openxmlformats.org/drawingml/2006/main">
-            <a:off x="13811250" y="1257300"/>
-            <a:ext cx="971550" cy="304800"/>
+            <a:off x="13811250" y="847725"/>
+            <a:ext cx="971550" cy="361950"/>
           </a:xfrm>
           <a:prstGeom xmlns:a="http://schemas.openxmlformats.org/drawingml/2006/main" prst="rect">
             <a:avLst/>
@@ -6457,6 +6906,7 @@
           </a:lstStyle>
           <a:p xmlns:a="http://schemas.openxmlformats.org/drawingml/2006/main">
             <a:pPr algn="r">
+              <a:buNone/>
               <a:defRPr sz="1650" b="0">
                 <a:solidFill>
                   <a:srgbClr val="61778A"/>
@@ -6482,10 +6932,10 @@
       </p:sp>
       <p:sp>
         <p:nvSpPr>
-          <p:cNvPr id="5" name="cost-title">
+          <p:cNvPr id="14" name="cost-heading">
             <a:extLst xmlns:a="http://schemas.openxmlformats.org/drawingml/2006/main">
               <a:ext uri="{FF2B5EF4-FFF2-40B4-BE49-F238E27FC236}">
-                <a16:creationId xmlns:a16="http://schemas.microsoft.com/office/drawing/2014/main" id="{36E5B767-07DC-4C59-9E77-1C5BCE522FF9}"/>
+                <a16:creationId xmlns:a16="http://schemas.microsoft.com/office/drawing/2014/main" id="{EA5002CF-7E6C-4F89-9C7B-82835D79096A}"/>
               </a:ext>
             </a:extLst>
           </p:cNvPr>
@@ -6496,8 +6946,8 @@
         </p:nvSpPr>
         <p:spPr>
           <a:xfrm xmlns:a="http://schemas.openxmlformats.org/drawingml/2006/main">
-            <a:off x="457200" y="1695450"/>
-            <a:ext cx="8572500" cy="323850"/>
+            <a:off x="457200" y="1371600"/>
+            <a:ext cx="9906000" cy="304800"/>
           </a:xfrm>
           <a:prstGeom xmlns:a="http://schemas.openxmlformats.org/drawingml/2006/main" prst="rect">
             <a:avLst/>
@@ -6544,17 +6994,17 @@
                 <a:ea typeface="Liberation Sans"/>
                 <a:cs typeface="Liberation Sans"/>
               </a:rPr>
-              <a:t>Maliyet dökümü (bin TL, KDV hariç)</a:t>
+              <a:t>Maliyet ve bütçe (bin TL, KDV hariç)</a:t>
             </a:r>
           </a:p>
         </p:txBody>
       </p:sp>
       <p:graphicFrame>
         <p:nvGraphicFramePr>
-          <p:cNvPr id="6" name="">
+          <p:cNvPr id="15" name="">
             <a:extLst xmlns:a="http://schemas.openxmlformats.org/drawingml/2006/main">
               <a:ext uri="{FF2B5EF4-FFF2-40B4-BE49-F238E27FC236}">
-                <a16:creationId xmlns:a16="http://schemas.microsoft.com/office/drawing/2014/main" id="{08F6A909-30E5-40B3-9465-12D420AD6138}"/>
+                <a16:creationId xmlns:a16="http://schemas.microsoft.com/office/drawing/2014/main" id="{53D24DC3-6151-48B4-874F-6325BDF599DB}"/>
               </a:ext>
             </a:extLst>
           </p:cNvPr>
@@ -6562,20 +7012,24 @@
           <p:nvPr/>
         </p:nvGraphicFramePr>
         <p:xfrm>
-          <a:off xmlns:a="http://schemas.openxmlformats.org/drawingml/2006/main" x="457200" y="2095500"/>
-          <a:ext xmlns:a="http://schemas.openxmlformats.org/drawingml/2006/main" cx="8572500" cy="2457450"/>
+          <a:off xmlns:a="http://schemas.openxmlformats.org/drawingml/2006/main" x="457200" y="1752600"/>
+          <a:ext xmlns:a="http://schemas.openxmlformats.org/drawingml/2006/main" cx="9906000" cy="2419350"/>
         </p:xfrm>
         <a:graphic xmlns:a="http://schemas.openxmlformats.org/drawingml/2006/main">
           <a:graphicData uri="http://schemas.openxmlformats.org/drawingml/2006/table">
             <a:tbl>
               <a:tblPr firstRow="0" bandRow="0"/>
               <a:tblGrid>
-                <a:gridCol w="3333750"/>
-                <a:gridCol w="1762125"/>
-                <a:gridCol w="1571625"/>
-                <a:gridCol w="1905000"/>
+                <a:gridCol w="2000250"/>
+                <a:gridCol w="1047750"/>
+                <a:gridCol w="1047750"/>
+                <a:gridCol w="1047750"/>
+                <a:gridCol w="1047750"/>
+                <a:gridCol w="1333500"/>
+                <a:gridCol w="1143000"/>
+                <a:gridCol w="1238250"/>
               </a:tblGrid>
-              <a:tr h="476250">
+              <a:tr h="514350">
                 <a:tc>
                   <a:txBody>
                     <a:bodyPr wrap="square" anchor="ctr">
@@ -6585,7 +7039,7 @@
                     <a:p>
                       <a:pPr algn="l"/>
                       <a:r>
-                        <a:rPr sz="1725" b="1">
+                        <a:rPr sz="1650" b="1">
                           <a:solidFill>
                             <a:srgbClr val="FFFFFF"/>
                           </a:solidFill>
@@ -6593,11 +7047,11 @@
                           <a:ea typeface="Liberation Sans"/>
                           <a:cs typeface="Liberation Sans"/>
                         </a:rPr>
-                        <a:t>Kalem</a:t>
-                      </a:r>
-                    </a:p>
-                  </a:txBody>
-                  <a:tcPr marL="114300" marR="95250" marT="66675" marB="66675">
+                        <a:t>Proje</a:t>
+                      </a:r>
+                    </a:p>
+                  </a:txBody>
+                  <a:tcPr marL="76200" marR="76200" marT="19050" marB="19050">
                     <a:solidFill>
                       <a:srgbClr val="14344B"/>
                     </a:solidFill>
@@ -6612,7 +7066,7 @@
                     <a:p>
                       <a:pPr algn="l"/>
                       <a:r>
-                        <a:rPr sz="1725" b="1">
+                        <a:rPr sz="1650" b="1">
                           <a:solidFill>
                             <a:srgbClr val="FFFFFF"/>
                           </a:solidFill>
@@ -6620,11 +7074,25 @@
                           <a:ea typeface="Liberation Sans"/>
                           <a:cs typeface="Liberation Sans"/>
                         </a:rPr>
-                        <a:t>Gerçekleşen</a:t>
-                      </a:r>
-                    </a:p>
-                  </a:txBody>
-                  <a:tcPr marL="114300" marR="95250" marT="66675" marB="66675">
+                        <a:t>Gerçek</a:t>
+                      </a:r>
+                    </a:p>
+                    <a:p>
+                      <a:pPr algn="l"/>
+                      <a:r>
+                        <a:rPr sz="1650" b="1">
+                          <a:solidFill>
+                            <a:srgbClr val="FFFFFF"/>
+                          </a:solidFill>
+                          <a:latin typeface="Liberation Sans"/>
+                          <a:ea typeface="Liberation Sans"/>
+                          <a:cs typeface="Liberation Sans"/>
+                        </a:rPr>
+                        <a:t>efor</a:t>
+                      </a:r>
+                    </a:p>
+                  </a:txBody>
+                  <a:tcPr marL="76200" marR="76200" marT="19050" marB="19050">
                     <a:solidFill>
                       <a:srgbClr val="14344B"/>
                     </a:solidFill>
@@ -6639,7 +7107,7 @@
                     <a:p>
                       <a:pPr algn="l"/>
                       <a:r>
-                        <a:rPr sz="1725" b="1">
+                        <a:rPr sz="1650" b="1">
                           <a:solidFill>
                             <a:srgbClr val="FFFFFF"/>
                           </a:solidFill>
@@ -6647,11 +7115,66 @@
                           <a:ea typeface="Liberation Sans"/>
                           <a:cs typeface="Liberation Sans"/>
                         </a:rPr>
+                        <a:t>Alınan</a:t>
+                      </a:r>
+                    </a:p>
+                    <a:p>
+                      <a:pPr algn="l"/>
+                      <a:r>
+                        <a:rPr sz="1650" b="1">
+                          <a:solidFill>
+                            <a:srgbClr val="FFFFFF"/>
+                          </a:solidFill>
+                          <a:latin typeface="Liberation Sans"/>
+                          <a:ea typeface="Liberation Sans"/>
+                          <a:cs typeface="Liberation Sans"/>
+                        </a:rPr>
+                        <a:t>malz.</a:t>
+                      </a:r>
+                    </a:p>
+                  </a:txBody>
+                  <a:tcPr marL="76200" marR="76200" marT="19050" marB="19050">
+                    <a:solidFill>
+                      <a:srgbClr val="14344B"/>
+                    </a:solidFill>
+                  </a:tcPr>
+                </a:tc>
+                <a:tc>
+                  <a:txBody>
+                    <a:bodyPr wrap="square" anchor="ctr">
+                      <a:noAutofit/>
+                    </a:bodyPr>
+                    <a:lstStyle/>
+                    <a:p>
+                      <a:pPr algn="l"/>
+                      <a:r>
+                        <a:rPr sz="1650" b="1">
+                          <a:solidFill>
+                            <a:srgbClr val="FFFFFF"/>
+                          </a:solidFill>
+                          <a:latin typeface="Liberation Sans"/>
+                          <a:ea typeface="Liberation Sans"/>
+                          <a:cs typeface="Liberation Sans"/>
+                        </a:rPr>
                         <a:t>Kalan</a:t>
                       </a:r>
                     </a:p>
-                  </a:txBody>
-                  <a:tcPr marL="114300" marR="95250" marT="66675" marB="66675">
+                    <a:p>
+                      <a:pPr algn="l"/>
+                      <a:r>
+                        <a:rPr sz="1650" b="1">
+                          <a:solidFill>
+                            <a:srgbClr val="FFFFFF"/>
+                          </a:solidFill>
+                          <a:latin typeface="Liberation Sans"/>
+                          <a:ea typeface="Liberation Sans"/>
+                          <a:cs typeface="Liberation Sans"/>
+                        </a:rPr>
+                        <a:t>efor</a:t>
+                      </a:r>
+                    </a:p>
+                  </a:txBody>
+                  <a:tcPr marL="76200" marR="76200" marT="19050" marB="19050">
                     <a:solidFill>
                       <a:srgbClr val="14344B"/>
                     </a:solidFill>
@@ -6666,7 +7189,7 @@
                     <a:p>
                       <a:pPr algn="l"/>
                       <a:r>
-                        <a:rPr sz="1725" b="1">
+                        <a:rPr sz="1650" b="1">
                           <a:solidFill>
                             <a:srgbClr val="FFFFFF"/>
                           </a:solidFill>
@@ -6674,11 +7197,134 @@
                           <a:ea typeface="Liberation Sans"/>
                           <a:cs typeface="Liberation Sans"/>
                         </a:rPr>
-                        <a:t>Tahmini toplam</a:t>
-                      </a:r>
-                    </a:p>
-                  </a:txBody>
-                  <a:tcPr marL="114300" marR="95250" marT="66675" marB="66675">
+                        <a:t>Alınacak</a:t>
+                      </a:r>
+                    </a:p>
+                    <a:p>
+                      <a:pPr algn="l"/>
+                      <a:r>
+                        <a:rPr sz="1650" b="1">
+                          <a:solidFill>
+                            <a:srgbClr val="FFFFFF"/>
+                          </a:solidFill>
+                          <a:latin typeface="Liberation Sans"/>
+                          <a:ea typeface="Liberation Sans"/>
+                          <a:cs typeface="Liberation Sans"/>
+                        </a:rPr>
+                        <a:t>malz.</a:t>
+                      </a:r>
+                    </a:p>
+                  </a:txBody>
+                  <a:tcPr marL="76200" marR="76200" marT="19050" marB="19050">
+                    <a:solidFill>
+                      <a:srgbClr val="14344B"/>
+                    </a:solidFill>
+                  </a:tcPr>
+                </a:tc>
+                <a:tc>
+                  <a:txBody>
+                    <a:bodyPr wrap="square" anchor="ctr">
+                      <a:noAutofit/>
+                    </a:bodyPr>
+                    <a:lstStyle/>
+                    <a:p>
+                      <a:pPr algn="l"/>
+                      <a:r>
+                        <a:rPr sz="1650" b="1">
+                          <a:solidFill>
+                            <a:srgbClr val="FFFFFF"/>
+                          </a:solidFill>
+                          <a:latin typeface="Liberation Sans"/>
+                          <a:ea typeface="Liberation Sans"/>
+                          <a:cs typeface="Liberation Sans"/>
+                        </a:rPr>
+                        <a:t>Tahmini</a:t>
+                      </a:r>
+                    </a:p>
+                    <a:p>
+                      <a:pPr algn="l"/>
+                      <a:r>
+                        <a:rPr sz="1650" b="1">
+                          <a:solidFill>
+                            <a:srgbClr val="FFFFFF"/>
+                          </a:solidFill>
+                          <a:latin typeface="Liberation Sans"/>
+                          <a:ea typeface="Liberation Sans"/>
+                          <a:cs typeface="Liberation Sans"/>
+                        </a:rPr>
+                        <a:t>toplam</a:t>
+                      </a:r>
+                    </a:p>
+                  </a:txBody>
+                  <a:tcPr marL="76200" marR="76200" marT="19050" marB="19050">
+                    <a:solidFill>
+                      <a:srgbClr val="14344B"/>
+                    </a:solidFill>
+                  </a:tcPr>
+                </a:tc>
+                <a:tc>
+                  <a:txBody>
+                    <a:bodyPr wrap="square" anchor="ctr">
+                      <a:noAutofit/>
+                    </a:bodyPr>
+                    <a:lstStyle/>
+                    <a:p>
+                      <a:pPr algn="l"/>
+                      <a:r>
+                        <a:rPr sz="1650" b="1">
+                          <a:solidFill>
+                            <a:srgbClr val="FFFFFF"/>
+                          </a:solidFill>
+                          <a:latin typeface="Liberation Sans"/>
+                          <a:ea typeface="Liberation Sans"/>
+                          <a:cs typeface="Liberation Sans"/>
+                        </a:rPr>
+                        <a:t>Bütçe</a:t>
+                      </a:r>
+                    </a:p>
+                  </a:txBody>
+                  <a:tcPr marL="76200" marR="76200" marT="19050" marB="19050">
+                    <a:solidFill>
+                      <a:srgbClr val="14344B"/>
+                    </a:solidFill>
+                  </a:tcPr>
+                </a:tc>
+                <a:tc>
+                  <a:txBody>
+                    <a:bodyPr wrap="square" anchor="ctr">
+                      <a:noAutofit/>
+                    </a:bodyPr>
+                    <a:lstStyle/>
+                    <a:p>
+                      <a:pPr algn="l"/>
+                      <a:r>
+                        <a:rPr sz="1650" b="1">
+                          <a:solidFill>
+                            <a:srgbClr val="FFFFFF"/>
+                          </a:solidFill>
+                          <a:latin typeface="Liberation Sans"/>
+                          <a:ea typeface="Liberation Sans"/>
+                          <a:cs typeface="Liberation Sans"/>
+                        </a:rPr>
+                        <a:t>Bütçe</a:t>
+                      </a:r>
+                    </a:p>
+                    <a:p>
+                      <a:pPr algn="l"/>
+                      <a:r>
+                        <a:rPr sz="1650" b="1">
+                          <a:solidFill>
+                            <a:srgbClr val="FFFFFF"/>
+                          </a:solidFill>
+                          <a:latin typeface="Liberation Sans"/>
+                          <a:ea typeface="Liberation Sans"/>
+                          <a:cs typeface="Liberation Sans"/>
+                        </a:rPr>
+                        <a:t>farkı</a:t>
+                      </a:r>
+                    </a:p>
+                  </a:txBody>
+                  <a:tcPr marL="76200" marR="76200" marT="19050" marB="19050">
                     <a:solidFill>
                       <a:srgbClr val="14344B"/>
                     </a:solidFill>
@@ -6695,19 +7341,19 @@
                     <a:p>
                       <a:pPr algn="l"/>
                       <a:r>
-                        <a:rPr sz="1875" b="1">
-                          <a:solidFill>
-                            <a:srgbClr val="273F50"/>
-                          </a:solidFill>
-                          <a:latin typeface="Liberation Sans"/>
-                          <a:ea typeface="Liberation Sans"/>
-                          <a:cs typeface="Liberation Sans"/>
-                        </a:rPr>
-                        <a:t>Efor</a:t>
-                      </a:r>
-                    </a:p>
-                  </a:txBody>
-                  <a:tcPr marL="114300" marR="95250" marT="66675" marB="66675">
+                        <a:rPr sz="1650" b="1">
+                          <a:solidFill>
+                            <a:srgbClr val="273F50"/>
+                          </a:solidFill>
+                          <a:latin typeface="Liberation Sans"/>
+                          <a:ea typeface="Liberation Sans"/>
+                          <a:cs typeface="Liberation Sans"/>
+                        </a:rPr>
+                        <a:t>Üretim Hattı</a:t>
+                      </a:r>
+                    </a:p>
+                  </a:txBody>
+                  <a:tcPr marL="76200" marR="76200" marT="19050" marB="19050">
                     <a:solidFill>
                       <a:srgbClr val="FFFFFF"/>
                     </a:solidFill>
@@ -6722,7 +7368,7 @@
                     <a:p>
                       <a:pPr algn="r"/>
                       <a:r>
-                        <a:rPr sz="1875" b="0">
+                        <a:rPr sz="1800" b="0">
                           <a:solidFill>
                             <a:srgbClr val="273F50"/>
                           </a:solidFill>
@@ -6734,7 +7380,7 @@
                       </a:r>
                     </a:p>
                   </a:txBody>
-                  <a:tcPr marL="114300" marR="95250" marT="66675" marB="66675">
+                  <a:tcPr marL="76200" marR="76200" marT="19050" marB="19050">
                     <a:solidFill>
                       <a:srgbClr val="FFFFFF"/>
                     </a:solidFill>
@@ -6749,7 +7395,34 @@
                     <a:p>
                       <a:pPr algn="r"/>
                       <a:r>
-                        <a:rPr sz="1875" b="0">
+                        <a:rPr sz="1800" b="0">
+                          <a:solidFill>
+                            <a:srgbClr val="273F50"/>
+                          </a:solidFill>
+                          <a:latin typeface="Liberation Sans"/>
+                          <a:ea typeface="Liberation Sans"/>
+                          <a:cs typeface="Liberation Sans"/>
+                        </a:rPr>
+                        <a:t>180</a:t>
+                      </a:r>
+                    </a:p>
+                  </a:txBody>
+                  <a:tcPr marL="76200" marR="76200" marT="19050" marB="19050">
+                    <a:solidFill>
+                      <a:srgbClr val="FFFFFF"/>
+                    </a:solidFill>
+                  </a:tcPr>
+                </a:tc>
+                <a:tc>
+                  <a:txBody>
+                    <a:bodyPr wrap="square" anchor="ctr">
+                      <a:noAutofit/>
+                    </a:bodyPr>
+                    <a:lstStyle/>
+                    <a:p>
+                      <a:pPr algn="r"/>
+                      <a:r>
+                        <a:rPr sz="1800" b="0">
                           <a:solidFill>
                             <a:srgbClr val="273F50"/>
                           </a:solidFill>
@@ -6761,7 +7434,7 @@
                       </a:r>
                     </a:p>
                   </a:txBody>
-                  <a:tcPr marL="114300" marR="95250" marT="66675" marB="66675">
+                  <a:tcPr marL="76200" marR="76200" marT="19050" marB="19050">
                     <a:solidFill>
                       <a:srgbClr val="FFFFFF"/>
                     </a:solidFill>
@@ -6776,19 +7449,100 @@
                     <a:p>
                       <a:pPr algn="r"/>
                       <a:r>
-                        <a:rPr sz="1875" b="0">
-                          <a:solidFill>
-                            <a:srgbClr val="273F50"/>
-                          </a:solidFill>
-                          <a:latin typeface="Liberation Sans"/>
-                          <a:ea typeface="Liberation Sans"/>
-                          <a:cs typeface="Liberation Sans"/>
-                        </a:rPr>
-                        <a:t>600</a:t>
-                      </a:r>
-                    </a:p>
-                  </a:txBody>
-                  <a:tcPr marL="114300" marR="95250" marT="66675" marB="66675">
+                        <a:rPr sz="1800" b="0">
+                          <a:solidFill>
+                            <a:srgbClr val="273F50"/>
+                          </a:solidFill>
+                          <a:latin typeface="Liberation Sans"/>
+                          <a:ea typeface="Liberation Sans"/>
+                          <a:cs typeface="Liberation Sans"/>
+                        </a:rPr>
+                        <a:t>320</a:t>
+                      </a:r>
+                    </a:p>
+                  </a:txBody>
+                  <a:tcPr marL="76200" marR="76200" marT="19050" marB="19050">
+                    <a:solidFill>
+                      <a:srgbClr val="FFFFFF"/>
+                    </a:solidFill>
+                  </a:tcPr>
+                </a:tc>
+                <a:tc>
+                  <a:txBody>
+                    <a:bodyPr wrap="square" anchor="ctr">
+                      <a:noAutofit/>
+                    </a:bodyPr>
+                    <a:lstStyle/>
+                    <a:p>
+                      <a:pPr algn="r"/>
+                      <a:r>
+                        <a:rPr sz="1800" b="0">
+                          <a:solidFill>
+                            <a:srgbClr val="273F50"/>
+                          </a:solidFill>
+                          <a:latin typeface="Liberation Sans"/>
+                          <a:ea typeface="Liberation Sans"/>
+                          <a:cs typeface="Liberation Sans"/>
+                        </a:rPr>
+                        <a:t>1100</a:t>
+                      </a:r>
+                    </a:p>
+                  </a:txBody>
+                  <a:tcPr marL="76200" marR="76200" marT="19050" marB="19050">
+                    <a:solidFill>
+                      <a:srgbClr val="FFFFFF"/>
+                    </a:solidFill>
+                  </a:tcPr>
+                </a:tc>
+                <a:tc>
+                  <a:txBody>
+                    <a:bodyPr wrap="square" anchor="ctr">
+                      <a:noAutofit/>
+                    </a:bodyPr>
+                    <a:lstStyle/>
+                    <a:p>
+                      <a:pPr algn="r"/>
+                      <a:r>
+                        <a:rPr sz="1800" b="0">
+                          <a:solidFill>
+                            <a:srgbClr val="273F50"/>
+                          </a:solidFill>
+                          <a:latin typeface="Liberation Sans"/>
+                          <a:ea typeface="Liberation Sans"/>
+                          <a:cs typeface="Liberation Sans"/>
+                        </a:rPr>
+                        <a:t>1200</a:t>
+                      </a:r>
+                    </a:p>
+                  </a:txBody>
+                  <a:tcPr marL="76200" marR="76200" marT="19050" marB="19050">
+                    <a:solidFill>
+                      <a:srgbClr val="FFFFFF"/>
+                    </a:solidFill>
+                  </a:tcPr>
+                </a:tc>
+                <a:tc>
+                  <a:txBody>
+                    <a:bodyPr wrap="square" anchor="ctr">
+                      <a:noAutofit/>
+                    </a:bodyPr>
+                    <a:lstStyle/>
+                    <a:p>
+                      <a:pPr algn="r"/>
+                      <a:r>
+                        <a:rPr sz="1800" b="0">
+                          <a:solidFill>
+                            <a:srgbClr val="273F50"/>
+                          </a:solidFill>
+                          <a:latin typeface="Liberation Sans"/>
+                          <a:ea typeface="Liberation Sans"/>
+                          <a:cs typeface="Liberation Sans"/>
+                        </a:rPr>
+                        <a:t>100</a:t>
+                      </a:r>
+                    </a:p>
+                  </a:txBody>
+                  <a:tcPr marL="76200" marR="76200" marT="19050" marB="19050">
                     <a:solidFill>
                       <a:srgbClr val="FFFFFF"/>
                     </a:solidFill>
@@ -6805,19 +7559,19 @@
                     <a:p>
                       <a:pPr algn="l"/>
                       <a:r>
-                        <a:rPr sz="1875" b="1">
-                          <a:solidFill>
-                            <a:srgbClr val="273F50"/>
-                          </a:solidFill>
-                          <a:latin typeface="Liberation Sans"/>
-                          <a:ea typeface="Liberation Sans"/>
-                          <a:cs typeface="Liberation Sans"/>
-                        </a:rPr>
-                        <a:t>Malzeme / alınan</a:t>
-                      </a:r>
-                    </a:p>
-                  </a:txBody>
-                  <a:tcPr marL="114300" marR="95250" marT="66675" marB="66675">
+                        <a:rPr sz="1650" b="1">
+                          <a:solidFill>
+                            <a:srgbClr val="273F50"/>
+                          </a:solidFill>
+                          <a:latin typeface="Liberation Sans"/>
+                          <a:ea typeface="Liberation Sans"/>
+                          <a:cs typeface="Liberation Sans"/>
+                        </a:rPr>
+                        <a:t>Müşteri Portalı</a:t>
+                      </a:r>
+                    </a:p>
+                  </a:txBody>
+                  <a:tcPr marL="76200" marR="76200" marT="19050" marB="19050">
                     <a:solidFill>
                       <a:srgbClr val="F1F6FA"/>
                     </a:solidFill>
@@ -6832,19 +7586,19 @@
                     <a:p>
                       <a:pPr algn="r"/>
                       <a:r>
-                        <a:rPr sz="1875" b="0">
-                          <a:solidFill>
-                            <a:srgbClr val="273F50"/>
-                          </a:solidFill>
-                          <a:latin typeface="Liberation Sans"/>
-                          <a:ea typeface="Liberation Sans"/>
-                          <a:cs typeface="Liberation Sans"/>
-                        </a:rPr>
-                        <a:t>180</a:t>
-                      </a:r>
-                    </a:p>
-                  </a:txBody>
-                  <a:tcPr marL="114300" marR="95250" marT="66675" marB="66675">
+                        <a:rPr sz="1800" b="0">
+                          <a:solidFill>
+                            <a:srgbClr val="273F50"/>
+                          </a:solidFill>
+                          <a:latin typeface="Liberation Sans"/>
+                          <a:ea typeface="Liberation Sans"/>
+                          <a:cs typeface="Liberation Sans"/>
+                        </a:rPr>
+                        <a:t>220</a:t>
+                      </a:r>
+                    </a:p>
+                  </a:txBody>
+                  <a:tcPr marL="76200" marR="76200" marT="19050" marB="19050">
                     <a:solidFill>
                       <a:srgbClr val="F1F6FA"/>
                     </a:solidFill>
@@ -6859,19 +7613,19 @@
                     <a:p>
                       <a:pPr algn="r"/>
                       <a:r>
-                        <a:rPr sz="1875" b="0">
-                          <a:solidFill>
-                            <a:srgbClr val="273F50"/>
-                          </a:solidFill>
-                          <a:latin typeface="Liberation Sans"/>
-                          <a:ea typeface="Liberation Sans"/>
-                          <a:cs typeface="Liberation Sans"/>
-                        </a:rPr>
-                        <a:t>0</a:t>
-                      </a:r>
-                    </a:p>
-                  </a:txBody>
-                  <a:tcPr marL="114300" marR="95250" marT="66675" marB="66675">
+                        <a:rPr sz="1800" b="0">
+                          <a:solidFill>
+                            <a:srgbClr val="273F50"/>
+                          </a:solidFill>
+                          <a:latin typeface="Liberation Sans"/>
+                          <a:ea typeface="Liberation Sans"/>
+                          <a:cs typeface="Liberation Sans"/>
+                        </a:rPr>
+                        <a:t>60</a:t>
+                      </a:r>
+                    </a:p>
+                  </a:txBody>
+                  <a:tcPr marL="76200" marR="76200" marT="19050" marB="19050">
                     <a:solidFill>
                       <a:srgbClr val="F1F6FA"/>
                     </a:solidFill>
@@ -6886,21 +7640,129 @@
                     <a:p>
                       <a:pPr algn="r"/>
                       <a:r>
-                        <a:rPr sz="1875" b="0">
-                          <a:solidFill>
-                            <a:srgbClr val="273F50"/>
-                          </a:solidFill>
-                          <a:latin typeface="Liberation Sans"/>
-                          <a:ea typeface="Liberation Sans"/>
-                          <a:cs typeface="Liberation Sans"/>
-                        </a:rPr>
-                        <a:t>180</a:t>
-                      </a:r>
-                    </a:p>
-                  </a:txBody>
-                  <a:tcPr marL="114300" marR="95250" marT="66675" marB="66675">
+                        <a:rPr sz="1800" b="0">
+                          <a:solidFill>
+                            <a:srgbClr val="273F50"/>
+                          </a:solidFill>
+                          <a:latin typeface="Liberation Sans"/>
+                          <a:ea typeface="Liberation Sans"/>
+                          <a:cs typeface="Liberation Sans"/>
+                        </a:rPr>
+                        <a:t>270</a:t>
+                      </a:r>
+                    </a:p>
+                  </a:txBody>
+                  <a:tcPr marL="76200" marR="76200" marT="19050" marB="19050">
                     <a:solidFill>
                       <a:srgbClr val="F1F6FA"/>
+                    </a:solidFill>
+                  </a:tcPr>
+                </a:tc>
+                <a:tc>
+                  <a:txBody>
+                    <a:bodyPr wrap="square" anchor="ctr">
+                      <a:noAutofit/>
+                    </a:bodyPr>
+                    <a:lstStyle/>
+                    <a:p>
+                      <a:pPr algn="r"/>
+                      <a:r>
+                        <a:rPr sz="1800" b="0">
+                          <a:solidFill>
+                            <a:srgbClr val="273F50"/>
+                          </a:solidFill>
+                          <a:latin typeface="Liberation Sans"/>
+                          <a:ea typeface="Liberation Sans"/>
+                          <a:cs typeface="Liberation Sans"/>
+                        </a:rPr>
+                        <a:t>300</a:t>
+                      </a:r>
+                    </a:p>
+                  </a:txBody>
+                  <a:tcPr marL="76200" marR="76200" marT="19050" marB="19050">
+                    <a:solidFill>
+                      <a:srgbClr val="F1F6FA"/>
+                    </a:solidFill>
+                  </a:tcPr>
+                </a:tc>
+                <a:tc>
+                  <a:txBody>
+                    <a:bodyPr wrap="square" anchor="ctr">
+                      <a:noAutofit/>
+                    </a:bodyPr>
+                    <a:lstStyle/>
+                    <a:p>
+                      <a:pPr algn="r"/>
+                      <a:r>
+                        <a:rPr sz="1800" b="0">
+                          <a:solidFill>
+                            <a:srgbClr val="273F50"/>
+                          </a:solidFill>
+                          <a:latin typeface="Liberation Sans"/>
+                          <a:ea typeface="Liberation Sans"/>
+                          <a:cs typeface="Liberation Sans"/>
+                        </a:rPr>
+                        <a:t>850</a:t>
+                      </a:r>
+                    </a:p>
+                  </a:txBody>
+                  <a:tcPr marL="76200" marR="76200" marT="19050" marB="19050">
+                    <a:solidFill>
+                      <a:srgbClr val="F1F6FA"/>
+                    </a:solidFill>
+                  </a:tcPr>
+                </a:tc>
+                <a:tc>
+                  <a:txBody>
+                    <a:bodyPr wrap="square" anchor="ctr">
+                      <a:noAutofit/>
+                    </a:bodyPr>
+                    <a:lstStyle/>
+                    <a:p>
+                      <a:pPr algn="r"/>
+                      <a:r>
+                        <a:rPr sz="1800" b="0">
+                          <a:solidFill>
+                            <a:srgbClr val="273F50"/>
+                          </a:solidFill>
+                          <a:latin typeface="Liberation Sans"/>
+                          <a:ea typeface="Liberation Sans"/>
+                          <a:cs typeface="Liberation Sans"/>
+                        </a:rPr>
+                        <a:t>800</a:t>
+                      </a:r>
+                    </a:p>
+                  </a:txBody>
+                  <a:tcPr marL="76200" marR="76200" marT="19050" marB="19050">
+                    <a:solidFill>
+                      <a:srgbClr val="F1F6FA"/>
+                    </a:solidFill>
+                  </a:tcPr>
+                </a:tc>
+                <a:tc>
+                  <a:txBody>
+                    <a:bodyPr wrap="square" anchor="ctr">
+                      <a:noAutofit/>
+                    </a:bodyPr>
+                    <a:lstStyle/>
+                    <a:p>
+                      <a:pPr algn="r"/>
+                      <a:r>
+                        <a:rPr sz="1800" b="1">
+                          <a:solidFill>
+                            <a:srgbClr val="B43D3A"/>
+                          </a:solidFill>
+                          <a:latin typeface="Liberation Sans"/>
+                          <a:ea typeface="Liberation Sans"/>
+                          <a:cs typeface="Liberation Sans"/>
+                        </a:rPr>
+                        <a:t>-50</a:t>
+                      </a:r>
+                    </a:p>
+                  </a:txBody>
+                  <a:tcPr marL="76200" marR="76200" marT="19050" marB="19050">
+                    <a:solidFill>
+                      <a:srgbClr val="FBE7E6"/>
                     </a:solidFill>
                   </a:tcPr>
                 </a:tc>
@@ -6915,19 +7777,19 @@
                     <a:p>
                       <a:pPr algn="l"/>
                       <a:r>
-                        <a:rPr sz="1875" b="1">
-                          <a:solidFill>
-                            <a:srgbClr val="273F50"/>
-                          </a:solidFill>
-                          <a:latin typeface="Liberation Sans"/>
-                          <a:ea typeface="Liberation Sans"/>
-                          <a:cs typeface="Liberation Sans"/>
-                        </a:rPr>
-                        <a:t>Alınacak malzeme</a:t>
-                      </a:r>
-                    </a:p>
-                  </a:txBody>
-                  <a:tcPr marL="114300" marR="95250" marT="66675" marB="66675">
+                        <a:rPr sz="1650" b="1">
+                          <a:solidFill>
+                            <a:srgbClr val="273F50"/>
+                          </a:solidFill>
+                          <a:latin typeface="Liberation Sans"/>
+                          <a:ea typeface="Liberation Sans"/>
+                          <a:cs typeface="Liberation Sans"/>
+                        </a:rPr>
+                        <a:t>Depo Otomasyonu</a:t>
+                      </a:r>
+                    </a:p>
+                  </a:txBody>
+                  <a:tcPr marL="76200" marR="76200" marT="19050" marB="19050">
                     <a:solidFill>
                       <a:srgbClr val="FFFFFF"/>
                     </a:solidFill>
@@ -6942,19 +7804,19 @@
                     <a:p>
                       <a:pPr algn="r"/>
                       <a:r>
-                        <a:rPr sz="1875" b="0">
-                          <a:solidFill>
-                            <a:srgbClr val="273F50"/>
-                          </a:solidFill>
-                          <a:latin typeface="Liberation Sans"/>
-                          <a:ea typeface="Liberation Sans"/>
-                          <a:cs typeface="Liberation Sans"/>
-                        </a:rPr>
-                        <a:t>0</a:t>
-                      </a:r>
-                    </a:p>
-                  </a:txBody>
-                  <a:tcPr marL="114300" marR="95250" marT="66675" marB="66675">
+                        <a:rPr sz="1800" b="0">
+                          <a:solidFill>
+                            <a:srgbClr val="273F50"/>
+                          </a:solidFill>
+                          <a:latin typeface="Liberation Sans"/>
+                          <a:ea typeface="Liberation Sans"/>
+                          <a:cs typeface="Liberation Sans"/>
+                        </a:rPr>
+                        <a:t>160</a:t>
+                      </a:r>
+                    </a:p>
+                  </a:txBody>
+                  <a:tcPr marL="76200" marR="76200" marT="19050" marB="19050">
                     <a:solidFill>
                       <a:srgbClr val="FFFFFF"/>
                     </a:solidFill>
@@ -6969,19 +7831,19 @@
                     <a:p>
                       <a:pPr algn="r"/>
                       <a:r>
-                        <a:rPr sz="1875" b="0">
-                          <a:solidFill>
-                            <a:srgbClr val="273F50"/>
-                          </a:solidFill>
-                          <a:latin typeface="Liberation Sans"/>
-                          <a:ea typeface="Liberation Sans"/>
-                          <a:cs typeface="Liberation Sans"/>
-                        </a:rPr>
-                        <a:t>320</a:t>
-                      </a:r>
-                    </a:p>
-                  </a:txBody>
-                  <a:tcPr marL="114300" marR="95250" marT="66675" marB="66675">
+                        <a:rPr sz="1800" b="0">
+                          <a:solidFill>
+                            <a:srgbClr val="273F50"/>
+                          </a:solidFill>
+                          <a:latin typeface="Liberation Sans"/>
+                          <a:ea typeface="Liberation Sans"/>
+                          <a:cs typeface="Liberation Sans"/>
+                        </a:rPr>
+                        <a:t>220</a:t>
+                      </a:r>
+                    </a:p>
+                  </a:txBody>
+                  <a:tcPr marL="76200" marR="76200" marT="19050" marB="19050">
                     <a:solidFill>
                       <a:srgbClr val="FFFFFF"/>
                     </a:solidFill>
@@ -6996,26 +7858,134 @@
                     <a:p>
                       <a:pPr algn="r"/>
                       <a:r>
-                        <a:rPr sz="1875" b="0">
-                          <a:solidFill>
-                            <a:srgbClr val="273F50"/>
-                          </a:solidFill>
-                          <a:latin typeface="Liberation Sans"/>
-                          <a:ea typeface="Liberation Sans"/>
-                          <a:cs typeface="Liberation Sans"/>
-                        </a:rPr>
-                        <a:t>320</a:t>
-                      </a:r>
-                    </a:p>
-                  </a:txBody>
-                  <a:tcPr marL="114300" marR="95250" marT="66675" marB="66675">
+                        <a:rPr sz="1800" b="0">
+                          <a:solidFill>
+                            <a:srgbClr val="273F50"/>
+                          </a:solidFill>
+                          <a:latin typeface="Liberation Sans"/>
+                          <a:ea typeface="Liberation Sans"/>
+                          <a:cs typeface="Liberation Sans"/>
+                        </a:rPr>
+                        <a:t>240</a:t>
+                      </a:r>
+                    </a:p>
+                  </a:txBody>
+                  <a:tcPr marL="76200" marR="76200" marT="19050" marB="19050">
                     <a:solidFill>
                       <a:srgbClr val="FFFFFF"/>
                     </a:solidFill>
                   </a:tcPr>
                 </a:tc>
+                <a:tc>
+                  <a:txBody>
+                    <a:bodyPr wrap="square" anchor="ctr">
+                      <a:noAutofit/>
+                    </a:bodyPr>
+                    <a:lstStyle/>
+                    <a:p>
+                      <a:pPr algn="r"/>
+                      <a:r>
+                        <a:rPr sz="1800" b="0">
+                          <a:solidFill>
+                            <a:srgbClr val="273F50"/>
+                          </a:solidFill>
+                          <a:latin typeface="Liberation Sans"/>
+                          <a:ea typeface="Liberation Sans"/>
+                          <a:cs typeface="Liberation Sans"/>
+                        </a:rPr>
+                        <a:t>280</a:t>
+                      </a:r>
+                    </a:p>
+                  </a:txBody>
+                  <a:tcPr marL="76200" marR="76200" marT="19050" marB="19050">
+                    <a:solidFill>
+                      <a:srgbClr val="FFFFFF"/>
+                    </a:solidFill>
+                  </a:tcPr>
+                </a:tc>
+                <a:tc>
+                  <a:txBody>
+                    <a:bodyPr wrap="square" anchor="ctr">
+                      <a:noAutofit/>
+                    </a:bodyPr>
+                    <a:lstStyle/>
+                    <a:p>
+                      <a:pPr algn="r"/>
+                      <a:r>
+                        <a:rPr sz="1800" b="0">
+                          <a:solidFill>
+                            <a:srgbClr val="273F50"/>
+                          </a:solidFill>
+                          <a:latin typeface="Liberation Sans"/>
+                          <a:ea typeface="Liberation Sans"/>
+                          <a:cs typeface="Liberation Sans"/>
+                        </a:rPr>
+                        <a:t>900</a:t>
+                      </a:r>
+                    </a:p>
+                  </a:txBody>
+                  <a:tcPr marL="76200" marR="76200" marT="19050" marB="19050">
+                    <a:solidFill>
+                      <a:srgbClr val="FFFFFF"/>
+                    </a:solidFill>
+                  </a:tcPr>
+                </a:tc>
+                <a:tc>
+                  <a:txBody>
+                    <a:bodyPr wrap="square" anchor="ctr">
+                      <a:noAutofit/>
+                    </a:bodyPr>
+                    <a:lstStyle/>
+                    <a:p>
+                      <a:pPr algn="r"/>
+                      <a:r>
+                        <a:rPr sz="1800" b="0">
+                          <a:solidFill>
+                            <a:srgbClr val="273F50"/>
+                          </a:solidFill>
+                          <a:latin typeface="Liberation Sans"/>
+                          <a:ea typeface="Liberation Sans"/>
+                          <a:cs typeface="Liberation Sans"/>
+                        </a:rPr>
+                        <a:t>950</a:t>
+                      </a:r>
+                    </a:p>
+                  </a:txBody>
+                  <a:tcPr marL="76200" marR="76200" marT="19050" marB="19050">
+                    <a:solidFill>
+                      <a:srgbClr val="FFFFFF"/>
+                    </a:solidFill>
+                  </a:tcPr>
+                </a:tc>
+                <a:tc>
+                  <a:txBody>
+                    <a:bodyPr wrap="square" anchor="ctr">
+                      <a:noAutofit/>
+                    </a:bodyPr>
+                    <a:lstStyle/>
+                    <a:p>
+                      <a:pPr algn="r"/>
+                      <a:r>
+                        <a:rPr sz="1800" b="0">
+                          <a:solidFill>
+                            <a:srgbClr val="273F50"/>
+                          </a:solidFill>
+                          <a:latin typeface="Liberation Sans"/>
+                          <a:ea typeface="Liberation Sans"/>
+                          <a:cs typeface="Liberation Sans"/>
+                        </a:rPr>
+                        <a:t>50</a:t>
+                      </a:r>
+                    </a:p>
+                  </a:txBody>
+                  <a:tcPr marL="76200" marR="76200" marT="19050" marB="19050">
+                    <a:solidFill>
+                      <a:srgbClr val="FFFFFF"/>
+                    </a:solidFill>
+                  </a:tcPr>
+                </a:tc>
               </a:tr>
-              <a:tr h="495300">
+              <a:tr h="419100">
                 <a:tc>
                   <a:txBody>
                     <a:bodyPr wrap="square" anchor="ctr">
@@ -7025,7 +7995,7 @@
                     <a:p>
                       <a:pPr algn="l"/>
                       <a:r>
-                        <a:rPr sz="1875" b="1">
+                        <a:rPr sz="1800" b="1">
                           <a:solidFill>
                             <a:srgbClr val="273F50"/>
                           </a:solidFill>
@@ -7037,7 +8007,7 @@
                       </a:r>
                     </a:p>
                   </a:txBody>
-                  <a:tcPr marL="114300" marR="95250" marT="66675" marB="66675">
+                  <a:tcPr marL="76200" marR="76200" marT="19050" marB="19050">
                     <a:solidFill>
                       <a:srgbClr val="DDF2EE"/>
                     </a:solidFill>
@@ -7052,19 +8022,19 @@
                     <a:p>
                       <a:pPr algn="r"/>
                       <a:r>
-                        <a:rPr sz="1875" b="1">
-                          <a:solidFill>
-                            <a:srgbClr val="273F50"/>
-                          </a:solidFill>
-                          <a:latin typeface="Liberation Sans"/>
-                          <a:ea typeface="Liberation Sans"/>
-                          <a:cs typeface="Liberation Sans"/>
-                        </a:rPr>
-                        <a:t>420</a:t>
-                      </a:r>
-                    </a:p>
-                  </a:txBody>
-                  <a:tcPr marL="114300" marR="95250" marT="66675" marB="66675">
+                        <a:rPr sz="1800" b="1">
+                          <a:solidFill>
+                            <a:srgbClr val="273F50"/>
+                          </a:solidFill>
+                          <a:latin typeface="Liberation Sans"/>
+                          <a:ea typeface="Liberation Sans"/>
+                          <a:cs typeface="Liberation Sans"/>
+                        </a:rPr>
+                        <a:t>620</a:t>
+                      </a:r>
+                    </a:p>
+                  </a:txBody>
+                  <a:tcPr marL="76200" marR="76200" marT="19050" marB="19050">
                     <a:solidFill>
                       <a:srgbClr val="DDF2EE"/>
                     </a:solidFill>
@@ -7079,19 +8049,19 @@
                     <a:p>
                       <a:pPr algn="r"/>
                       <a:r>
-                        <a:rPr sz="1875" b="1">
-                          <a:solidFill>
-                            <a:srgbClr val="273F50"/>
-                          </a:solidFill>
-                          <a:latin typeface="Liberation Sans"/>
-                          <a:ea typeface="Liberation Sans"/>
-                          <a:cs typeface="Liberation Sans"/>
-                        </a:rPr>
-                        <a:t>680</a:t>
-                      </a:r>
-                    </a:p>
-                  </a:txBody>
-                  <a:tcPr marL="114300" marR="95250" marT="66675" marB="66675">
+                        <a:rPr sz="1800" b="1">
+                          <a:solidFill>
+                            <a:srgbClr val="273F50"/>
+                          </a:solidFill>
+                          <a:latin typeface="Liberation Sans"/>
+                          <a:ea typeface="Liberation Sans"/>
+                          <a:cs typeface="Liberation Sans"/>
+                        </a:rPr>
+                        <a:t>460</a:t>
+                      </a:r>
+                    </a:p>
+                  </a:txBody>
+                  <a:tcPr marL="76200" marR="76200" marT="19050" marB="19050">
                     <a:solidFill>
                       <a:srgbClr val="DDF2EE"/>
                     </a:solidFill>
@@ -7106,19 +8076,127 @@
                     <a:p>
                       <a:pPr algn="r"/>
                       <a:r>
-                        <a:rPr sz="1875" b="1">
-                          <a:solidFill>
-                            <a:srgbClr val="273F50"/>
-                          </a:solidFill>
-                          <a:latin typeface="Liberation Sans"/>
-                          <a:ea typeface="Liberation Sans"/>
-                          <a:cs typeface="Liberation Sans"/>
-                        </a:rPr>
-                        <a:t>1100</a:t>
-                      </a:r>
-                    </a:p>
-                  </a:txBody>
-                  <a:tcPr marL="114300" marR="95250" marT="66675" marB="66675">
+                        <a:rPr sz="1800" b="1">
+                          <a:solidFill>
+                            <a:srgbClr val="273F50"/>
+                          </a:solidFill>
+                          <a:latin typeface="Liberation Sans"/>
+                          <a:ea typeface="Liberation Sans"/>
+                          <a:cs typeface="Liberation Sans"/>
+                        </a:rPr>
+                        <a:t>870</a:t>
+                      </a:r>
+                    </a:p>
+                  </a:txBody>
+                  <a:tcPr marL="76200" marR="76200" marT="19050" marB="19050">
+                    <a:solidFill>
+                      <a:srgbClr val="DDF2EE"/>
+                    </a:solidFill>
+                  </a:tcPr>
+                </a:tc>
+                <a:tc>
+                  <a:txBody>
+                    <a:bodyPr wrap="square" anchor="ctr">
+                      <a:noAutofit/>
+                    </a:bodyPr>
+                    <a:lstStyle/>
+                    <a:p>
+                      <a:pPr algn="r"/>
+                      <a:r>
+                        <a:rPr sz="1800" b="1">
+                          <a:solidFill>
+                            <a:srgbClr val="273F50"/>
+                          </a:solidFill>
+                          <a:latin typeface="Liberation Sans"/>
+                          <a:ea typeface="Liberation Sans"/>
+                          <a:cs typeface="Liberation Sans"/>
+                        </a:rPr>
+                        <a:t>900</a:t>
+                      </a:r>
+                    </a:p>
+                  </a:txBody>
+                  <a:tcPr marL="76200" marR="76200" marT="19050" marB="19050">
+                    <a:solidFill>
+                      <a:srgbClr val="DDF2EE"/>
+                    </a:solidFill>
+                  </a:tcPr>
+                </a:tc>
+                <a:tc>
+                  <a:txBody>
+                    <a:bodyPr wrap="square" anchor="ctr">
+                      <a:noAutofit/>
+                    </a:bodyPr>
+                    <a:lstStyle/>
+                    <a:p>
+                      <a:pPr algn="r"/>
+                      <a:r>
+                        <a:rPr sz="1800" b="1">
+                          <a:solidFill>
+                            <a:srgbClr val="273F50"/>
+                          </a:solidFill>
+                          <a:latin typeface="Liberation Sans"/>
+                          <a:ea typeface="Liberation Sans"/>
+                          <a:cs typeface="Liberation Sans"/>
+                        </a:rPr>
+                        <a:t>2850</a:t>
+                      </a:r>
+                    </a:p>
+                  </a:txBody>
+                  <a:tcPr marL="76200" marR="76200" marT="19050" marB="19050">
+                    <a:solidFill>
+                      <a:srgbClr val="DDF2EE"/>
+                    </a:solidFill>
+                  </a:tcPr>
+                </a:tc>
+                <a:tc>
+                  <a:txBody>
+                    <a:bodyPr wrap="square" anchor="ctr">
+                      <a:noAutofit/>
+                    </a:bodyPr>
+                    <a:lstStyle/>
+                    <a:p>
+                      <a:pPr algn="r"/>
+                      <a:r>
+                        <a:rPr sz="1800" b="1">
+                          <a:solidFill>
+                            <a:srgbClr val="273F50"/>
+                          </a:solidFill>
+                          <a:latin typeface="Liberation Sans"/>
+                          <a:ea typeface="Liberation Sans"/>
+                          <a:cs typeface="Liberation Sans"/>
+                        </a:rPr>
+                        <a:t>2950</a:t>
+                      </a:r>
+                    </a:p>
+                  </a:txBody>
+                  <a:tcPr marL="76200" marR="76200" marT="19050" marB="19050">
+                    <a:solidFill>
+                      <a:srgbClr val="DDF2EE"/>
+                    </a:solidFill>
+                  </a:tcPr>
+                </a:tc>
+                <a:tc>
+                  <a:txBody>
+                    <a:bodyPr wrap="square" anchor="ctr">
+                      <a:noAutofit/>
+                    </a:bodyPr>
+                    <a:lstStyle/>
+                    <a:p>
+                      <a:pPr algn="r"/>
+                      <a:r>
+                        <a:rPr sz="1800" b="1">
+                          <a:solidFill>
+                            <a:srgbClr val="273F50"/>
+                          </a:solidFill>
+                          <a:latin typeface="Liberation Sans"/>
+                          <a:ea typeface="Liberation Sans"/>
+                          <a:cs typeface="Liberation Sans"/>
+                        </a:rPr>
+                        <a:t>100</a:t>
+                      </a:r>
+                    </a:p>
+                  </a:txBody>
+                  <a:tcPr marL="76200" marR="76200" marT="19050" marB="19050">
                     <a:solidFill>
                       <a:srgbClr val="DDF2EE"/>
                     </a:solidFill>
@@ -7131,10 +8209,10 @@
       </p:graphicFrame>
       <p:graphicFrame>
         <p:nvGraphicFramePr>
-          <p:cNvPr id="7" name="Chart">
+          <p:cNvPr id="16" name="Chart">
             <a:extLst xmlns:a="http://schemas.openxmlformats.org/drawingml/2006/main">
               <a:ext uri="{FF2B5EF4-FFF2-40B4-BE49-F238E27FC236}">
-                <a16:creationId xmlns:a16="http://schemas.microsoft.com/office/drawing/2014/main" id="{ECAEB407-6B47-4B9E-B400-46D465772A0D}"/>
+                <a16:creationId xmlns:a16="http://schemas.microsoft.com/office/drawing/2014/main" id="{B7AC3229-CF53-4769-8671-F04192C21EEC}"/>
               </a:ext>
             </a:extLst>
           </p:cNvPr>
@@ -7142,21 +8220,21 @@
           <p:nvPr/>
         </p:nvGraphicFramePr>
         <p:xfrm>
-          <a:off xmlns:a="http://schemas.openxmlformats.org/drawingml/2006/main" x="9620250" y="1695450"/>
-          <a:ext xmlns:a="http://schemas.openxmlformats.org/drawingml/2006/main" cx="5162550" cy="2876550"/>
+          <a:off xmlns:a="http://schemas.openxmlformats.org/drawingml/2006/main" x="10763250" y="1371600"/>
+          <a:ext xmlns:a="http://schemas.openxmlformats.org/drawingml/2006/main" cx="4019550" cy="2819400"/>
         </p:xfrm>
         <a:graphic xmlns:a="http://schemas.openxmlformats.org/drawingml/2006/main">
           <a:graphicData uri="http://schemas.openxmlformats.org/drawingml/2006/chart">
-            <c:chart xmlns:r="http://schemas.openxmlformats.org/officeDocument/2006/relationships" xmlns:c="http://schemas.openxmlformats.org/drawingml/2006/chart" r:id="Ra7eb649ecdfd4837"/>
+            <c:chart xmlns:r="http://schemas.openxmlformats.org/officeDocument/2006/relationships" xmlns:c="http://schemas.openxmlformats.org/drawingml/2006/chart" r:id="Rc77d35e1849b4420"/>
           </a:graphicData>
         </a:graphic>
       </p:graphicFrame>
       <p:sp>
         <p:nvSpPr>
-          <p:cNvPr id="8" name="budget-summary">
+          <p:cNvPr id="17" name="budget-attention">
             <a:extLst xmlns:a="http://schemas.openxmlformats.org/drawingml/2006/main">
               <a:ext uri="{FF2B5EF4-FFF2-40B4-BE49-F238E27FC236}">
-                <a16:creationId xmlns:a16="http://schemas.microsoft.com/office/drawing/2014/main" id="{0816276C-83CB-4E7B-B877-6EEC4C2B6C3F}"/>
+                <a16:creationId xmlns:a16="http://schemas.microsoft.com/office/drawing/2014/main" id="{6DAD7E2D-8A42-4509-A8FC-B800BE6F387E}"/>
               </a:ext>
             </a:extLst>
           </p:cNvPr>
@@ -7167,8 +8245,8 @@
         </p:nvSpPr>
         <p:spPr>
           <a:xfrm xmlns:a="http://schemas.openxmlformats.org/drawingml/2006/main">
-            <a:off x="457200" y="4752975"/>
-            <a:ext cx="14325600" cy="447675"/>
+            <a:off x="457200" y="4286250"/>
+            <a:ext cx="14325600" cy="323850"/>
           </a:xfrm>
           <a:prstGeom xmlns:a="http://schemas.openxmlformats.org/drawingml/2006/main" prst="rect">
             <a:avLst/>
@@ -7185,9 +8263,9 @@
           </a:bodyPr>
           <a:lstStyle xmlns:a="http://schemas.openxmlformats.org/drawingml/2006/main">
             <a:defPPr algn="l">
-              <a:defRPr sz="2175" b="1">
+              <a:defRPr sz="2025" b="1">
                 <a:solidFill>
-                  <a:srgbClr val="008E86"/>
+                  <a:srgbClr val="D97B0A"/>
                 </a:solidFill>
                 <a:latin typeface="Liberation Sans"/>
                 <a:ea typeface="Liberation Sans"/>
@@ -7197,9 +8275,9 @@
           </a:lstStyle>
           <a:p xmlns:a="http://schemas.openxmlformats.org/drawingml/2006/main">
             <a:pPr algn="l">
-              <a:defRPr sz="2175" b="1">
+              <a:defRPr sz="2025" b="1">
                 <a:solidFill>
-                  <a:srgbClr val="008E86"/>
+                  <a:srgbClr val="D97B0A"/>
                 </a:solidFill>
                 <a:latin typeface="Liberation Sans"/>
                 <a:ea typeface="Liberation Sans"/>
@@ -7207,25 +8285,25 @@
               </a:defRPr>
             </a:pPr>
             <a:r>
-              <a:rPr sz="2175" b="1">
+              <a:rPr sz="2025" b="1">
                 <a:solidFill>
-                  <a:srgbClr val="008E86"/>
+                  <a:srgbClr val="D97B0A"/>
                 </a:solidFill>
                 <a:latin typeface="Liberation Sans"/>
                 <a:ea typeface="Liberation Sans"/>
                 <a:cs typeface="Liberation Sans"/>
               </a:rPr>
-              <a:t>Bütçe: 1.200 bin TL     Tahmini toplam: 1.100 bin TL     Öngörülen bütçe payı: 100 bin TL</a:t>
+              <a:t>Müşteri Portalı: 50 bin TL bütçe aşımı bekleniyor.</a:t>
             </a:r>
           </a:p>
         </p:txBody>
       </p:sp>
       <p:sp>
         <p:nvSpPr>
-          <p:cNvPr id="9" name="risk-title">
+          <p:cNvPr id="18" name="risk-work-heading">
             <a:extLst xmlns:a="http://schemas.openxmlformats.org/drawingml/2006/main">
               <a:ext uri="{FF2B5EF4-FFF2-40B4-BE49-F238E27FC236}">
-                <a16:creationId xmlns:a16="http://schemas.microsoft.com/office/drawing/2014/main" id="{36AE7728-BCC6-4938-B722-3FF876A205BF}"/>
+                <a16:creationId xmlns:a16="http://schemas.microsoft.com/office/drawing/2014/main" id="{90C697C3-E4A1-4671-B679-118C042750A0}"/>
               </a:ext>
             </a:extLst>
           </p:cNvPr>
@@ -7236,8 +8314,8 @@
         </p:nvSpPr>
         <p:spPr>
           <a:xfrm xmlns:a="http://schemas.openxmlformats.org/drawingml/2006/main">
-            <a:off x="457200" y="5391150"/>
-            <a:ext cx="7620000" cy="323850"/>
+            <a:off x="457200" y="4686300"/>
+            <a:ext cx="14325600" cy="304800"/>
           </a:xfrm>
           <a:prstGeom xmlns:a="http://schemas.openxmlformats.org/drawingml/2006/main" prst="rect">
             <a:avLst/>
@@ -7284,17 +8362,17 @@
                 <a:ea typeface="Liberation Sans"/>
                 <a:cs typeface="Liberation Sans"/>
               </a:rPr>
-              <a:t>Riskler ve önlemler</a:t>
+              <a:t>Riskler, yapılanlar ve sıradaki işler</a:t>
             </a:r>
           </a:p>
         </p:txBody>
       </p:sp>
       <p:graphicFrame>
         <p:nvGraphicFramePr>
-          <p:cNvPr id="10" name="">
+          <p:cNvPr id="19" name="">
             <a:extLst xmlns:a="http://schemas.openxmlformats.org/drawingml/2006/main">
               <a:ext uri="{FF2B5EF4-FFF2-40B4-BE49-F238E27FC236}">
-                <a16:creationId xmlns:a16="http://schemas.microsoft.com/office/drawing/2014/main" id="{967736CE-5BEC-43CA-A5AC-D272F425AFC1}"/>
+                <a16:creationId xmlns:a16="http://schemas.microsoft.com/office/drawing/2014/main" id="{22EDBDEF-8F89-4B73-8474-B1B580BAD769}"/>
               </a:ext>
             </a:extLst>
           </p:cNvPr>
@@ -7302,18 +8380,20 @@
           <p:nvPr/>
         </p:nvGraphicFramePr>
         <p:xfrm>
-          <a:off xmlns:a="http://schemas.openxmlformats.org/drawingml/2006/main" x="457200" y="5810250"/>
-          <a:ext xmlns:a="http://schemas.openxmlformats.org/drawingml/2006/main" cx="7620000" cy="2400300"/>
+          <a:off xmlns:a="http://schemas.openxmlformats.org/drawingml/2006/main" x="457200" y="5086350"/>
+          <a:ext xmlns:a="http://schemas.openxmlformats.org/drawingml/2006/main" cx="14325600" cy="3314700"/>
         </p:xfrm>
         <a:graphic xmlns:a="http://schemas.openxmlformats.org/drawingml/2006/main">
           <a:graphicData uri="http://schemas.openxmlformats.org/drawingml/2006/table">
             <a:tbl>
               <a:tblPr firstRow="0" bandRow="0"/>
               <a:tblGrid>
-                <a:gridCol w="2476500"/>
-                <a:gridCol w="5143500"/>
+                <a:gridCol w="2000250"/>
+                <a:gridCol w="4333875"/>
+                <a:gridCol w="3333750"/>
+                <a:gridCol w="4657725"/>
               </a:tblGrid>
-              <a:tr h="419100">
+              <a:tr h="457200">
                 <a:tc>
                   <a:txBody>
                     <a:bodyPr wrap="square" anchor="ctr">
@@ -7323,7 +8403,7 @@
                     <a:p>
                       <a:pPr algn="l"/>
                       <a:r>
-                        <a:rPr sz="1725" b="1">
+                        <a:rPr sz="1650" b="1">
                           <a:solidFill>
                             <a:srgbClr val="FFFFFF"/>
                           </a:solidFill>
@@ -7331,11 +8411,11 @@
                           <a:ea typeface="Liberation Sans"/>
                           <a:cs typeface="Liberation Sans"/>
                         </a:rPr>
-                        <a:t>Risk / seviye / etki</a:t>
-                      </a:r>
-                    </a:p>
-                  </a:txBody>
-                  <a:tcPr marL="114300" marR="95250" marT="66675" marB="66675">
+                        <a:t>Proje</a:t>
+                      </a:r>
+                    </a:p>
+                  </a:txBody>
+                  <a:tcPr marL="76200" marR="76200" marT="28575" marB="28575">
                     <a:solidFill>
                       <a:srgbClr val="14344B"/>
                     </a:solidFill>
@@ -7350,7 +8430,7 @@
                     <a:p>
                       <a:pPr algn="l"/>
                       <a:r>
-                        <a:rPr sz="1725" b="1">
+                        <a:rPr sz="1650" b="1">
                           <a:solidFill>
                             <a:srgbClr val="FFFFFF"/>
                           </a:solidFill>
@@ -7358,18 +8438,72 @@
                           <a:ea typeface="Liberation Sans"/>
                           <a:cs typeface="Liberation Sans"/>
                         </a:rPr>
-                        <a:t>Önlem / sorumlu / tarih</a:t>
-                      </a:r>
-                    </a:p>
-                  </a:txBody>
-                  <a:tcPr marL="114300" marR="95250" marT="66675" marB="66675">
+                        <a:t>Risk / etki / önlem</a:t>
+                      </a:r>
+                    </a:p>
+                  </a:txBody>
+                  <a:tcPr marL="76200" marR="76200" marT="28575" marB="28575">
                     <a:solidFill>
                       <a:srgbClr val="14344B"/>
                     </a:solidFill>
                   </a:tcPr>
                 </a:tc>
+                <a:tc>
+                  <a:txBody>
+                    <a:bodyPr wrap="square" anchor="ctr">
+                      <a:noAutofit/>
+                    </a:bodyPr>
+                    <a:lstStyle/>
+                    <a:p>
+                      <a:pPr algn="l"/>
+                      <a:r>
+                        <a:rPr sz="1650" b="1">
+                          <a:solidFill>
+                            <a:srgbClr val="FFFFFF"/>
+                          </a:solidFill>
+                          <a:latin typeface="Liberation Sans"/>
+                          <a:ea typeface="Liberation Sans"/>
+                          <a:cs typeface="Liberation Sans"/>
+                        </a:rPr>
+                        <a:t>Yapılanlar</a:t>
+                      </a:r>
+                    </a:p>
+                  </a:txBody>
+                  <a:tcPr marL="76200" marR="76200" marT="28575" marB="28575">
+                    <a:solidFill>
+                      <a:srgbClr val="14344B"/>
+                    </a:solidFill>
+                  </a:tcPr>
+                </a:tc>
+                <a:tc>
+                  <a:txBody>
+                    <a:bodyPr wrap="square" anchor="ctr">
+                      <a:noAutofit/>
+                    </a:bodyPr>
+                    <a:lstStyle/>
+                    <a:p>
+                      <a:pPr algn="l"/>
+                      <a:r>
+                        <a:rPr sz="1650" b="1">
+                          <a:solidFill>
+                            <a:srgbClr val="FFFFFF"/>
+                          </a:solidFill>
+                          <a:latin typeface="Liberation Sans"/>
+                          <a:ea typeface="Liberation Sans"/>
+                          <a:cs typeface="Liberation Sans"/>
+                        </a:rPr>
+                        <a:t>Sıradaki iş / sorumlu / tarih</a:t>
+                      </a:r>
+                    </a:p>
+                  </a:txBody>
+                  <a:tcPr marL="76200" marR="76200" marT="28575" marB="28575">
+                    <a:solidFill>
+                      <a:srgbClr val="14344B"/>
+                    </a:solidFill>
+                  </a:tcPr>
+                </a:tc>
               </a:tr>
-              <a:tr h="990600">
+              <a:tr h="952500">
                 <a:tc>
                   <a:txBody>
                     <a:bodyPr wrap="square" anchor="ctr">
@@ -7379,7 +8513,34 @@
                     <a:p>
                       <a:pPr algn="l"/>
                       <a:r>
-                        <a:rPr sz="1875" b="1">
+                        <a:rPr sz="1650" b="1">
+                          <a:solidFill>
+                            <a:srgbClr val="273F50"/>
+                          </a:solidFill>
+                          <a:latin typeface="Liberation Sans"/>
+                          <a:ea typeface="Liberation Sans"/>
+                          <a:cs typeface="Liberation Sans"/>
+                        </a:rPr>
+                        <a:t>Üretim Hattı</a:t>
+                      </a:r>
+                    </a:p>
+                  </a:txBody>
+                  <a:tcPr marL="76200" marR="76200" marT="28575" marB="28575">
+                    <a:solidFill>
+                      <a:srgbClr val="FFFFFF"/>
+                    </a:solidFill>
+                  </a:tcPr>
+                </a:tc>
+                <a:tc>
+                  <a:txBody>
+                    <a:bodyPr wrap="square" anchor="ctr">
+                      <a:noAutofit/>
+                    </a:bodyPr>
+                    <a:lstStyle/>
+                    <a:p>
+                      <a:pPr algn="l"/>
+                      <a:r>
+                        <a:rPr sz="1725" b="0">
                           <a:solidFill>
                             <a:srgbClr val="B43D3A"/>
                           </a:solidFill>
@@ -7387,13 +8548,13 @@
                           <a:ea typeface="Liberation Sans"/>
                           <a:cs typeface="Liberation Sans"/>
                         </a:rPr>
-                        <a:t>Motor tedariki</a:t>
+                        <a:t>Yüksek: motor teslimi +7 gün.</a:t>
                       </a:r>
                     </a:p>
                     <a:p>
                       <a:pPr algn="l"/>
                       <a:r>
-                        <a:rPr sz="1875" b="1">
+                        <a:rPr sz="1725" b="0">
                           <a:solidFill>
                             <a:srgbClr val="B43D3A"/>
                           </a:solidFill>
@@ -7401,11 +8562,25 @@
                           <a:ea typeface="Liberation Sans"/>
                           <a:cs typeface="Liberation Sans"/>
                         </a:rPr>
-                        <a:t>Yüksek, +7 gün</a:t>
-                      </a:r>
-                    </a:p>
-                  </a:txBody>
-                  <a:tcPr marL="114300" marR="95250" marT="66675" marB="66675">
+                        <a:t>Önlem: alternatif teklif.</a:t>
+                      </a:r>
+                    </a:p>
+                    <a:p>
+                      <a:pPr algn="l"/>
+                      <a:r>
+                        <a:rPr sz="1725" b="0">
+                          <a:solidFill>
+                            <a:srgbClr val="B43D3A"/>
+                          </a:solidFill>
+                          <a:latin typeface="Liberation Sans"/>
+                          <a:ea typeface="Liberation Sans"/>
+                          <a:cs typeface="Liberation Sans"/>
+                        </a:rPr>
+                        <a:t>Satın alma, 16.10</a:t>
+                      </a:r>
+                    </a:p>
+                  </a:txBody>
+                  <a:tcPr marL="76200" marR="76200" marT="28575" marB="28575">
                     <a:solidFill>
                       <a:srgbClr val="FBE7E6"/>
                     </a:solidFill>
@@ -7420,21 +8595,62 @@
                     <a:p>
                       <a:pPr algn="l"/>
                       <a:r>
-                        <a:rPr sz="1875" b="0">
-                          <a:solidFill>
-                            <a:srgbClr val="273F50"/>
-                          </a:solidFill>
-                          <a:latin typeface="Liberation Sans"/>
-                          <a:ea typeface="Liberation Sans"/>
-                          <a:cs typeface="Liberation Sans"/>
-                        </a:rPr>
-                        <a:t>Alternatif teklifi kesinleştir.</a:t>
+                        <a:rPr sz="1725" b="0">
+                          <a:solidFill>
+                            <a:srgbClr val="273F50"/>
+                          </a:solidFill>
+                          <a:latin typeface="Liberation Sans"/>
+                          <a:ea typeface="Liberation Sans"/>
+                          <a:cs typeface="Liberation Sans"/>
+                        </a:rPr>
+                        <a:t>Motor teknik onayı alındı.</a:t>
                       </a:r>
                     </a:p>
                     <a:p>
                       <a:pPr algn="l"/>
                       <a:r>
-                        <a:rPr sz="1875" b="0">
+                        <a:rPr sz="1725" b="0">
+                          <a:solidFill>
+                            <a:srgbClr val="273F50"/>
+                          </a:solidFill>
+                          <a:latin typeface="Liberation Sans"/>
+                          <a:ea typeface="Liberation Sans"/>
+                          <a:cs typeface="Liberation Sans"/>
+                        </a:rPr>
+                        <a:t>14.10, Mühendislik</a:t>
+                      </a:r>
+                    </a:p>
+                  </a:txBody>
+                  <a:tcPr marL="76200" marR="76200" marT="28575" marB="28575">
+                    <a:solidFill>
+                      <a:srgbClr val="FFFFFF"/>
+                    </a:solidFill>
+                  </a:tcPr>
+                </a:tc>
+                <a:tc>
+                  <a:txBody>
+                    <a:bodyPr wrap="square" anchor="ctr">
+                      <a:noAutofit/>
+                    </a:bodyPr>
+                    <a:lstStyle/>
+                    <a:p>
+                      <a:pPr algn="l"/>
+                      <a:r>
+                        <a:rPr sz="1725" b="0">
+                          <a:solidFill>
+                            <a:srgbClr val="273F50"/>
+                          </a:solidFill>
+                          <a:latin typeface="Liberation Sans"/>
+                          <a:ea typeface="Liberation Sans"/>
+                          <a:cs typeface="Liberation Sans"/>
+                        </a:rPr>
+                        <a:t>Motor siparişini kesinleştir.</a:t>
+                      </a:r>
+                    </a:p>
+                    <a:p>
+                      <a:pPr algn="l"/>
+                      <a:r>
+                        <a:rPr sz="1725" b="0">
                           <a:solidFill>
                             <a:srgbClr val="273F50"/>
                           </a:solidFill>
@@ -7446,14 +8662,14 @@
                       </a:r>
                     </a:p>
                   </a:txBody>
-                  <a:tcPr marL="114300" marR="95250" marT="66675" marB="66675">
+                  <a:tcPr marL="76200" marR="76200" marT="28575" marB="28575">
                     <a:solidFill>
                       <a:srgbClr val="FFFFFF"/>
                     </a:solidFill>
                   </a:tcPr>
                 </a:tc>
               </a:tr>
-              <a:tr h="990600">
+              <a:tr h="952500">
                 <a:tc>
                   <a:txBody>
                     <a:bodyPr wrap="square" anchor="ctr">
@@ -7463,7 +8679,34 @@
                     <a:p>
                       <a:pPr algn="l"/>
                       <a:r>
-                        <a:rPr sz="1875" b="1">
+                        <a:rPr sz="1650" b="1">
+                          <a:solidFill>
+                            <a:srgbClr val="273F50"/>
+                          </a:solidFill>
+                          <a:latin typeface="Liberation Sans"/>
+                          <a:ea typeface="Liberation Sans"/>
+                          <a:cs typeface="Liberation Sans"/>
+                        </a:rPr>
+                        <a:t>Müşteri Portalı</a:t>
+                      </a:r>
+                    </a:p>
+                  </a:txBody>
+                  <a:tcPr marL="76200" marR="76200" marT="28575" marB="28575">
+                    <a:solidFill>
+                      <a:srgbClr val="F1F6FA"/>
+                    </a:solidFill>
+                  </a:tcPr>
+                </a:tc>
+                <a:tc>
+                  <a:txBody>
+                    <a:bodyPr wrap="square" anchor="ctr">
+                      <a:noAutofit/>
+                    </a:bodyPr>
+                    <a:lstStyle/>
+                    <a:p>
+                      <a:pPr algn="l"/>
+                      <a:r>
+                        <a:rPr sz="1725" b="0">
                           <a:solidFill>
                             <a:srgbClr val="D97B0A"/>
                           </a:solidFill>
@@ -7471,13 +8714,13 @@
                           <a:ea typeface="Liberation Sans"/>
                           <a:cs typeface="Liberation Sans"/>
                         </a:rPr>
-                        <a:t>Saha kapasitesi</a:t>
+                        <a:t>Orta: güvenlik testinde +2 gün.</a:t>
                       </a:r>
                     </a:p>
                     <a:p>
                       <a:pPr algn="l"/>
                       <a:r>
-                        <a:rPr sz="1875" b="1">
+                        <a:rPr sz="1725" b="0">
                           <a:solidFill>
                             <a:srgbClr val="D97B0A"/>
                           </a:solidFill>
@@ -7485,11 +8728,25 @@
                           <a:ea typeface="Liberation Sans"/>
                           <a:cs typeface="Liberation Sans"/>
                         </a:rPr>
-                        <a:t>Orta, testte +2 gün</a:t>
-                      </a:r>
-                    </a:p>
-                  </a:txBody>
-                  <a:tcPr marL="114300" marR="95250" marT="66675" marB="66675">
+                        <a:t>Önlem: test ortamını aç.</a:t>
+                      </a:r>
+                    </a:p>
+                    <a:p>
+                      <a:pPr algn="l"/>
+                      <a:r>
+                        <a:rPr sz="1725" b="0">
+                          <a:solidFill>
+                            <a:srgbClr val="D97B0A"/>
+                          </a:solidFill>
+                          <a:latin typeface="Liberation Sans"/>
+                          <a:ea typeface="Liberation Sans"/>
+                          <a:cs typeface="Liberation Sans"/>
+                        </a:rPr>
+                        <a:t>BT, 19.10</a:t>
+                      </a:r>
+                    </a:p>
+                  </a:txBody>
+                  <a:tcPr marL="76200" marR="76200" marT="28575" marB="28575">
                     <a:solidFill>
                       <a:srgbClr val="FFF0D6"/>
                     </a:solidFill>
@@ -7504,137 +8761,81 @@
                     <a:p>
                       <a:pPr algn="l"/>
                       <a:r>
-                        <a:rPr sz="1875" b="0">
-                          <a:solidFill>
-                            <a:srgbClr val="273F50"/>
-                          </a:solidFill>
-                          <a:latin typeface="Liberation Sans"/>
-                          <a:ea typeface="Liberation Sans"/>
-                          <a:cs typeface="Liberation Sans"/>
-                        </a:rPr>
-                        <a:t>2 üretim personelini ayır.</a:t>
+                        <a:rPr sz="1725" b="0">
+                          <a:solidFill>
+                            <a:srgbClr val="273F50"/>
+                          </a:solidFill>
+                          <a:latin typeface="Liberation Sans"/>
+                          <a:ea typeface="Liberation Sans"/>
+                          <a:cs typeface="Liberation Sans"/>
+                        </a:rPr>
+                        <a:t>Arayüz testleri tamamlandı.</a:t>
                       </a:r>
                     </a:p>
                     <a:p>
                       <a:pPr algn="l"/>
                       <a:r>
-                        <a:rPr sz="1875" b="0">
-                          <a:solidFill>
-                            <a:srgbClr val="273F50"/>
-                          </a:solidFill>
-                          <a:latin typeface="Liberation Sans"/>
-                          <a:ea typeface="Liberation Sans"/>
-                          <a:cs typeface="Liberation Sans"/>
-                        </a:rPr>
-                        <a:t>Üretim, 19.10</a:t>
-                      </a:r>
-                    </a:p>
-                  </a:txBody>
-                  <a:tcPr marL="114300" marR="95250" marT="66675" marB="66675">
+                        <a:rPr sz="1725" b="0">
+                          <a:solidFill>
+                            <a:srgbClr val="273F50"/>
+                          </a:solidFill>
+                          <a:latin typeface="Liberation Sans"/>
+                          <a:ea typeface="Liberation Sans"/>
+                          <a:cs typeface="Liberation Sans"/>
+                        </a:rPr>
+                        <a:t>14.10, BT</a:t>
+                      </a:r>
+                    </a:p>
+                  </a:txBody>
+                  <a:tcPr marL="76200" marR="76200" marT="28575" marB="28575">
                     <a:solidFill>
                       <a:srgbClr val="F1F6FA"/>
                     </a:solidFill>
                   </a:tcPr>
                 </a:tc>
+                <a:tc>
+                  <a:txBody>
+                    <a:bodyPr wrap="square" anchor="ctr">
+                      <a:noAutofit/>
+                    </a:bodyPr>
+                    <a:lstStyle/>
+                    <a:p>
+                      <a:pPr algn="l"/>
+                      <a:r>
+                        <a:rPr sz="1725" b="0">
+                          <a:solidFill>
+                            <a:srgbClr val="273F50"/>
+                          </a:solidFill>
+                          <a:latin typeface="Liberation Sans"/>
+                          <a:ea typeface="Liberation Sans"/>
+                          <a:cs typeface="Liberation Sans"/>
+                        </a:rPr>
+                        <a:t>Güvenlik testini başlat.</a:t>
+                      </a:r>
+                    </a:p>
+                    <a:p>
+                      <a:pPr algn="l"/>
+                      <a:r>
+                        <a:rPr sz="1725" b="0">
+                          <a:solidFill>
+                            <a:srgbClr val="273F50"/>
+                          </a:solidFill>
+                          <a:latin typeface="Liberation Sans"/>
+                          <a:ea typeface="Liberation Sans"/>
+                          <a:cs typeface="Liberation Sans"/>
+                        </a:rPr>
+                        <a:t>BT, 19.10</a:t>
+                      </a:r>
+                    </a:p>
+                  </a:txBody>
+                  <a:tcPr marL="76200" marR="76200" marT="28575" marB="28575">
+                    <a:solidFill>
+                      <a:srgbClr val="F1F6FA"/>
+                    </a:solidFill>
+                  </a:tcPr>
+                </a:tc>
               </a:tr>
-            </a:tbl>
-          </a:graphicData>
-        </a:graphic>
-      </p:graphicFrame>
-      <p:sp>
-        <p:nvSpPr>
-          <p:cNvPr id="11" name="work-title">
-            <a:extLst xmlns:a="http://schemas.openxmlformats.org/drawingml/2006/main">
-              <a:ext uri="{FF2B5EF4-FFF2-40B4-BE49-F238E27FC236}">
-                <a16:creationId xmlns:a16="http://schemas.microsoft.com/office/drawing/2014/main" id="{90D7F315-FC63-46B6-976E-D4F02FAFD26F}"/>
-              </a:ext>
-            </a:extLst>
-          </p:cNvPr>
-          <p:cNvSpPr>
-            <a:spLocks xmlns:a="http://schemas.openxmlformats.org/drawingml/2006/main" noGrp="1"/>
-          </p:cNvSpPr>
-          <p:nvPr/>
-        </p:nvSpPr>
-        <p:spPr>
-          <a:xfrm xmlns:a="http://schemas.openxmlformats.org/drawingml/2006/main">
-            <a:off x="8686800" y="5391150"/>
-            <a:ext cx="6096000" cy="323850"/>
-          </a:xfrm>
-          <a:prstGeom xmlns:a="http://schemas.openxmlformats.org/drawingml/2006/main" prst="rect">
-            <a:avLst/>
-          </a:prstGeom>
-          <a:noFill xmlns:a="http://schemas.openxmlformats.org/drawingml/2006/main"/>
-          <a:ln xmlns:a="http://schemas.openxmlformats.org/drawingml/2006/main" w="0">
-            <a:noFill/>
-            <a:prstDash val="solid"/>
-          </a:ln>
-        </p:spPr>
-        <p:txBody>
-          <a:bodyPr xmlns:a="http://schemas.openxmlformats.org/drawingml/2006/main" wrap="square" lIns="0" tIns="0" rIns="0" bIns="0" anchor="ctr">
-            <a:noAutofit/>
-          </a:bodyPr>
-          <a:lstStyle xmlns:a="http://schemas.openxmlformats.org/drawingml/2006/main">
-            <a:defPPr algn="l">
-              <a:defRPr sz="2025" b="1">
-                <a:solidFill>
-                  <a:srgbClr val="14344B"/>
-                </a:solidFill>
-                <a:latin typeface="Liberation Sans"/>
-                <a:ea typeface="Liberation Sans"/>
-                <a:cs typeface="Liberation Sans"/>
-              </a:defRPr>
-            </a:defPPr>
-          </a:lstStyle>
-          <a:p xmlns:a="http://schemas.openxmlformats.org/drawingml/2006/main">
-            <a:pPr algn="l">
-              <a:defRPr sz="2025" b="1">
-                <a:solidFill>
-                  <a:srgbClr val="14344B"/>
-                </a:solidFill>
-                <a:latin typeface="Liberation Sans"/>
-                <a:ea typeface="Liberation Sans"/>
-                <a:cs typeface="Liberation Sans"/>
-              </a:defRPr>
-            </a:pPr>
-            <a:r>
-              <a:rPr sz="2025" b="1">
-                <a:solidFill>
-                  <a:srgbClr val="14344B"/>
-                </a:solidFill>
-                <a:latin typeface="Liberation Sans"/>
-                <a:ea typeface="Liberation Sans"/>
-                <a:cs typeface="Liberation Sans"/>
-              </a:rPr>
-              <a:t>Yapılanlar / yapılacaklar</a:t>
-            </a:r>
-          </a:p>
-        </p:txBody>
-      </p:sp>
-      <p:graphicFrame>
-        <p:nvGraphicFramePr>
-          <p:cNvPr id="12" name="">
-            <a:extLst xmlns:a="http://schemas.openxmlformats.org/drawingml/2006/main">
-              <a:ext uri="{FF2B5EF4-FFF2-40B4-BE49-F238E27FC236}">
-                <a16:creationId xmlns:a16="http://schemas.microsoft.com/office/drawing/2014/main" id="{235FA6A9-9322-47EF-A028-DC249AD908F2}"/>
-              </a:ext>
-            </a:extLst>
-          </p:cNvPr>
-          <p:cNvGraphicFramePr/>
-          <p:nvPr/>
-        </p:nvGraphicFramePr>
-        <p:xfrm>
-          <a:off xmlns:a="http://schemas.openxmlformats.org/drawingml/2006/main" x="8686800" y="5810250"/>
-          <a:ext xmlns:a="http://schemas.openxmlformats.org/drawingml/2006/main" cx="6096000" cy="2419350"/>
-        </p:xfrm>
-        <a:graphic xmlns:a="http://schemas.openxmlformats.org/drawingml/2006/main">
-          <a:graphicData uri="http://schemas.openxmlformats.org/drawingml/2006/table">
-            <a:tbl>
-              <a:tblPr firstRow="0" bandRow="0"/>
-              <a:tblGrid>
-                <a:gridCol w="1428750"/>
-                <a:gridCol w="4667250"/>
-              </a:tblGrid>
-              <a:tr h="419100">
+              <a:tr h="952500">
                 <a:tc>
                   <a:txBody>
                     <a:bodyPr wrap="square" anchor="ctr">
@@ -7644,21 +8845,21 @@
                     <a:p>
                       <a:pPr algn="l"/>
                       <a:r>
-                        <a:rPr sz="1725" b="1">
-                          <a:solidFill>
-                            <a:srgbClr val="FFFFFF"/>
-                          </a:solidFill>
-                          <a:latin typeface="Liberation Sans"/>
-                          <a:ea typeface="Liberation Sans"/>
-                          <a:cs typeface="Liberation Sans"/>
-                        </a:rPr>
-                        <a:t>Durum</a:t>
-                      </a:r>
-                    </a:p>
-                  </a:txBody>
-                  <a:tcPr marL="114300" marR="95250" marT="57150" marB="57150">
-                    <a:solidFill>
-                      <a:srgbClr val="14344B"/>
+                        <a:rPr sz="1650" b="1">
+                          <a:solidFill>
+                            <a:srgbClr val="273F50"/>
+                          </a:solidFill>
+                          <a:latin typeface="Liberation Sans"/>
+                          <a:ea typeface="Liberation Sans"/>
+                          <a:cs typeface="Liberation Sans"/>
+                        </a:rPr>
+                        <a:t>Depo Otomasyonu</a:t>
+                      </a:r>
+                    </a:p>
+                  </a:txBody>
+                  <a:tcPr marL="76200" marR="76200" marT="28575" marB="28575">
+                    <a:solidFill>
+                      <a:srgbClr val="FFFFFF"/>
                     </a:solidFill>
                   </a:tcPr>
                 </a:tc>
@@ -7671,96 +8872,93 @@
                     <a:p>
                       <a:pPr algn="l"/>
                       <a:r>
-                        <a:rPr sz="1725" b="1">
-                          <a:solidFill>
-                            <a:srgbClr val="FFFFFF"/>
-                          </a:solidFill>
-                          <a:latin typeface="Liberation Sans"/>
-                          <a:ea typeface="Liberation Sans"/>
-                          <a:cs typeface="Liberation Sans"/>
-                        </a:rPr>
-                        <a:t>İş / tarih ve sorumlu</a:t>
-                      </a:r>
-                    </a:p>
-                  </a:txBody>
-                  <a:tcPr marL="114300" marR="95250" marT="57150" marB="57150">
-                    <a:solidFill>
-                      <a:srgbClr val="14344B"/>
-                    </a:solidFill>
-                  </a:tcPr>
-                </a:tc>
-              </a:tr>
-              <a:tr h="666750">
-                <a:tc>
-                  <a:txBody>
-                    <a:bodyPr wrap="square" anchor="ctr">
-                      <a:noAutofit/>
-                    </a:bodyPr>
-                    <a:lstStyle/>
+                        <a:rPr sz="1725" b="0">
+                          <a:solidFill>
+                            <a:srgbClr val="B43D3A"/>
+                          </a:solidFill>
+                          <a:latin typeface="Liberation Sans"/>
+                          <a:ea typeface="Liberation Sans"/>
+                          <a:cs typeface="Liberation Sans"/>
+                        </a:rPr>
+                        <a:t>Yüksek: ağ erişimi kesilebilir.</a:t>
+                      </a:r>
+                    </a:p>
                     <a:p>
                       <a:pPr algn="l"/>
                       <a:r>
-                        <a:rPr sz="1800" b="1">
-                          <a:solidFill>
-                            <a:srgbClr val="008E86"/>
-                          </a:solidFill>
-                          <a:latin typeface="Liberation Sans"/>
-                          <a:ea typeface="Liberation Sans"/>
-                          <a:cs typeface="Liberation Sans"/>
-                        </a:rPr>
-                        <a:t>Yapıldı</a:t>
-                      </a:r>
-                    </a:p>
-                  </a:txBody>
-                  <a:tcPr marL="114300" marR="95250" marT="57150" marB="57150">
-                    <a:solidFill>
-                      <a:srgbClr val="DDF2EE"/>
-                    </a:solidFill>
-                  </a:tcPr>
-                </a:tc>
-                <a:tc>
-                  <a:txBody>
-                    <a:bodyPr wrap="square" anchor="ctr">
-                      <a:noAutofit/>
-                    </a:bodyPr>
-                    <a:lstStyle/>
+                        <a:rPr sz="1725" b="0">
+                          <a:solidFill>
+                            <a:srgbClr val="B43D3A"/>
+                          </a:solidFill>
+                          <a:latin typeface="Liberation Sans"/>
+                          <a:ea typeface="Liberation Sans"/>
+                          <a:cs typeface="Liberation Sans"/>
+                        </a:rPr>
+                        <a:t>Önlem: yedek bağlantı.</a:t>
+                      </a:r>
+                    </a:p>
                     <a:p>
                       <a:pPr algn="l"/>
                       <a:r>
-                        <a:rPr sz="1800" b="0">
-                          <a:solidFill>
-                            <a:srgbClr val="273F50"/>
-                          </a:solidFill>
-                          <a:latin typeface="Liberation Sans"/>
-                          <a:ea typeface="Liberation Sans"/>
-                          <a:cs typeface="Liberation Sans"/>
-                        </a:rPr>
-                        <a:t>Tasarım onayı alındı.</a:t>
-                      </a:r>
-                    </a:p>
+                        <a:rPr sz="1725" b="0">
+                          <a:solidFill>
+                            <a:srgbClr val="B43D3A"/>
+                          </a:solidFill>
+                          <a:latin typeface="Liberation Sans"/>
+                          <a:ea typeface="Liberation Sans"/>
+                          <a:cs typeface="Liberation Sans"/>
+                        </a:rPr>
+                        <a:t>BT, 20.10</a:t>
+                      </a:r>
+                    </a:p>
+                  </a:txBody>
+                  <a:tcPr marL="76200" marR="76200" marT="28575" marB="28575">
+                    <a:solidFill>
+                      <a:srgbClr val="FBE7E6"/>
+                    </a:solidFill>
+                  </a:tcPr>
+                </a:tc>
+                <a:tc>
+                  <a:txBody>
+                    <a:bodyPr wrap="square" anchor="ctr">
+                      <a:noAutofit/>
+                    </a:bodyPr>
+                    <a:lstStyle/>
                     <a:p>
                       <a:pPr algn="l"/>
                       <a:r>
-                        <a:rPr sz="1800" b="0">
-                          <a:solidFill>
-                            <a:srgbClr val="273F50"/>
-                          </a:solidFill>
-                          <a:latin typeface="Liberation Sans"/>
-                          <a:ea typeface="Liberation Sans"/>
-                          <a:cs typeface="Liberation Sans"/>
-                        </a:rPr>
-                        <a:t>09.10, Mühendislik</a:t>
-                      </a:r>
-                    </a:p>
-                  </a:txBody>
-                  <a:tcPr marL="114300" marR="95250" marT="57150" marB="57150">
+                        <a:rPr sz="1725" b="0">
+                          <a:solidFill>
+                            <a:srgbClr val="273F50"/>
+                          </a:solidFill>
+                          <a:latin typeface="Liberation Sans"/>
+                          <a:ea typeface="Liberation Sans"/>
+                          <a:cs typeface="Liberation Sans"/>
+                        </a:rPr>
+                        <a:t>Saha keşfi tamamlandı.</a:t>
+                      </a:r>
+                    </a:p>
+                    <a:p>
+                      <a:pPr algn="l"/>
+                      <a:r>
+                        <a:rPr sz="1725" b="0">
+                          <a:solidFill>
+                            <a:srgbClr val="273F50"/>
+                          </a:solidFill>
+                          <a:latin typeface="Liberation Sans"/>
+                          <a:ea typeface="Liberation Sans"/>
+                          <a:cs typeface="Liberation Sans"/>
+                        </a:rPr>
+                        <a:t>13.10, Üretim</a:t>
+                      </a:r>
+                    </a:p>
+                  </a:txBody>
+                  <a:tcPr marL="76200" marR="76200" marT="28575" marB="28575">
                     <a:solidFill>
                       <a:srgbClr val="FFFFFF"/>
                     </a:solidFill>
                   </a:tcPr>
                 </a:tc>
-              </a:tr>
-              <a:tr h="666750">
                 <a:tc>
                   <a:txBody>
                     <a:bodyPr wrap="square" anchor="ctr">
@@ -7770,130 +8968,33 @@
                     <a:p>
                       <a:pPr algn="l"/>
                       <a:r>
-                        <a:rPr sz="1800" b="1">
-                          <a:solidFill>
-                            <a:srgbClr val="D97B0A"/>
-                          </a:solidFill>
-                          <a:latin typeface="Liberation Sans"/>
-                          <a:ea typeface="Liberation Sans"/>
-                          <a:cs typeface="Liberation Sans"/>
-                        </a:rPr>
-                        <a:t>Sıradaki</a:t>
-                      </a:r>
-                    </a:p>
-                  </a:txBody>
-                  <a:tcPr marL="114300" marR="95250" marT="57150" marB="57150">
-                    <a:solidFill>
-                      <a:srgbClr val="FFF0D6"/>
-                    </a:solidFill>
-                  </a:tcPr>
-                </a:tc>
-                <a:tc>
-                  <a:txBody>
-                    <a:bodyPr wrap="square" anchor="ctr">
-                      <a:noAutofit/>
-                    </a:bodyPr>
-                    <a:lstStyle/>
+                        <a:rPr sz="1725" b="0">
+                          <a:solidFill>
+                            <a:srgbClr val="273F50"/>
+                          </a:solidFill>
+                          <a:latin typeface="Liberation Sans"/>
+                          <a:ea typeface="Liberation Sans"/>
+                          <a:cs typeface="Liberation Sans"/>
+                        </a:rPr>
+                        <a:t>Yedek ağ bağlantısını kur.</a:t>
+                      </a:r>
+                    </a:p>
                     <a:p>
                       <a:pPr algn="l"/>
                       <a:r>
-                        <a:rPr sz="1800" b="0">
-                          <a:solidFill>
-                            <a:srgbClr val="273F50"/>
-                          </a:solidFill>
-                          <a:latin typeface="Liberation Sans"/>
-                          <a:ea typeface="Liberation Sans"/>
-                          <a:cs typeface="Liberation Sans"/>
-                        </a:rPr>
-                        <a:t>Motor siparişini kesinleştir.</a:t>
-                      </a:r>
-                    </a:p>
-                    <a:p>
-                      <a:pPr algn="l"/>
-                      <a:r>
-                        <a:rPr sz="1800" b="0">
-                          <a:solidFill>
-                            <a:srgbClr val="273F50"/>
-                          </a:solidFill>
-                          <a:latin typeface="Liberation Sans"/>
-                          <a:ea typeface="Liberation Sans"/>
-                          <a:cs typeface="Liberation Sans"/>
-                        </a:rPr>
-                        <a:t>16.10, Satın alma</a:t>
-                      </a:r>
-                    </a:p>
-                  </a:txBody>
-                  <a:tcPr marL="114300" marR="95250" marT="57150" marB="57150">
-                    <a:solidFill>
-                      <a:srgbClr val="F1F6FA"/>
-                    </a:solidFill>
-                  </a:tcPr>
-                </a:tc>
-              </a:tr>
-              <a:tr h="666750">
-                <a:tc>
-                  <a:txBody>
-                    <a:bodyPr wrap="square" anchor="ctr">
-                      <a:noAutofit/>
-                    </a:bodyPr>
-                    <a:lstStyle/>
-                    <a:p>
-                      <a:pPr algn="l"/>
-                      <a:r>
-                        <a:rPr sz="1800" b="1">
-                          <a:solidFill>
-                            <a:srgbClr val="D97B0A"/>
-                          </a:solidFill>
-                          <a:latin typeface="Liberation Sans"/>
-                          <a:ea typeface="Liberation Sans"/>
-                          <a:cs typeface="Liberation Sans"/>
-                        </a:rPr>
-                        <a:t>Sıradaki</a:t>
-                      </a:r>
-                    </a:p>
-                  </a:txBody>
-                  <a:tcPr marL="114300" marR="95250" marT="57150" marB="57150">
-                    <a:solidFill>
-                      <a:srgbClr val="FFF0D6"/>
-                    </a:solidFill>
-                  </a:tcPr>
-                </a:tc>
-                <a:tc>
-                  <a:txBody>
-                    <a:bodyPr wrap="square" anchor="ctr">
-                      <a:noAutofit/>
-                    </a:bodyPr>
-                    <a:lstStyle/>
-                    <a:p>
-                      <a:pPr algn="l"/>
-                      <a:r>
-                        <a:rPr sz="1800" b="0">
-                          <a:solidFill>
-                            <a:srgbClr val="273F50"/>
-                          </a:solidFill>
-                          <a:latin typeface="Liberation Sans"/>
-                          <a:ea typeface="Liberation Sans"/>
-                          <a:cs typeface="Liberation Sans"/>
-                        </a:rPr>
-                        <a:t>Kurulum ekibini ayır.</a:t>
-                      </a:r>
-                    </a:p>
-                    <a:p>
-                      <a:pPr algn="l"/>
-                      <a:r>
-                        <a:rPr sz="1800" b="0">
-                          <a:solidFill>
-                            <a:srgbClr val="273F50"/>
-                          </a:solidFill>
-                          <a:latin typeface="Liberation Sans"/>
-                          <a:ea typeface="Liberation Sans"/>
-                          <a:cs typeface="Liberation Sans"/>
-                        </a:rPr>
-                        <a:t>19.10, Üretim</a:t>
-                      </a:r>
-                    </a:p>
-                  </a:txBody>
-                  <a:tcPr marL="114300" marR="95250" marT="57150" marB="57150">
+                        <a:rPr sz="1725" b="0">
+                          <a:solidFill>
+                            <a:srgbClr val="273F50"/>
+                          </a:solidFill>
+                          <a:latin typeface="Liberation Sans"/>
+                          <a:ea typeface="Liberation Sans"/>
+                          <a:cs typeface="Liberation Sans"/>
+                        </a:rPr>
+                        <a:t>BT, 20.10</a:t>
+                      </a:r>
+                    </a:p>
+                  </a:txBody>
+                  <a:tcPr marL="76200" marR="76200" marT="28575" marB="28575">
                     <a:solidFill>
                       <a:srgbClr val="FFFFFF"/>
                     </a:solidFill>
